--- a/workshops/iu-ventures-ai-101/phase-1-presentation.pptx
+++ b/workshops/iu-ventures-ai-101/phase-1-presentation.pptx
@@ -5,27 +5,30 @@
     <p:sldMasterId id="2147483648" r:id="rId1"/>
   </p:sldMasterIdLst>
   <p:sldIdLst>
-    <p:sldId id="256" r:id="rId7"/>
-    <p:sldId id="257" r:id="rId8"/>
-    <p:sldId id="258" r:id="rId9"/>
-    <p:sldId id="259" r:id="rId10"/>
-    <p:sldId id="260" r:id="rId11"/>
-    <p:sldId id="261" r:id="rId12"/>
-    <p:sldId id="262" r:id="rId13"/>
-    <p:sldId id="263" r:id="rId14"/>
-    <p:sldId id="264" r:id="rId15"/>
-    <p:sldId id="265" r:id="rId16"/>
-    <p:sldId id="266" r:id="rId17"/>
-    <p:sldId id="267" r:id="rId18"/>
-    <p:sldId id="268" r:id="rId19"/>
-    <p:sldId id="269" r:id="rId20"/>
-    <p:sldId id="270" r:id="rId21"/>
-    <p:sldId id="271" r:id="rId22"/>
-    <p:sldId id="272" r:id="rId23"/>
-    <p:sldId id="273" r:id="rId24"/>
-    <p:sldId id="274" r:id="rId25"/>
+    <p:sldId id="256" r:id="rId2"/>
+    <p:sldId id="257" r:id="rId3"/>
+    <p:sldId id="258" r:id="rId4"/>
+    <p:sldId id="259" r:id="rId5"/>
+    <p:sldId id="260" r:id="rId6"/>
+    <p:sldId id="261" r:id="rId7"/>
+    <p:sldId id="262" r:id="rId8"/>
+    <p:sldId id="263" r:id="rId9"/>
+    <p:sldId id="264" r:id="rId10"/>
+    <p:sldId id="265" r:id="rId11"/>
+    <p:sldId id="266" r:id="rId12"/>
+    <p:sldId id="267" r:id="rId13"/>
+    <p:sldId id="268" r:id="rId14"/>
+    <p:sldId id="269" r:id="rId15"/>
+    <p:sldId id="270" r:id="rId16"/>
+    <p:sldId id="271" r:id="rId17"/>
+    <p:sldId id="272" r:id="rId18"/>
+    <p:sldId id="273" r:id="rId19"/>
+    <p:sldId id="274" r:id="rId20"/>
+    <p:sldId id="275" r:id="rId21"/>
+    <p:sldId id="276" r:id="rId22"/>
+    <p:sldId id="277" r:id="rId23"/>
   </p:sldIdLst>
-  <p:sldSz cx="12191695" cy="6858000" type="screen4x3"/>
+  <p:sldSz cx="12192000" cy="6858000"/>
   <p:notesSz cx="6858000" cy="9144000"/>
   <p:defaultTextStyle>
     <a:defPPr>
@@ -122,6 +125,22 @@
       </a:defRPr>
     </a:lvl9pPr>
   </p:defaultTextStyle>
+  <p:extLst>
+    <p:ext uri="{EFAFB233-063F-42B5-8137-9DF3F51BA10A}">
+      <p15:sldGuideLst xmlns:p15="http://schemas.microsoft.com/office/powerpoint/2012/main">
+        <p15:guide id="1" orient="horz" pos="2160">
+          <p15:clr>
+            <a:srgbClr val="A4A3A4"/>
+          </p15:clr>
+        </p15:guide>
+        <p15:guide id="2" pos="2880">
+          <p15:clr>
+            <a:srgbClr val="A4A3A4"/>
+          </p15:clr>
+        </p15:guide>
+      </p15:sldGuideLst>
+    </p:ext>
+  </p:extLst>
 </p:presentation>
 </file>
 
@@ -163,10 +182,9 @@
           <a:lstStyle/>
           <a:p>
             <a:r>
-              <a:rPr lang="en-US" smtClean="0"/>
+              <a:rPr lang="en-US"/>
               <a:t>Click to edit Master title style</a:t>
             </a:r>
-            <a:endParaRPr lang="en-US"/>
           </a:p>
         </p:txBody>
       </p:sp>
@@ -282,10 +300,9 @@
           </a:lstStyle>
           <a:p>
             <a:r>
-              <a:rPr lang="en-US" smtClean="0"/>
+              <a:rPr lang="en-US"/>
               <a:t>Click to edit Master subtitle style</a:t>
             </a:r>
-            <a:endParaRPr lang="en-US"/>
           </a:p>
         </p:txBody>
       </p:sp>
@@ -306,7 +323,7 @@
           <a:p>
             <a:fld id="{5BCAD085-E8A6-8845-BD4E-CB4CCA059FC4}" type="datetimeFigureOut">
               <a:rPr lang="en-US" smtClean="0"/>
-              <a:t>1/27/13</a:t>
+              <a:t>4/16/26</a:t>
             </a:fld>
             <a:endParaRPr lang="en-US"/>
           </a:p>
@@ -400,10 +417,9 @@
           <a:lstStyle/>
           <a:p>
             <a:r>
-              <a:rPr lang="en-US" smtClean="0"/>
+              <a:rPr lang="en-US"/>
               <a:t>Click to edit Master title style</a:t>
             </a:r>
-            <a:endParaRPr lang="en-US"/>
           </a:p>
         </p:txBody>
       </p:sp>
@@ -424,38 +440,37 @@
           <a:p>
             <a:pPr lvl="0"/>
             <a:r>
-              <a:rPr lang="en-US" smtClean="0"/>
+              <a:rPr lang="en-US"/>
               <a:t>Click to edit Master text styles</a:t>
             </a:r>
           </a:p>
           <a:p>
             <a:pPr lvl="1"/>
             <a:r>
-              <a:rPr lang="en-US" smtClean="0"/>
+              <a:rPr lang="en-US"/>
               <a:t>Second level</a:t>
             </a:r>
           </a:p>
           <a:p>
             <a:pPr lvl="2"/>
             <a:r>
-              <a:rPr lang="en-US" smtClean="0"/>
+              <a:rPr lang="en-US"/>
               <a:t>Third level</a:t>
             </a:r>
           </a:p>
           <a:p>
             <a:pPr lvl="3"/>
             <a:r>
-              <a:rPr lang="en-US" smtClean="0"/>
+              <a:rPr lang="en-US"/>
               <a:t>Fourth level</a:t>
             </a:r>
           </a:p>
           <a:p>
             <a:pPr lvl="4"/>
             <a:r>
-              <a:rPr lang="en-US" smtClean="0"/>
+              <a:rPr lang="en-US"/>
               <a:t>Fifth level</a:t>
             </a:r>
-            <a:endParaRPr lang="en-US"/>
           </a:p>
         </p:txBody>
       </p:sp>
@@ -476,7 +491,7 @@
           <a:p>
             <a:fld id="{5BCAD085-E8A6-8845-BD4E-CB4CCA059FC4}" type="datetimeFigureOut">
               <a:rPr lang="en-US" smtClean="0"/>
-              <a:t>1/27/13</a:t>
+              <a:t>4/16/26</a:t>
             </a:fld>
             <a:endParaRPr lang="en-US"/>
           </a:p>
@@ -575,10 +590,9 @@
           <a:lstStyle/>
           <a:p>
             <a:r>
-              <a:rPr lang="en-US" smtClean="0"/>
+              <a:rPr lang="en-US"/>
               <a:t>Click to edit Master title style</a:t>
             </a:r>
-            <a:endParaRPr lang="en-US"/>
           </a:p>
         </p:txBody>
       </p:sp>
@@ -604,38 +618,37 @@
           <a:p>
             <a:pPr lvl="0"/>
             <a:r>
-              <a:rPr lang="en-US" smtClean="0"/>
+              <a:rPr lang="en-US"/>
               <a:t>Click to edit Master text styles</a:t>
             </a:r>
           </a:p>
           <a:p>
             <a:pPr lvl="1"/>
             <a:r>
-              <a:rPr lang="en-US" smtClean="0"/>
+              <a:rPr lang="en-US"/>
               <a:t>Second level</a:t>
             </a:r>
           </a:p>
           <a:p>
             <a:pPr lvl="2"/>
             <a:r>
-              <a:rPr lang="en-US" smtClean="0"/>
+              <a:rPr lang="en-US"/>
               <a:t>Third level</a:t>
             </a:r>
           </a:p>
           <a:p>
             <a:pPr lvl="3"/>
             <a:r>
-              <a:rPr lang="en-US" smtClean="0"/>
+              <a:rPr lang="en-US"/>
               <a:t>Fourth level</a:t>
             </a:r>
           </a:p>
           <a:p>
             <a:pPr lvl="4"/>
             <a:r>
-              <a:rPr lang="en-US" smtClean="0"/>
+              <a:rPr lang="en-US"/>
               <a:t>Fifth level</a:t>
             </a:r>
-            <a:endParaRPr lang="en-US"/>
           </a:p>
         </p:txBody>
       </p:sp>
@@ -656,7 +669,7 @@
           <a:p>
             <a:fld id="{5BCAD085-E8A6-8845-BD4E-CB4CCA059FC4}" type="datetimeFigureOut">
               <a:rPr lang="en-US" smtClean="0"/>
-              <a:t>1/27/13</a:t>
+              <a:t>4/16/26</a:t>
             </a:fld>
             <a:endParaRPr lang="en-US"/>
           </a:p>
@@ -750,10 +763,9 @@
           <a:lstStyle/>
           <a:p>
             <a:r>
-              <a:rPr lang="en-US" smtClean="0"/>
+              <a:rPr lang="en-US"/>
               <a:t>Click to edit Master title style</a:t>
             </a:r>
-            <a:endParaRPr lang="en-US"/>
           </a:p>
         </p:txBody>
       </p:sp>
@@ -774,38 +786,37 @@
           <a:p>
             <a:pPr lvl="0"/>
             <a:r>
-              <a:rPr lang="en-US" smtClean="0"/>
+              <a:rPr lang="en-US"/>
               <a:t>Click to edit Master text styles</a:t>
             </a:r>
           </a:p>
           <a:p>
             <a:pPr lvl="1"/>
             <a:r>
-              <a:rPr lang="en-US" smtClean="0"/>
+              <a:rPr lang="en-US"/>
               <a:t>Second level</a:t>
             </a:r>
           </a:p>
           <a:p>
             <a:pPr lvl="2"/>
             <a:r>
-              <a:rPr lang="en-US" smtClean="0"/>
+              <a:rPr lang="en-US"/>
               <a:t>Third level</a:t>
             </a:r>
           </a:p>
           <a:p>
             <a:pPr lvl="3"/>
             <a:r>
-              <a:rPr lang="en-US" smtClean="0"/>
+              <a:rPr lang="en-US"/>
               <a:t>Fourth level</a:t>
             </a:r>
           </a:p>
           <a:p>
             <a:pPr lvl="4"/>
             <a:r>
-              <a:rPr lang="en-US" smtClean="0"/>
+              <a:rPr lang="en-US"/>
               <a:t>Fifth level</a:t>
             </a:r>
-            <a:endParaRPr lang="en-US"/>
           </a:p>
         </p:txBody>
       </p:sp>
@@ -826,7 +837,7 @@
           <a:p>
             <a:fld id="{5BCAD085-E8A6-8845-BD4E-CB4CCA059FC4}" type="datetimeFigureOut">
               <a:rPr lang="en-US" smtClean="0"/>
-              <a:t>1/27/13</a:t>
+              <a:t>4/16/26</a:t>
             </a:fld>
             <a:endParaRPr lang="en-US"/>
           </a:p>
@@ -929,10 +940,9 @@
           </a:lstStyle>
           <a:p>
             <a:r>
-              <a:rPr lang="en-US" smtClean="0"/>
+              <a:rPr lang="en-US"/>
               <a:t>Click to edit Master title style</a:t>
             </a:r>
-            <a:endParaRPr lang="en-US"/>
           </a:p>
         </p:txBody>
       </p:sp>
@@ -1049,7 +1059,7 @@
           <a:p>
             <a:pPr lvl="0"/>
             <a:r>
-              <a:rPr lang="en-US" smtClean="0"/>
+              <a:rPr lang="en-US"/>
               <a:t>Click to edit Master text styles</a:t>
             </a:r>
           </a:p>
@@ -1072,7 +1082,7 @@
           <a:p>
             <a:fld id="{5BCAD085-E8A6-8845-BD4E-CB4CCA059FC4}" type="datetimeFigureOut">
               <a:rPr lang="en-US" smtClean="0"/>
-              <a:t>1/27/13</a:t>
+              <a:t>4/16/26</a:t>
             </a:fld>
             <a:endParaRPr lang="en-US"/>
           </a:p>
@@ -1166,10 +1176,9 @@
           <a:lstStyle/>
           <a:p>
             <a:r>
-              <a:rPr lang="en-US" smtClean="0"/>
+              <a:rPr lang="en-US"/>
               <a:t>Click to edit Master title style</a:t>
             </a:r>
-            <a:endParaRPr lang="en-US"/>
           </a:p>
         </p:txBody>
       </p:sp>
@@ -1223,38 +1232,37 @@
           <a:p>
             <a:pPr lvl="0"/>
             <a:r>
-              <a:rPr lang="en-US" smtClean="0"/>
+              <a:rPr lang="en-US"/>
               <a:t>Click to edit Master text styles</a:t>
             </a:r>
           </a:p>
           <a:p>
             <a:pPr lvl="1"/>
             <a:r>
-              <a:rPr lang="en-US" smtClean="0"/>
+              <a:rPr lang="en-US"/>
               <a:t>Second level</a:t>
             </a:r>
           </a:p>
           <a:p>
             <a:pPr lvl="2"/>
             <a:r>
-              <a:rPr lang="en-US" smtClean="0"/>
+              <a:rPr lang="en-US"/>
               <a:t>Third level</a:t>
             </a:r>
           </a:p>
           <a:p>
             <a:pPr lvl="3"/>
             <a:r>
-              <a:rPr lang="en-US" smtClean="0"/>
+              <a:rPr lang="en-US"/>
               <a:t>Fourth level</a:t>
             </a:r>
           </a:p>
           <a:p>
             <a:pPr lvl="4"/>
             <a:r>
-              <a:rPr lang="en-US" smtClean="0"/>
+              <a:rPr lang="en-US"/>
               <a:t>Fifth level</a:t>
             </a:r>
-            <a:endParaRPr lang="en-US"/>
           </a:p>
         </p:txBody>
       </p:sp>
@@ -1308,38 +1316,37 @@
           <a:p>
             <a:pPr lvl="0"/>
             <a:r>
-              <a:rPr lang="en-US" smtClean="0"/>
+              <a:rPr lang="en-US"/>
               <a:t>Click to edit Master text styles</a:t>
             </a:r>
           </a:p>
           <a:p>
             <a:pPr lvl="1"/>
             <a:r>
-              <a:rPr lang="en-US" smtClean="0"/>
+              <a:rPr lang="en-US"/>
               <a:t>Second level</a:t>
             </a:r>
           </a:p>
           <a:p>
             <a:pPr lvl="2"/>
             <a:r>
-              <a:rPr lang="en-US" smtClean="0"/>
+              <a:rPr lang="en-US"/>
               <a:t>Third level</a:t>
             </a:r>
           </a:p>
           <a:p>
             <a:pPr lvl="3"/>
             <a:r>
-              <a:rPr lang="en-US" smtClean="0"/>
+              <a:rPr lang="en-US"/>
               <a:t>Fourth level</a:t>
             </a:r>
           </a:p>
           <a:p>
             <a:pPr lvl="4"/>
             <a:r>
-              <a:rPr lang="en-US" smtClean="0"/>
+              <a:rPr lang="en-US"/>
               <a:t>Fifth level</a:t>
             </a:r>
-            <a:endParaRPr lang="en-US"/>
           </a:p>
         </p:txBody>
       </p:sp>
@@ -1360,7 +1367,7 @@
           <a:p>
             <a:fld id="{5BCAD085-E8A6-8845-BD4E-CB4CCA059FC4}" type="datetimeFigureOut">
               <a:rPr lang="en-US" smtClean="0"/>
-              <a:t>1/27/13</a:t>
+              <a:t>4/16/26</a:t>
             </a:fld>
             <a:endParaRPr lang="en-US"/>
           </a:p>
@@ -1458,10 +1465,9 @@
           </a:lstStyle>
           <a:p>
             <a:r>
-              <a:rPr lang="en-US" smtClean="0"/>
+              <a:rPr lang="en-US"/>
               <a:t>Click to edit Master title style</a:t>
             </a:r>
-            <a:endParaRPr lang="en-US"/>
           </a:p>
         </p:txBody>
       </p:sp>
@@ -1524,7 +1530,7 @@
           <a:p>
             <a:pPr lvl="0"/>
             <a:r>
-              <a:rPr lang="en-US" smtClean="0"/>
+              <a:rPr lang="en-US"/>
               <a:t>Click to edit Master text styles</a:t>
             </a:r>
           </a:p>
@@ -1580,38 +1586,37 @@
           <a:p>
             <a:pPr lvl="0"/>
             <a:r>
-              <a:rPr lang="en-US" smtClean="0"/>
+              <a:rPr lang="en-US"/>
               <a:t>Click to edit Master text styles</a:t>
             </a:r>
           </a:p>
           <a:p>
             <a:pPr lvl="1"/>
             <a:r>
-              <a:rPr lang="en-US" smtClean="0"/>
+              <a:rPr lang="en-US"/>
               <a:t>Second level</a:t>
             </a:r>
           </a:p>
           <a:p>
             <a:pPr lvl="2"/>
             <a:r>
-              <a:rPr lang="en-US" smtClean="0"/>
+              <a:rPr lang="en-US"/>
               <a:t>Third level</a:t>
             </a:r>
           </a:p>
           <a:p>
             <a:pPr lvl="3"/>
             <a:r>
-              <a:rPr lang="en-US" smtClean="0"/>
+              <a:rPr lang="en-US"/>
               <a:t>Fourth level</a:t>
             </a:r>
           </a:p>
           <a:p>
             <a:pPr lvl="4"/>
             <a:r>
-              <a:rPr lang="en-US" smtClean="0"/>
+              <a:rPr lang="en-US"/>
               <a:t>Fifth level</a:t>
             </a:r>
-            <a:endParaRPr lang="en-US"/>
           </a:p>
         </p:txBody>
       </p:sp>
@@ -1674,7 +1679,7 @@
           <a:p>
             <a:pPr lvl="0"/>
             <a:r>
-              <a:rPr lang="en-US" smtClean="0"/>
+              <a:rPr lang="en-US"/>
               <a:t>Click to edit Master text styles</a:t>
             </a:r>
           </a:p>
@@ -1730,38 +1735,37 @@
           <a:p>
             <a:pPr lvl="0"/>
             <a:r>
-              <a:rPr lang="en-US" smtClean="0"/>
+              <a:rPr lang="en-US"/>
               <a:t>Click to edit Master text styles</a:t>
             </a:r>
           </a:p>
           <a:p>
             <a:pPr lvl="1"/>
             <a:r>
-              <a:rPr lang="en-US" smtClean="0"/>
+              <a:rPr lang="en-US"/>
               <a:t>Second level</a:t>
             </a:r>
           </a:p>
           <a:p>
             <a:pPr lvl="2"/>
             <a:r>
-              <a:rPr lang="en-US" smtClean="0"/>
+              <a:rPr lang="en-US"/>
               <a:t>Third level</a:t>
             </a:r>
           </a:p>
           <a:p>
             <a:pPr lvl="3"/>
             <a:r>
-              <a:rPr lang="en-US" smtClean="0"/>
+              <a:rPr lang="en-US"/>
               <a:t>Fourth level</a:t>
             </a:r>
           </a:p>
           <a:p>
             <a:pPr lvl="4"/>
             <a:r>
-              <a:rPr lang="en-US" smtClean="0"/>
+              <a:rPr lang="en-US"/>
               <a:t>Fifth level</a:t>
             </a:r>
-            <a:endParaRPr lang="en-US"/>
           </a:p>
         </p:txBody>
       </p:sp>
@@ -1782,7 +1786,7 @@
           <a:p>
             <a:fld id="{5BCAD085-E8A6-8845-BD4E-CB4CCA059FC4}" type="datetimeFigureOut">
               <a:rPr lang="en-US" smtClean="0"/>
-              <a:t>1/27/13</a:t>
+              <a:t>4/16/26</a:t>
             </a:fld>
             <a:endParaRPr lang="en-US"/>
           </a:p>
@@ -1876,10 +1880,9 @@
           <a:lstStyle/>
           <a:p>
             <a:r>
-              <a:rPr lang="en-US" smtClean="0"/>
+              <a:rPr lang="en-US"/>
               <a:t>Click to edit Master title style</a:t>
             </a:r>
-            <a:endParaRPr lang="en-US"/>
           </a:p>
         </p:txBody>
       </p:sp>
@@ -1900,7 +1903,7 @@
           <a:p>
             <a:fld id="{5BCAD085-E8A6-8845-BD4E-CB4CCA059FC4}" type="datetimeFigureOut">
               <a:rPr lang="en-US" smtClean="0"/>
-              <a:t>1/27/13</a:t>
+              <a:t>4/16/26</a:t>
             </a:fld>
             <a:endParaRPr lang="en-US"/>
           </a:p>
@@ -1995,7 +1998,7 @@
           <a:p>
             <a:fld id="{5BCAD085-E8A6-8845-BD4E-CB4CCA059FC4}" type="datetimeFigureOut">
               <a:rPr lang="en-US" smtClean="0"/>
-              <a:t>1/27/13</a:t>
+              <a:t>4/16/26</a:t>
             </a:fld>
             <a:endParaRPr lang="en-US"/>
           </a:p>
@@ -2098,10 +2101,9 @@
           </a:lstStyle>
           <a:p>
             <a:r>
-              <a:rPr lang="en-US" smtClean="0"/>
+              <a:rPr lang="en-US"/>
               <a:t>Click to edit Master title style</a:t>
             </a:r>
-            <a:endParaRPr lang="en-US"/>
           </a:p>
         </p:txBody>
       </p:sp>
@@ -2155,38 +2157,37 @@
           <a:p>
             <a:pPr lvl="0"/>
             <a:r>
-              <a:rPr lang="en-US" smtClean="0"/>
+              <a:rPr lang="en-US"/>
               <a:t>Click to edit Master text styles</a:t>
             </a:r>
           </a:p>
           <a:p>
             <a:pPr lvl="1"/>
             <a:r>
-              <a:rPr lang="en-US" smtClean="0"/>
+              <a:rPr lang="en-US"/>
               <a:t>Second level</a:t>
             </a:r>
           </a:p>
           <a:p>
             <a:pPr lvl="2"/>
             <a:r>
-              <a:rPr lang="en-US" smtClean="0"/>
+              <a:rPr lang="en-US"/>
               <a:t>Third level</a:t>
             </a:r>
           </a:p>
           <a:p>
             <a:pPr lvl="3"/>
             <a:r>
-              <a:rPr lang="en-US" smtClean="0"/>
+              <a:rPr lang="en-US"/>
               <a:t>Fourth level</a:t>
             </a:r>
           </a:p>
           <a:p>
             <a:pPr lvl="4"/>
             <a:r>
-              <a:rPr lang="en-US" smtClean="0"/>
+              <a:rPr lang="en-US"/>
               <a:t>Fifth level</a:t>
             </a:r>
-            <a:endParaRPr lang="en-US"/>
           </a:p>
         </p:txBody>
       </p:sp>
@@ -2249,7 +2250,7 @@
           <a:p>
             <a:pPr lvl="0"/>
             <a:r>
-              <a:rPr lang="en-US" smtClean="0"/>
+              <a:rPr lang="en-US"/>
               <a:t>Click to edit Master text styles</a:t>
             </a:r>
           </a:p>
@@ -2272,7 +2273,7 @@
           <a:p>
             <a:fld id="{5BCAD085-E8A6-8845-BD4E-CB4CCA059FC4}" type="datetimeFigureOut">
               <a:rPr lang="en-US" smtClean="0"/>
-              <a:t>1/27/13</a:t>
+              <a:t>4/16/26</a:t>
             </a:fld>
             <a:endParaRPr lang="en-US"/>
           </a:p>
@@ -2375,10 +2376,9 @@
           </a:lstStyle>
           <a:p>
             <a:r>
-              <a:rPr lang="en-US" smtClean="0"/>
+              <a:rPr lang="en-US"/>
               <a:t>Click to edit Master title style</a:t>
             </a:r>
-            <a:endParaRPr lang="en-US"/>
           </a:p>
         </p:txBody>
       </p:sp>
@@ -2502,7 +2502,7 @@
           <a:p>
             <a:pPr lvl="0"/>
             <a:r>
-              <a:rPr lang="en-US" smtClean="0"/>
+              <a:rPr lang="en-US"/>
               <a:t>Click to edit Master text styles</a:t>
             </a:r>
           </a:p>
@@ -2525,7 +2525,7 @@
           <a:p>
             <a:fld id="{5BCAD085-E8A6-8845-BD4E-CB4CCA059FC4}" type="datetimeFigureOut">
               <a:rPr lang="en-US" smtClean="0"/>
-              <a:t>1/27/13</a:t>
+              <a:t>4/16/26</a:t>
             </a:fld>
             <a:endParaRPr lang="en-US"/>
           </a:p>
@@ -2634,10 +2634,9 @@
           <a:lstStyle/>
           <a:p>
             <a:r>
-              <a:rPr lang="en-US" smtClean="0"/>
+              <a:rPr lang="en-US"/>
               <a:t>Click to edit Master title style</a:t>
             </a:r>
-            <a:endParaRPr lang="en-US"/>
           </a:p>
         </p:txBody>
       </p:sp>
@@ -2668,38 +2667,37 @@
           <a:p>
             <a:pPr lvl="0"/>
             <a:r>
-              <a:rPr lang="en-US" smtClean="0"/>
+              <a:rPr lang="en-US"/>
               <a:t>Click to edit Master text styles</a:t>
             </a:r>
           </a:p>
           <a:p>
             <a:pPr lvl="1"/>
             <a:r>
-              <a:rPr lang="en-US" smtClean="0"/>
+              <a:rPr lang="en-US"/>
               <a:t>Second level</a:t>
             </a:r>
           </a:p>
           <a:p>
             <a:pPr lvl="2"/>
             <a:r>
-              <a:rPr lang="en-US" smtClean="0"/>
+              <a:rPr lang="en-US"/>
               <a:t>Third level</a:t>
             </a:r>
           </a:p>
           <a:p>
             <a:pPr lvl="3"/>
             <a:r>
-              <a:rPr lang="en-US" smtClean="0"/>
+              <a:rPr lang="en-US"/>
               <a:t>Fourth level</a:t>
             </a:r>
           </a:p>
           <a:p>
             <a:pPr lvl="4"/>
             <a:r>
-              <a:rPr lang="en-US" smtClean="0"/>
+              <a:rPr lang="en-US"/>
               <a:t>Fifth level</a:t>
             </a:r>
-            <a:endParaRPr lang="en-US"/>
           </a:p>
         </p:txBody>
       </p:sp>
@@ -2738,7 +2736,7 @@
           <a:p>
             <a:fld id="{5BCAD085-E8A6-8845-BD4E-CB4CCA059FC4}" type="datetimeFigureOut">
               <a:rPr lang="en-US" smtClean="0"/>
-              <a:t>1/27/13</a:t>
+              <a:t>4/16/26</a:t>
             </a:fld>
             <a:endParaRPr lang="en-US"/>
           </a:p>
@@ -3097,7 +3095,7 @@
 </file>
 
 <file path=ppt/slides/slide1.xml><?xml version="1.0" encoding="utf-8"?>
-<p:sld xmlns:a="http://schemas.openxmlformats.org/drawingml/2006/main" xmlns:p="http://schemas.openxmlformats.org/presentationml/2006/main" xmlns:r="http://schemas.openxmlformats.org/officeDocument/2006/relationships">
+<p:sld xmlns:a="http://schemas.openxmlformats.org/drawingml/2006/main" xmlns:r="http://schemas.openxmlformats.org/officeDocument/2006/relationships" xmlns:p="http://schemas.openxmlformats.org/presentationml/2006/main">
   <p:cSld>
     <p:bg>
       <p:bgPr>
@@ -3113,7 +3111,14 @@
         <p:cNvGrpSpPr/>
         <p:nvPr/>
       </p:nvGrpSpPr>
-      <p:grpSpPr/>
+      <p:grpSpPr>
+        <a:xfrm>
+          <a:off x="0" y="0"/>
+          <a:ext cx="0" cy="0"/>
+          <a:chOff x="0" y="0"/>
+          <a:chExt cx="0" cy="0"/>
+        </a:xfrm>
+      </p:grpSpPr>
       <p:sp>
         <p:nvSpPr>
           <p:cNvPr id="2" name="TextBox 1"/>
@@ -3228,7 +3233,7 @@
 </file>
 
 <file path=ppt/slides/slide10.xml><?xml version="1.0" encoding="utf-8"?>
-<p:sld xmlns:a="http://schemas.openxmlformats.org/drawingml/2006/main" xmlns:p="http://schemas.openxmlformats.org/presentationml/2006/main" xmlns:r="http://schemas.openxmlformats.org/officeDocument/2006/relationships">
+<p:sld xmlns:a="http://schemas.openxmlformats.org/drawingml/2006/main" xmlns:r="http://schemas.openxmlformats.org/officeDocument/2006/relationships" xmlns:p="http://schemas.openxmlformats.org/presentationml/2006/main">
   <p:cSld>
     <p:bg>
       <p:bgPr>
@@ -3244,45 +3249,17 @@
         <p:cNvGrpSpPr/>
         <p:nvPr/>
       </p:nvGrpSpPr>
-      <p:grpSpPr/>
+      <p:grpSpPr>
+        <a:xfrm>
+          <a:off x="0" y="0"/>
+          <a:ext cx="0" cy="0"/>
+          <a:chOff x="0" y="0"/>
+          <a:chExt cx="0" cy="0"/>
+        </a:xfrm>
+      </p:grpSpPr>
       <p:sp>
         <p:nvSpPr>
           <p:cNvPr id="2" name="TextBox 1"/>
-          <p:cNvSpPr txBox="1"/>
-          <p:nvPr/>
-        </p:nvSpPr>
-        <p:spPr>
-          <a:xfrm>
-            <a:off x="548640" y="274320"/>
-            <a:ext cx="2743200" cy="457200"/>
-          </a:xfrm>
-          <a:prstGeom prst="rect">
-            <a:avLst/>
-          </a:prstGeom>
-          <a:noFill/>
-        </p:spPr>
-        <p:txBody>
-          <a:bodyPr wrap="square">
-            <a:spAutoFit/>
-          </a:bodyPr>
-          <a:lstStyle/>
-          <a:p>
-            <a:pPr algn="l"/>
-            <a:r>
-              <a:rPr sz="1500" b="1" i="0">
-                <a:solidFill>
-                  <a:srgbClr val="C9913A"/>
-                </a:solidFill>
-                <a:latin typeface="Calibri"/>
-              </a:rPr>
-              <a:t>Stage 1</a:t>
-            </a:r>
-          </a:p>
-        </p:txBody>
-      </p:sp>
-      <p:sp>
-        <p:nvSpPr>
-          <p:cNvPr id="3" name="TextBox 2"/>
           <p:cNvSpPr txBox="1"/>
           <p:nvPr/>
         </p:nvSpPr>
@@ -3310,14 +3287,14 @@
                 </a:solidFill>
                 <a:latin typeface="Calibri"/>
               </a:rPr>
-              <a:t>You explain yourself every time.</a:t>
-            </a:r>
-          </a:p>
-        </p:txBody>
-      </p:sp>
-      <p:sp>
-        <p:nvSpPr>
-          <p:cNvPr id="4" name="Rectangle 3"/>
+              <a:t>Olivia -- asking Claude how to approach it before you start.</a:t>
+            </a:r>
+          </a:p>
+        </p:txBody>
+      </p:sp>
+      <p:sp>
+        <p:nvSpPr>
+          <p:cNvPr id="3" name="Rectangle 2"/>
           <p:cNvSpPr/>
           <p:nvPr/>
         </p:nvSpPr>
@@ -3355,6 +3332,46 @@
           <a:lstStyle/>
           <a:p>
             <a:pPr algn="ctr"/>
+            <a:endParaRPr/>
+          </a:p>
+        </p:txBody>
+      </p:sp>
+      <p:sp>
+        <p:nvSpPr>
+          <p:cNvPr id="4" name="TextBox 3"/>
+          <p:cNvSpPr txBox="1"/>
+          <p:nvPr/>
+        </p:nvSpPr>
+        <p:spPr>
+          <a:xfrm>
+            <a:off x="548640" y="1371600"/>
+            <a:ext cx="11064240" cy="457200"/>
+          </a:xfrm>
+          <a:prstGeom prst="rect">
+            <a:avLst/>
+          </a:prstGeom>
+          <a:noFill/>
+        </p:spPr>
+        <p:txBody>
+          <a:bodyPr wrap="square">
+            <a:spAutoFit/>
+          </a:bodyPr>
+          <a:lstStyle/>
+          <a:p>
+            <a:pPr>
+              <a:spcBef>
+                <a:spcPts val="0"/>
+              </a:spcBef>
+            </a:pPr>
+            <a:r>
+              <a:rPr sz="1900" b="0" i="0">
+                <a:solidFill>
+                  <a:srgbClr val="0D2B4E"/>
+                </a:solidFill>
+                <a:latin typeface="Calibri"/>
+              </a:rPr>
+              <a:t>You spend 15 to 20 hours a week on diligence. Here is what the prompt looks like before you write anything:</a:t>
+            </a:r>
           </a:p>
         </p:txBody>
       </p:sp>
@@ -3366,8 +3383,47 @@
         </p:nvSpPr>
         <p:spPr>
           <a:xfrm>
-            <a:off x="548640" y="1371600"/>
-            <a:ext cx="11064240" cy="5029200"/>
+            <a:off x="548640" y="1920240"/>
+            <a:ext cx="11064240" cy="1371600"/>
+          </a:xfrm>
+          <a:prstGeom prst="rect">
+            <a:avLst/>
+          </a:prstGeom>
+          <a:noFill/>
+        </p:spPr>
+        <p:txBody>
+          <a:bodyPr wrap="square">
+            <a:spAutoFit/>
+          </a:bodyPr>
+          <a:lstStyle/>
+          <a:p>
+            <a:pPr>
+              <a:spcBef>
+                <a:spcPts val="600"/>
+              </a:spcBef>
+            </a:pPr>
+            <a:r>
+              <a:rPr sz="1800" b="0" i="1">
+                <a:solidFill>
+                  <a:srgbClr val="88AACC"/>
+                </a:solidFill>
+                <a:latin typeface="Calibri"/>
+              </a:rPr>
+              <a:t>"I need to produce a 10-12 page diligence report on an early-stage college athletics software startup. I have their pitch deck, their website, and some press coverage. Before I start, what is the best approach to structuring this? What sections should I cover? What are the most common gaps analysts miss in this kind of company at this stage? And what external research should I prioritize first?"</a:t>
+            </a:r>
+          </a:p>
+        </p:txBody>
+      </p:sp>
+      <p:sp>
+        <p:nvSpPr>
+          <p:cNvPr id="6" name="TextBox 5"/>
+          <p:cNvSpPr txBox="1"/>
+          <p:nvPr/>
+        </p:nvSpPr>
+        <p:spPr>
+          <a:xfrm>
+            <a:off x="548640" y="3429000"/>
+            <a:ext cx="11064240" cy="2286000"/>
           </a:xfrm>
           <a:prstGeom prst="rect">
             <a:avLst/>
@@ -3388,11 +3444,27 @@
             <a:r>
               <a:rPr sz="1900" b="0" i="0">
                 <a:solidFill>
+                  <a:srgbClr val="6B7280"/>
+                </a:solidFill>
+                <a:latin typeface="Calibri"/>
+              </a:rPr>
+              <a:t>Claude comes back with: a structured approach, a suggested order of operations, the questions most investors get wrong at this stage, and specific things to look for in the materials.</a:t>
+            </a:r>
+          </a:p>
+          <a:p>
+            <a:pPr>
+              <a:spcBef>
+                <a:spcPts val="600"/>
+              </a:spcBef>
+            </a:pPr>
+            <a:r>
+              <a:rPr sz="1900" b="1" i="0">
+                <a:solidFill>
                   <a:srgbClr val="0D2B4E"/>
                 </a:solidFill>
                 <a:latin typeface="Calibri"/>
               </a:rPr>
-              <a:t>You write structured prompts. You set context manually at the start of every conversation.</a:t>
+              <a:t>You have not produced a single sentence of the report yet.</a:t>
             </a:r>
           </a:p>
           <a:p>
@@ -3408,87 +3480,7 @@
                 </a:solidFill>
                 <a:latin typeface="Calibri"/>
               </a:rPr>
-              <a:t>This works. Stage 1 prompts done well produce genuinely good output -- significantly better than no AI. The outputs are real. The time savings are real.</a:t>
-            </a:r>
-          </a:p>
-          <a:p>
-            <a:pPr>
-              <a:spcBef>
-                <a:spcPts val="600"/>
-              </a:spcBef>
-            </a:pPr>
-            <a:r>
-              <a:rPr sz="1900" b="0" i="0">
-                <a:solidFill>
-                  <a:srgbClr val="6B7280"/>
-                </a:solidFill>
-                <a:latin typeface="Calibri"/>
-              </a:rPr>
-              <a:t>But it is slower than it needs to be. Every session you risk forgetting something important. The quality of output depends on how complete your prompt is -- and you are writing that prompt from scratch, every time.</a:t>
-            </a:r>
-          </a:p>
-          <a:p>
-            <a:pPr>
-              <a:spcBef>
-                <a:spcPts val="200"/>
-              </a:spcBef>
-            </a:pPr>
-            <a:r>
-              <a:rPr sz="600" b="0" i="0">
-                <a:solidFill>
-                  <a:srgbClr val="0D2B4E"/>
-                </a:solidFill>
-                <a:latin typeface="Calibri"/>
-              </a:rPr>
-              <a:t/>
-            </a:r>
-          </a:p>
-          <a:p>
-            <a:pPr>
-              <a:spcBef>
-                <a:spcPts val="600"/>
-              </a:spcBef>
-            </a:pPr>
-            <a:r>
-              <a:rPr sz="1800" b="1" i="0">
-                <a:solidFill>
-                  <a:srgbClr val="0D2B4E"/>
-                </a:solidFill>
-                <a:latin typeface="Calibri"/>
-              </a:rPr>
-              <a:t>Example of a Stage 1 prompt:</a:t>
-            </a:r>
-          </a:p>
-          <a:p>
-            <a:pPr>
-              <a:spcBef>
-                <a:spcPts val="600"/>
-              </a:spcBef>
-            </a:pPr>
-            <a:r>
-              <a:rPr sz="1700" b="0" i="1">
-                <a:solidFill>
-                  <a:srgbClr val="88AACC"/>
-                </a:solidFill>
-                <a:latin typeface="Calibri"/>
-              </a:rPr>
-              <a:t>"I am the Executive Director of the IU Angel Network, Indiana University's angel investment vehicle. I evaluate seed-stage companies and produce 10-12 page diligence reports focused on Indiana-affiliated founders. I need to..."</a:t>
-            </a:r>
-          </a:p>
-          <a:p>
-            <a:pPr>
-              <a:spcBef>
-                <a:spcPts val="600"/>
-              </a:spcBef>
-            </a:pPr>
-            <a:r>
-              <a:rPr sz="1900" b="1" i="0">
-                <a:solidFill>
-                  <a:srgbClr val="C9913A"/>
-                </a:solidFill>
-                <a:latin typeface="Calibri"/>
-              </a:rPr>
-              <a:t>Training wheels. A real phase. Not the destination.</a:t>
+              <a:t>You now have a better framework than the one you started with -- in under a minute. This is just-in-time learning applied to your actual job.</a:t>
             </a:r>
           </a:p>
         </p:txBody>
@@ -3502,7 +3494,7 @@
 </file>
 
 <file path=ppt/slides/slide11.xml><?xml version="1.0" encoding="utf-8"?>
-<p:sld xmlns:a="http://schemas.openxmlformats.org/drawingml/2006/main" xmlns:p="http://schemas.openxmlformats.org/presentationml/2006/main" xmlns:r="http://schemas.openxmlformats.org/officeDocument/2006/relationships">
+<p:sld xmlns:a="http://schemas.openxmlformats.org/drawingml/2006/main" xmlns:r="http://schemas.openxmlformats.org/officeDocument/2006/relationships" xmlns:p="http://schemas.openxmlformats.org/presentationml/2006/main">
   <p:cSld>
     <p:bg>
       <p:bgPr>
@@ -3518,45 +3510,17 @@
         <p:cNvGrpSpPr/>
         <p:nvPr/>
       </p:nvGrpSpPr>
-      <p:grpSpPr/>
+      <p:grpSpPr>
+        <a:xfrm>
+          <a:off x="0" y="0"/>
+          <a:ext cx="0" cy="0"/>
+          <a:chOff x="0" y="0"/>
+          <a:chExt cx="0" cy="0"/>
+        </a:xfrm>
+      </p:grpSpPr>
       <p:sp>
         <p:nvSpPr>
           <p:cNvPr id="2" name="TextBox 1"/>
-          <p:cNvSpPr txBox="1"/>
-          <p:nvPr/>
-        </p:nvSpPr>
-        <p:spPr>
-          <a:xfrm>
-            <a:off x="548640" y="274320"/>
-            <a:ext cx="2743200" cy="457200"/>
-          </a:xfrm>
-          <a:prstGeom prst="rect">
-            <a:avLst/>
-          </a:prstGeom>
-          <a:noFill/>
-        </p:spPr>
-        <p:txBody>
-          <a:bodyPr wrap="square">
-            <a:spAutoFit/>
-          </a:bodyPr>
-          <a:lstStyle/>
-          <a:p>
-            <a:pPr algn="l"/>
-            <a:r>
-              <a:rPr sz="1500" b="1" i="0">
-                <a:solidFill>
-                  <a:srgbClr val="C9913A"/>
-                </a:solidFill>
-                <a:latin typeface="Calibri"/>
-              </a:rPr>
-              <a:t>Stage 2</a:t>
-            </a:r>
-          </a:p>
-        </p:txBody>
-      </p:sp>
-      <p:sp>
-        <p:nvSpPr>
-          <p:cNvPr id="3" name="TextBox 2"/>
           <p:cNvSpPr txBox="1"/>
           <p:nvPr/>
         </p:nvSpPr>
@@ -3584,14 +3548,14 @@
                 </a:solidFill>
                 <a:latin typeface="Calibri"/>
               </a:rPr>
-              <a:t>The system already knows who you are.</a:t>
-            </a:r>
-          </a:p>
-        </p:txBody>
-      </p:sp>
-      <p:sp>
-        <p:nvSpPr>
-          <p:cNvPr id="4" name="Rectangle 3"/>
+              <a:t>The posture: humble curiosity.</a:t>
+            </a:r>
+          </a:p>
+        </p:txBody>
+      </p:sp>
+      <p:sp>
+        <p:nvSpPr>
+          <p:cNvPr id="3" name="Rectangle 2"/>
           <p:cNvSpPr/>
           <p:nvPr/>
         </p:nvSpPr>
@@ -3629,12 +3593,13 @@
           <a:lstStyle/>
           <a:p>
             <a:pPr algn="ctr"/>
-          </a:p>
-        </p:txBody>
-      </p:sp>
-      <p:sp>
-        <p:nvSpPr>
-          <p:cNvPr id="5" name="TextBox 4"/>
+            <a:endParaRPr/>
+          </a:p>
+        </p:txBody>
+      </p:sp>
+      <p:sp>
+        <p:nvSpPr>
+          <p:cNvPr id="4" name="TextBox 3"/>
           <p:cNvSpPr txBox="1"/>
           <p:nvPr/>
         </p:nvSpPr>
@@ -3660,13 +3625,74 @@
               </a:spcBef>
             </a:pPr>
             <a:r>
+              <a:rPr sz="2000" b="0" i="0">
+                <a:solidFill>
+                  <a:srgbClr val="6B7280"/>
+                </a:solidFill>
+                <a:latin typeface="Calibri"/>
+              </a:rPr>
+              <a:t>Not "tell me the answer."  Not "do this for me."</a:t>
+            </a:r>
+          </a:p>
+          <a:p>
+            <a:pPr>
+              <a:spcBef>
+                <a:spcPts val="600"/>
+              </a:spcBef>
+            </a:pPr>
+            <a:r>
+              <a:rPr sz="2200" b="1" i="0">
+                <a:solidFill>
+                  <a:srgbClr val="C9913A"/>
+                </a:solidFill>
+                <a:latin typeface="Calibri"/>
+              </a:rPr>
+              <a:t>"Here is what I know. Here is what I have. What am I missing? What is the best way in?"</a:t>
+            </a:r>
+          </a:p>
+          <a:p>
+            <a:pPr>
+              <a:spcBef>
+                <a:spcPts val="600"/>
+              </a:spcBef>
+            </a:pPr>
+            <a:r>
               <a:rPr sz="1900" b="0" i="0">
                 <a:solidFill>
+                  <a:srgbClr val="6B7280"/>
+                </a:solidFill>
+                <a:latin typeface="Calibri"/>
+              </a:rPr>
+              <a:t>The people getting the most out of AI in 2026 are not the most technically sophisticated. They are the most willing to ask before they assume.</a:t>
+            </a:r>
+          </a:p>
+          <a:p>
+            <a:pPr>
+              <a:spcBef>
+                <a:spcPts val="200"/>
+              </a:spcBef>
+            </a:pPr>
+            <a:endParaRPr sz="1900" b="0" i="0">
+              <a:solidFill>
+                <a:srgbClr val="6B7280"/>
+              </a:solidFill>
+              <a:latin typeface="Calibri"/>
+            </a:endParaRPr>
+          </a:p>
+          <a:p>
+            <a:pPr>
+              <a:spcBef>
+                <a:spcPts val="600"/>
+              </a:spcBef>
+            </a:pPr>
+            <a:r>
+              <a:rPr sz="2000" b="1" i="0">
+                <a:solidFill>
                   <a:srgbClr val="0D2B4E"/>
                 </a:solidFill>
                 <a:latin typeface="Calibri"/>
               </a:rPr>
-              <a:t>A master briefing file lives in your workspace and loads automatically every time you open Claude. Before you type anything, Claude already knows:</a:t>
+              <a:t>Two strategies worth keeping:</a:t>
             </a:r>
           </a:p>
           <a:p>
@@ -3676,61 +3702,45 @@
               </a:spcBef>
             </a:pPr>
             <a:r>
+              <a:rPr sz="1800" b="0" i="0">
+                <a:solidFill>
+                  <a:srgbClr val="0D2B4E"/>
+                </a:solidFill>
+                <a:latin typeface="Calibri"/>
+              </a:rPr>
+              <a:t>Plan before you act:  "Walk me through the full approach and the potential issues -- then wait for my input before you start." Claude surfaces things you had not thought of. You decide whether to proceed or adjust before any work is done.</a:t>
+            </a:r>
+          </a:p>
+          <a:p>
+            <a:pPr>
+              <a:spcBef>
+                <a:spcPts val="600"/>
+              </a:spcBef>
+            </a:pPr>
+            <a:r>
+              <a:rPr sz="1800" b="0" i="0">
+                <a:solidFill>
+                  <a:srgbClr val="0D2B4E"/>
+                </a:solidFill>
+                <a:latin typeface="Calibri"/>
+              </a:rPr>
+              <a:t>Ask for options:  "Give me three ways to approach this and the tradeoffs of each. I will pick one." Prevents anchoring on the first thing Claude suggests. 30 seconds of options usually beats the first path you would have taken.</a:t>
+            </a:r>
+          </a:p>
+          <a:p>
+            <a:pPr>
+              <a:spcBef>
+                <a:spcPts val="600"/>
+              </a:spcBef>
+            </a:pPr>
+            <a:r>
               <a:rPr sz="1900" b="1" i="0">
                 <a:solidFill>
-                  <a:srgbClr val="0D2B4E"/>
-                </a:solidFill>
-                <a:latin typeface="Calibri"/>
-              </a:rPr>
-              <a:t>Who you are and what you do.   The standards you hold your work to.   The formats you prefer.   The things you want to avoid.   Which files to check before doing anything.</a:t>
-            </a:r>
-          </a:p>
-          <a:p>
-            <a:pPr>
-              <a:spcBef>
-                <a:spcPts val="600"/>
-              </a:spcBef>
-            </a:pPr>
-            <a:r>
-              <a:rPr sz="1900" b="0" i="0">
-                <a:solidFill>
-                  <a:srgbClr val="6B7280"/>
-                </a:solidFill>
-                <a:latin typeface="Calibri"/>
-              </a:rPr>
-              <a:t>Your files live next to Claude in the same workspace. When Olivia works on diligence, Claude has access to her template, past reports, and investment criteria -- automatically, every session. When Jon drafts alumni communications, Claude has access to his voice document and alumni database.</a:t>
-            </a:r>
-          </a:p>
-          <a:p>
-            <a:pPr>
-              <a:spcBef>
-                <a:spcPts val="600"/>
-              </a:spcBef>
-            </a:pPr>
-            <a:r>
-              <a:rPr sz="1900" b="1" i="0">
-                <a:solidFill>
-                  <a:srgbClr val="0D2B4E"/>
-                </a:solidFill>
-                <a:latin typeface="Calibri"/>
-              </a:rPr>
-              <a:t>You do not paste these things in every time. They are already there.</a:t>
-            </a:r>
-          </a:p>
-          <a:p>
-            <a:pPr>
-              <a:spcBef>
-                <a:spcPts val="600"/>
-              </a:spcBef>
-            </a:pPr>
-            <a:r>
-              <a:rPr sz="1900" b="0" i="0">
-                <a:solidFill>
                   <a:srgbClr val="C9913A"/>
                 </a:solidFill>
                 <a:latin typeface="Calibri"/>
               </a:rPr>
-              <a:t>This is what Phil is building with you today.</a:t>
+              <a:t>Both keep you as the decision-maker. Claude is the thinking partner.</a:t>
             </a:r>
           </a:p>
         </p:txBody>
@@ -3744,7 +3754,7 @@
 </file>
 
 <file path=ppt/slides/slide12.xml><?xml version="1.0" encoding="utf-8"?>
-<p:sld xmlns:a="http://schemas.openxmlformats.org/drawingml/2006/main" xmlns:p="http://schemas.openxmlformats.org/presentationml/2006/main" xmlns:r="http://schemas.openxmlformats.org/officeDocument/2006/relationships">
+<p:sld xmlns:a="http://schemas.openxmlformats.org/drawingml/2006/main" xmlns:r="http://schemas.openxmlformats.org/officeDocument/2006/relationships" xmlns:p="http://schemas.openxmlformats.org/presentationml/2006/main">
   <p:cSld>
     <p:bg>
       <p:bgPr>
@@ -3760,7 +3770,14 @@
         <p:cNvGrpSpPr/>
         <p:nvPr/>
       </p:nvGrpSpPr>
-      <p:grpSpPr/>
+      <p:grpSpPr>
+        <a:xfrm>
+          <a:off x="0" y="0"/>
+          <a:ext cx="0" cy="0"/>
+          <a:chOff x="0" y="0"/>
+          <a:chExt cx="0" cy="0"/>
+        </a:xfrm>
+      </p:grpSpPr>
       <p:sp>
         <p:nvSpPr>
           <p:cNvPr id="2" name="TextBox 1"/>
@@ -3791,7 +3808,7 @@
                 </a:solidFill>
                 <a:latin typeface="Calibri"/>
               </a:rPr>
-              <a:t>Stage 2 in practice -- Jon's workspace.</a:t>
+              <a:t>How Context Works -- The Most Important Concept Today</a:t>
             </a:r>
           </a:p>
         </p:txBody>
@@ -3836,6 +3853,7 @@
           <a:lstStyle/>
           <a:p>
             <a:pPr algn="ctr"/>
+            <a:endParaRPr/>
           </a:p>
         </p:txBody>
       </p:sp>
@@ -3847,69 +3865,95 @@
         </p:nvSpPr>
         <p:spPr>
           <a:xfrm>
-            <a:off x="548640" y="1417320"/>
-            <a:ext cx="5303520" cy="411480"/>
-          </a:xfrm>
-          <a:prstGeom prst="rect">
-            <a:avLst/>
-          </a:prstGeom>
-          <a:noFill/>
-        </p:spPr>
-        <p:txBody>
-          <a:bodyPr wrap="square">
-            <a:spAutoFit/>
-          </a:bodyPr>
-          <a:lstStyle/>
-          <a:p>
-            <a:pPr algn="l"/>
-            <a:r>
-              <a:rPr sz="1600" b="1" i="0">
+            <a:off x="548640" y="1371600"/>
+            <a:ext cx="11064240" cy="5029200"/>
+          </a:xfrm>
+          <a:prstGeom prst="rect">
+            <a:avLst/>
+          </a:prstGeom>
+          <a:noFill/>
+        </p:spPr>
+        <p:txBody>
+          <a:bodyPr wrap="square">
+            <a:spAutoFit/>
+          </a:bodyPr>
+          <a:lstStyle/>
+          <a:p>
+            <a:pPr>
+              <a:spcBef>
+                <a:spcPts val="0"/>
+              </a:spcBef>
+            </a:pPr>
+            <a:r>
+              <a:rPr sz="1900" b="0" i="0">
+                <a:solidFill>
+                  <a:srgbClr val="0D2B4E"/>
+                </a:solidFill>
+                <a:latin typeface="Calibri"/>
+              </a:rPr>
+              <a:t>When most people first use AI, they write a long detailed prompt at the start of every session:</a:t>
+            </a:r>
+          </a:p>
+          <a:p>
+            <a:pPr>
+              <a:spcBef>
+                <a:spcPts val="600"/>
+              </a:spcBef>
+            </a:pPr>
+            <a:r>
+              <a:rPr sz="1800" b="0" i="1">
+                <a:solidFill>
+                  <a:srgbClr val="88AACC"/>
+                </a:solidFill>
+                <a:latin typeface="Calibri"/>
+              </a:rPr>
+              <a:t>"I am the Executive Director of a university angel investment network. I evaluate seed-stage companies for potential investment. I produce 10-12 page diligence reports. I need you to..."</a:t>
+            </a:r>
+          </a:p>
+          <a:p>
+            <a:pPr>
+              <a:spcBef>
+                <a:spcPts val="600"/>
+              </a:spcBef>
+            </a:pPr>
+            <a:r>
+              <a:rPr sz="1900" b="0" i="0">
                 <a:solidFill>
                   <a:srgbClr val="6B7280"/>
                 </a:solidFill>
                 <a:latin typeface="Calibri"/>
               </a:rPr>
-              <a:t>What is in the system:</a:t>
-            </a:r>
-          </a:p>
-        </p:txBody>
-      </p:sp>
-      <p:sp>
-        <p:nvSpPr>
-          <p:cNvPr id="5" name="TextBox 4"/>
-          <p:cNvSpPr txBox="1"/>
-          <p:nvPr/>
-        </p:nvSpPr>
-        <p:spPr>
-          <a:xfrm>
-            <a:off x="548640" y="1874519"/>
-            <a:ext cx="5303520" cy="3200400"/>
-          </a:xfrm>
-          <a:prstGeom prst="rect">
-            <a:avLst/>
-          </a:prstGeom>
-          <a:noFill/>
-        </p:spPr>
-        <p:txBody>
-          <a:bodyPr wrap="square">
-            <a:spAutoFit/>
-          </a:bodyPr>
-          <a:lstStyle/>
-          <a:p>
-            <a:pPr>
-              <a:spcBef>
-                <a:spcPts val="0"/>
-              </a:spcBef>
-            </a:pPr>
-            <a:r>
-              <a:rPr sz="1700" b="0" i="0">
+              <a:t>Every single time. Because Claude does not remember the last conversation. Every session starts from zero.</a:t>
+            </a:r>
+          </a:p>
+          <a:p>
+            <a:pPr>
+              <a:spcBef>
+                <a:spcPts val="600"/>
+              </a:spcBef>
+            </a:pPr>
+            <a:r>
+              <a:rPr sz="1900" b="1" i="0">
                 <a:solidFill>
                   <a:srgbClr val="0D2B4E"/>
                 </a:solidFill>
                 <a:latin typeface="Calibri"/>
               </a:rPr>
-              <a:t>Master briefing file -- Jon's role, the Founders and Funders Network mandate, the Venture Summit, engagement standards, what tone to hold.</a:t>
-            </a:r>
+              <a:t>That is the starting point. It is not where you end up.</a:t>
+            </a:r>
+          </a:p>
+          <a:p>
+            <a:pPr>
+              <a:spcBef>
+                <a:spcPts val="200"/>
+              </a:spcBef>
+            </a:pPr>
+            <a:endParaRPr sz="1900" b="1" i="0">
+              <a:solidFill>
+                <a:srgbClr val="0D2B4E"/>
+              </a:solidFill>
+              <a:latin typeface="Calibri"/>
+            </a:endParaRPr>
           </a:p>
           <a:p>
             <a:pPr>
@@ -3918,265 +3962,13 @@
               </a:spcBef>
             </a:pPr>
             <a:r>
-              <a:rPr sz="1700" b="0" i="0">
-                <a:solidFill>
-                  <a:srgbClr val="0D2B4E"/>
-                </a:solidFill>
-                <a:latin typeface="Calibri"/>
-              </a:rPr>
-              <a:t>Voice document -- examples of his best alumni introductions, newsletter tone, phrases he uses and ones he avoids. Every draft reads like him.</a:t>
-            </a:r>
-          </a:p>
-          <a:p>
-            <a:pPr>
-              <a:spcBef>
-                <a:spcPts val="600"/>
-              </a:spcBef>
-            </a:pPr>
-            <a:r>
-              <a:rPr sz="1700" b="0" i="0">
-                <a:solidFill>
-                  <a:srgbClr val="0D2B4E"/>
-                </a:solidFill>
-                <a:latin typeface="Calibri"/>
-              </a:rPr>
-              <a:t>Alumni database -- one file per person in his network. Background, IU connection, last touchpoint, every meeting note. Updated as he works.</a:t>
-            </a:r>
-          </a:p>
-        </p:txBody>
-      </p:sp>
-      <p:sp>
-        <p:nvSpPr>
-          <p:cNvPr id="6" name="TextBox 5"/>
-          <p:cNvSpPr txBox="1"/>
-          <p:nvPr/>
-        </p:nvSpPr>
-        <p:spPr>
-          <a:xfrm>
-            <a:off x="6492240" y="1417320"/>
-            <a:ext cx="5120640" cy="411480"/>
-          </a:xfrm>
-          <a:prstGeom prst="rect">
-            <a:avLst/>
-          </a:prstGeom>
-          <a:noFill/>
-        </p:spPr>
-        <p:txBody>
-          <a:bodyPr wrap="square">
-            <a:spAutoFit/>
-          </a:bodyPr>
-          <a:lstStyle/>
-          <a:p>
-            <a:pPr algn="l"/>
-            <a:r>
-              <a:rPr sz="1600" b="1" i="0">
+              <a:rPr sz="1900" b="0" i="0">
                 <a:solidFill>
                   <a:srgbClr val="6B7280"/>
                 </a:solidFill>
                 <a:latin typeface="Calibri"/>
               </a:rPr>
-              <a:t>What becomes possible:</a:t>
-            </a:r>
-          </a:p>
-        </p:txBody>
-      </p:sp>
-      <p:sp>
-        <p:nvSpPr>
-          <p:cNvPr id="7" name="TextBox 6"/>
-          <p:cNvSpPr txBox="1"/>
-          <p:nvPr/>
-        </p:nvSpPr>
-        <p:spPr>
-          <a:xfrm>
-            <a:off x="6492240" y="1874519"/>
-            <a:ext cx="5120640" cy="3200400"/>
-          </a:xfrm>
-          <a:prstGeom prst="rect">
-            <a:avLst/>
-          </a:prstGeom>
-          <a:noFill/>
-        </p:spPr>
-        <p:txBody>
-          <a:bodyPr wrap="square">
-            <a:spAutoFit/>
-          </a:bodyPr>
-          <a:lstStyle/>
-          <a:p>
-            <a:pPr>
-              <a:spcBef>
-                <a:spcPts val="0"/>
-              </a:spcBef>
-            </a:pPr>
-            <a:r>
-              <a:rPr sz="1800" b="1" i="0">
-                <a:solidFill>
-                  <a:srgbClr val="0D2B4E"/>
-                </a:solidFill>
-                <a:latin typeface="Calibri"/>
-              </a:rPr>
-              <a:t>"Draft an intro between Sarah Chen and Mark Fuller."</a:t>
-            </a:r>
-          </a:p>
-          <a:p>
-            <a:pPr>
-              <a:spcBef>
-                <a:spcPts val="600"/>
-              </a:spcBef>
-            </a:pPr>
-            <a:r>
-              <a:rPr sz="1700" b="0" i="0">
-                <a:solidFill>
-                  <a:srgbClr val="6B7280"/>
-                </a:solidFill>
-                <a:latin typeface="Calibri"/>
-              </a:rPr>
-              <a:t>Claude reads Sarah's file. Reads Mark's file. Finds the specific reason these two should connect. Writes a personalized introduction that references both of their histories.</a:t>
-            </a:r>
-          </a:p>
-          <a:p>
-            <a:pPr>
-              <a:spcBef>
-                <a:spcPts val="600"/>
-              </a:spcBef>
-            </a:pPr>
-            <a:r>
-              <a:rPr sz="1700" b="1" i="0">
-                <a:solidFill>
-                  <a:srgbClr val="0D2B4E"/>
-                </a:solidFill>
-                <a:latin typeface="Calibri"/>
-              </a:rPr>
-              <a:t>Jon makes one small edit and sends.</a:t>
-            </a:r>
-          </a:p>
-          <a:p>
-            <a:pPr>
-              <a:spcBef>
-                <a:spcPts val="200"/>
-              </a:spcBef>
-            </a:pPr>
-            <a:r>
-              <a:rPr sz="600" b="0" i="0">
-                <a:solidFill>
-                  <a:srgbClr val="0D2B4E"/>
-                </a:solidFill>
-                <a:latin typeface="Calibri"/>
-              </a:rPr>
-              <a:t/>
-            </a:r>
-          </a:p>
-          <a:p>
-            <a:pPr>
-              <a:spcBef>
-                <a:spcPts val="600"/>
-              </a:spcBef>
-            </a:pPr>
-            <a:r>
-              <a:rPr sz="1700" b="0" i="0">
-                <a:solidFill>
-                  <a:srgbClr val="6B7280"/>
-                </a:solidFill>
-                <a:latin typeface="Calibri"/>
-              </a:rPr>
-              <a:t>15 minutes of memory retrieval and manual typing.</a:t>
-            </a:r>
-          </a:p>
-          <a:p>
-            <a:pPr>
-              <a:spcBef>
-                <a:spcPts val="600"/>
-              </a:spcBef>
-            </a:pPr>
-            <a:r>
-              <a:rPr sz="2200" b="1" i="0">
-                <a:solidFill>
-                  <a:srgbClr val="C9913A"/>
-                </a:solidFill>
-                <a:latin typeface="Calibri"/>
-              </a:rPr>
-              <a:t>90 seconds.</a:t>
-            </a:r>
-          </a:p>
-        </p:txBody>
-      </p:sp>
-      <p:sp>
-        <p:nvSpPr>
-          <p:cNvPr id="8" name="Rectangle 7"/>
-          <p:cNvSpPr/>
-          <p:nvPr/>
-        </p:nvSpPr>
-        <p:spPr>
-          <a:xfrm>
-            <a:off x="548640" y="5120640"/>
-            <a:ext cx="11064240" cy="27432"/>
-          </a:xfrm>
-          <a:prstGeom prst="rect">
-            <a:avLst/>
-          </a:prstGeom>
-          <a:solidFill>
-            <a:srgbClr val="CCCCCC"/>
-          </a:solidFill>
-          <a:ln>
-            <a:noFill/>
-          </a:ln>
-        </p:spPr>
-        <p:style>
-          <a:lnRef idx="1">
-            <a:schemeClr val="accent1"/>
-          </a:lnRef>
-          <a:fillRef idx="3">
-            <a:schemeClr val="accent1"/>
-          </a:fillRef>
-          <a:effectRef idx="2">
-            <a:schemeClr val="accent1"/>
-          </a:effectRef>
-          <a:fontRef idx="minor">
-            <a:schemeClr val="lt1"/>
-          </a:fontRef>
-        </p:style>
-        <p:txBody>
-          <a:bodyPr rtlCol="0" anchor="ctr"/>
-          <a:lstStyle/>
-          <a:p>
-            <a:pPr algn="ctr"/>
-          </a:p>
-        </p:txBody>
-      </p:sp>
-      <p:sp>
-        <p:nvSpPr>
-          <p:cNvPr id="9" name="TextBox 8"/>
-          <p:cNvSpPr txBox="1"/>
-          <p:nvPr/>
-        </p:nvSpPr>
-        <p:spPr>
-          <a:xfrm>
-            <a:off x="548640" y="5212080"/>
-            <a:ext cx="11064240" cy="822960"/>
-          </a:xfrm>
-          <a:prstGeom prst="rect">
-            <a:avLst/>
-          </a:prstGeom>
-          <a:noFill/>
-        </p:spPr>
-        <p:txBody>
-          <a:bodyPr wrap="square">
-            <a:spAutoFit/>
-          </a:bodyPr>
-          <a:lstStyle/>
-          <a:p>
-            <a:pPr>
-              <a:spcBef>
-                <a:spcPts val="0"/>
-              </a:spcBef>
-            </a:pPr>
-            <a:r>
-              <a:rPr sz="1700" b="0" i="0">
-                <a:solidFill>
-                  <a:srgbClr val="6B7280"/>
-                </a:solidFill>
-                <a:latin typeface="Calibri"/>
-              </a:rPr>
-              <a:t>The key: Claude is not working from a general understanding of Jon's job. It is reading actual files about actual people before it writes a single word.</a:t>
+              <a:t>There are three stages to how people work with AI. Most people stay at Stage 1. Today you are building Stage 2 -- and Stage 3 is where you are headed.</a:t>
             </a:r>
           </a:p>
         </p:txBody>
@@ -4190,7 +3982,7 @@
 </file>
 
 <file path=ppt/slides/slide13.xml><?xml version="1.0" encoding="utf-8"?>
-<p:sld xmlns:a="http://schemas.openxmlformats.org/drawingml/2006/main" xmlns:p="http://schemas.openxmlformats.org/presentationml/2006/main" xmlns:r="http://schemas.openxmlformats.org/officeDocument/2006/relationships">
+<p:sld xmlns:a="http://schemas.openxmlformats.org/drawingml/2006/main" xmlns:r="http://schemas.openxmlformats.org/officeDocument/2006/relationships" xmlns:p="http://schemas.openxmlformats.org/presentationml/2006/main">
   <p:cSld>
     <p:bg>
       <p:bgPr>
@@ -4206,7 +3998,14 @@
         <p:cNvGrpSpPr/>
         <p:nvPr/>
       </p:nvGrpSpPr>
-      <p:grpSpPr/>
+      <p:grpSpPr>
+        <a:xfrm>
+          <a:off x="0" y="0"/>
+          <a:ext cx="0" cy="0"/>
+          <a:chOff x="0" y="0"/>
+          <a:chExt cx="0" cy="0"/>
+        </a:xfrm>
+      </p:grpSpPr>
       <p:sp>
         <p:nvSpPr>
           <p:cNvPr id="2" name="TextBox 1"/>
@@ -4215,7 +4014,42 @@
         </p:nvSpPr>
         <p:spPr>
           <a:xfrm>
-            <a:off x="548640" y="384048"/>
+            <a:off x="548640" y="274320"/>
+            <a:ext cx="2743200" cy="457200"/>
+          </a:xfrm>
+          <a:prstGeom prst="rect">
+            <a:avLst/>
+          </a:prstGeom>
+          <a:noFill/>
+        </p:spPr>
+        <p:txBody>
+          <a:bodyPr wrap="square">
+            <a:spAutoFit/>
+          </a:bodyPr>
+          <a:lstStyle/>
+          <a:p>
+            <a:pPr algn="l"/>
+            <a:r>
+              <a:rPr sz="1500" b="1" i="0">
+                <a:solidFill>
+                  <a:srgbClr val="C9913A"/>
+                </a:solidFill>
+                <a:latin typeface="Calibri"/>
+              </a:rPr>
+              <a:t>Stage 1</a:t>
+            </a:r>
+          </a:p>
+        </p:txBody>
+      </p:sp>
+      <p:sp>
+        <p:nvSpPr>
+          <p:cNvPr id="3" name="TextBox 2"/>
+          <p:cNvSpPr txBox="1"/>
+          <p:nvPr/>
+        </p:nvSpPr>
+        <p:spPr>
+          <a:xfrm>
+            <a:off x="548640" y="502920"/>
             <a:ext cx="11064240" cy="749808"/>
           </a:xfrm>
           <a:prstGeom prst="rect">
@@ -4237,14 +4071,14 @@
                 </a:solidFill>
                 <a:latin typeface="Calibri"/>
               </a:rPr>
-              <a:t>Stage 2 in practice -- Olivia's workspace.</a:t>
-            </a:r>
-          </a:p>
-        </p:txBody>
-      </p:sp>
-      <p:sp>
-        <p:nvSpPr>
-          <p:cNvPr id="3" name="Rectangle 2"/>
+              <a:t>You explain yourself every time.</a:t>
+            </a:r>
+          </a:p>
+        </p:txBody>
+      </p:sp>
+      <p:sp>
+        <p:nvSpPr>
+          <p:cNvPr id="4" name="Rectangle 3"/>
           <p:cNvSpPr/>
           <p:nvPr/>
         </p:nvSpPr>
@@ -4282,19 +4116,185 @@
           <a:lstStyle/>
           <a:p>
             <a:pPr algn="ctr"/>
-          </a:p>
-        </p:txBody>
-      </p:sp>
-      <p:sp>
-        <p:nvSpPr>
-          <p:cNvPr id="4" name="TextBox 3"/>
-          <p:cNvSpPr txBox="1"/>
-          <p:nvPr/>
-        </p:nvSpPr>
-        <p:spPr>
-          <a:xfrm>
-            <a:off x="548640" y="1417320"/>
-            <a:ext cx="5303520" cy="411480"/>
+            <a:endParaRPr/>
+          </a:p>
+        </p:txBody>
+      </p:sp>
+      <p:sp>
+        <p:nvSpPr>
+          <p:cNvPr id="5" name="TextBox 4"/>
+          <p:cNvSpPr txBox="1"/>
+          <p:nvPr/>
+        </p:nvSpPr>
+        <p:spPr>
+          <a:xfrm>
+            <a:off x="548640" y="1371600"/>
+            <a:ext cx="11064240" cy="5029200"/>
+          </a:xfrm>
+          <a:prstGeom prst="rect">
+            <a:avLst/>
+          </a:prstGeom>
+          <a:noFill/>
+        </p:spPr>
+        <p:txBody>
+          <a:bodyPr wrap="square">
+            <a:spAutoFit/>
+          </a:bodyPr>
+          <a:lstStyle/>
+          <a:p>
+            <a:pPr>
+              <a:spcBef>
+                <a:spcPts val="0"/>
+              </a:spcBef>
+            </a:pPr>
+            <a:r>
+              <a:rPr sz="1900" b="0" i="0">
+                <a:solidFill>
+                  <a:srgbClr val="0D2B4E"/>
+                </a:solidFill>
+                <a:latin typeface="Calibri"/>
+              </a:rPr>
+              <a:t>You write structured prompts. You set context manually at the start of every conversation.</a:t>
+            </a:r>
+          </a:p>
+          <a:p>
+            <a:pPr>
+              <a:spcBef>
+                <a:spcPts val="600"/>
+              </a:spcBef>
+            </a:pPr>
+            <a:r>
+              <a:rPr sz="1900" b="0" i="0">
+                <a:solidFill>
+                  <a:srgbClr val="6B7280"/>
+                </a:solidFill>
+                <a:latin typeface="Calibri"/>
+              </a:rPr>
+              <a:t>This works. Stage 1 prompts done well produce genuinely good output -- significantly better than no AI. The outputs are real. The time savings are real.</a:t>
+            </a:r>
+          </a:p>
+          <a:p>
+            <a:pPr>
+              <a:spcBef>
+                <a:spcPts val="600"/>
+              </a:spcBef>
+            </a:pPr>
+            <a:r>
+              <a:rPr sz="1900" b="0" i="0">
+                <a:solidFill>
+                  <a:srgbClr val="6B7280"/>
+                </a:solidFill>
+                <a:latin typeface="Calibri"/>
+              </a:rPr>
+              <a:t>But it is slower than it needs to be. Every session you risk forgetting something important. The quality of output depends on how complete your prompt is -- and you are writing that prompt from scratch, every time.</a:t>
+            </a:r>
+          </a:p>
+          <a:p>
+            <a:pPr>
+              <a:spcBef>
+                <a:spcPts val="200"/>
+              </a:spcBef>
+            </a:pPr>
+            <a:endParaRPr sz="1900" b="0" i="0">
+              <a:solidFill>
+                <a:srgbClr val="6B7280"/>
+              </a:solidFill>
+              <a:latin typeface="Calibri"/>
+            </a:endParaRPr>
+          </a:p>
+          <a:p>
+            <a:pPr>
+              <a:spcBef>
+                <a:spcPts val="600"/>
+              </a:spcBef>
+            </a:pPr>
+            <a:r>
+              <a:rPr sz="1800" b="1" i="0">
+                <a:solidFill>
+                  <a:srgbClr val="0D2B4E"/>
+                </a:solidFill>
+                <a:latin typeface="Calibri"/>
+              </a:rPr>
+              <a:t>Example of a Stage 1 prompt:</a:t>
+            </a:r>
+          </a:p>
+          <a:p>
+            <a:pPr>
+              <a:spcBef>
+                <a:spcPts val="600"/>
+              </a:spcBef>
+            </a:pPr>
+            <a:r>
+              <a:rPr sz="1700" b="0" i="1">
+                <a:solidFill>
+                  <a:srgbClr val="88AACC"/>
+                </a:solidFill>
+                <a:latin typeface="Calibri"/>
+              </a:rPr>
+              <a:t>"I am the Executive Director of the IU Angel Network, Indiana University's angel investment vehicle. I evaluate seed-stage companies and produce 10-12 page diligence reports focused on Indiana-affiliated founders. I need to..."</a:t>
+            </a:r>
+          </a:p>
+          <a:p>
+            <a:pPr>
+              <a:spcBef>
+                <a:spcPts val="600"/>
+              </a:spcBef>
+            </a:pPr>
+            <a:r>
+              <a:rPr sz="1900" b="1" i="0">
+                <a:solidFill>
+                  <a:srgbClr val="C9913A"/>
+                </a:solidFill>
+                <a:latin typeface="Calibri"/>
+              </a:rPr>
+              <a:t>Training wheels. A real phase. Not the destination.</a:t>
+            </a:r>
+          </a:p>
+        </p:txBody>
+      </p:sp>
+    </p:spTree>
+  </p:cSld>
+  <p:clrMapOvr>
+    <a:masterClrMapping/>
+  </p:clrMapOvr>
+</p:sld>
+</file>
+
+<file path=ppt/slides/slide14.xml><?xml version="1.0" encoding="utf-8"?>
+<p:sld xmlns:a="http://schemas.openxmlformats.org/drawingml/2006/main" xmlns:r="http://schemas.openxmlformats.org/officeDocument/2006/relationships" xmlns:p="http://schemas.openxmlformats.org/presentationml/2006/main">
+  <p:cSld>
+    <p:bg>
+      <p:bgPr>
+        <a:solidFill>
+          <a:srgbClr val="F8F7F4"/>
+        </a:solidFill>
+        <a:effectLst/>
+      </p:bgPr>
+    </p:bg>
+    <p:spTree>
+      <p:nvGrpSpPr>
+        <p:cNvPr id="1" name=""/>
+        <p:cNvGrpSpPr/>
+        <p:nvPr/>
+      </p:nvGrpSpPr>
+      <p:grpSpPr>
+        <a:xfrm>
+          <a:off x="0" y="0"/>
+          <a:ext cx="0" cy="0"/>
+          <a:chOff x="0" y="0"/>
+          <a:chExt cx="0" cy="0"/>
+        </a:xfrm>
+      </p:grpSpPr>
+      <p:sp>
+        <p:nvSpPr>
+          <p:cNvPr id="2" name="TextBox 1"/>
+          <p:cNvSpPr txBox="1"/>
+          <p:nvPr/>
+        </p:nvSpPr>
+        <p:spPr>
+          <a:xfrm>
+            <a:off x="548640" y="274320"/>
+            <a:ext cx="2743200" cy="457200"/>
           </a:xfrm>
           <a:prstGeom prst="rect">
             <a:avLst/>
@@ -4309,274 +4309,68 @@
           <a:p>
             <a:pPr algn="l"/>
             <a:r>
-              <a:rPr sz="1600" b="1" i="0">
-                <a:solidFill>
-                  <a:srgbClr val="6B7280"/>
-                </a:solidFill>
-                <a:latin typeface="Calibri"/>
-              </a:rPr>
-              <a:t>What is in the system:</a:t>
-            </a:r>
-          </a:p>
-        </p:txBody>
-      </p:sp>
-      <p:sp>
-        <p:nvSpPr>
-          <p:cNvPr id="5" name="TextBox 4"/>
-          <p:cNvSpPr txBox="1"/>
-          <p:nvPr/>
-        </p:nvSpPr>
-        <p:spPr>
-          <a:xfrm>
-            <a:off x="548640" y="1874519"/>
-            <a:ext cx="5303520" cy="3200400"/>
-          </a:xfrm>
-          <a:prstGeom prst="rect">
-            <a:avLst/>
-          </a:prstGeom>
-          <a:noFill/>
-        </p:spPr>
-        <p:txBody>
-          <a:bodyPr wrap="square">
-            <a:spAutoFit/>
-          </a:bodyPr>
-          <a:lstStyle/>
-          <a:p>
-            <a:pPr>
-              <a:spcBef>
-                <a:spcPts val="0"/>
-              </a:spcBef>
-            </a:pPr>
-            <a:r>
-              <a:rPr sz="1700" b="0" i="0">
+              <a:rPr sz="1500" b="1" i="0">
+                <a:solidFill>
+                  <a:srgbClr val="C9913A"/>
+                </a:solidFill>
+                <a:latin typeface="Calibri"/>
+              </a:rPr>
+              <a:t>Stage 2</a:t>
+            </a:r>
+          </a:p>
+        </p:txBody>
+      </p:sp>
+      <p:sp>
+        <p:nvSpPr>
+          <p:cNvPr id="3" name="TextBox 2"/>
+          <p:cNvSpPr txBox="1"/>
+          <p:nvPr/>
+        </p:nvSpPr>
+        <p:spPr>
+          <a:xfrm>
+            <a:off x="548640" y="502920"/>
+            <a:ext cx="11064240" cy="749808"/>
+          </a:xfrm>
+          <a:prstGeom prst="rect">
+            <a:avLst/>
+          </a:prstGeom>
+          <a:noFill/>
+        </p:spPr>
+        <p:txBody>
+          <a:bodyPr wrap="square">
+            <a:spAutoFit/>
+          </a:bodyPr>
+          <a:lstStyle/>
+          <a:p>
+            <a:pPr algn="l"/>
+            <a:r>
+              <a:rPr sz="3300" b="1" i="0" dirty="0">
                 <a:solidFill>
                   <a:srgbClr val="0D2B4E"/>
                 </a:solidFill>
                 <a:latin typeface="Calibri"/>
               </a:rPr>
-              <a:t>Master briefing file -- Olivia's role, IU Angel Network mandate, evaluation criteria, LP communication standards, what to flag and what to avoid.</a:t>
-            </a:r>
-          </a:p>
-          <a:p>
-            <a:pPr>
-              <a:spcBef>
-                <a:spcPts val="600"/>
-              </a:spcBef>
-            </a:pPr>
-            <a:r>
-              <a:rPr sz="1700" b="0" i="0">
-                <a:solidFill>
-                  <a:srgbClr val="0D2B4E"/>
-                </a:solidFill>
-                <a:latin typeface="Calibri"/>
-              </a:rPr>
-              <a:t>Diligence template -- section order, required coverage, sourcing standards, how to handle missing information.</a:t>
-            </a:r>
-          </a:p>
-          <a:p>
-            <a:pPr>
-              <a:spcBef>
-                <a:spcPts val="600"/>
-              </a:spcBef>
-            </a:pPr>
-            <a:r>
-              <a:rPr sz="1700" b="0" i="0">
-                <a:solidFill>
-                  <a:srgbClr val="0D2B4E"/>
-                </a:solidFill>
-                <a:latin typeface="Calibri"/>
-              </a:rPr>
-              <a:t>Investment criteria -- stage focus, check size range, IU affiliation requirements, sector priorities.</a:t>
-            </a:r>
-          </a:p>
-          <a:p>
-            <a:pPr>
-              <a:spcBef>
-                <a:spcPts val="600"/>
-              </a:spcBef>
-            </a:pPr>
-            <a:r>
-              <a:rPr sz="1700" b="0" i="0">
-                <a:solidFill>
-                  <a:srgbClr val="0D2B4E"/>
-                </a:solidFill>
-                <a:latin typeface="Calibri"/>
-              </a:rPr>
-              <a:t>Past reports -- examples of best work, sections that have been revised, recurring questions to ask founders.</a:t>
-            </a:r>
-          </a:p>
-        </p:txBody>
-      </p:sp>
-      <p:sp>
-        <p:nvSpPr>
-          <p:cNvPr id="6" name="TextBox 5"/>
-          <p:cNvSpPr txBox="1"/>
-          <p:nvPr/>
-        </p:nvSpPr>
-        <p:spPr>
-          <a:xfrm>
-            <a:off x="6492240" y="1417320"/>
-            <a:ext cx="5120640" cy="411480"/>
-          </a:xfrm>
-          <a:prstGeom prst="rect">
-            <a:avLst/>
-          </a:prstGeom>
-          <a:noFill/>
-        </p:spPr>
-        <p:txBody>
-          <a:bodyPr wrap="square">
-            <a:spAutoFit/>
-          </a:bodyPr>
-          <a:lstStyle/>
-          <a:p>
-            <a:pPr algn="l"/>
-            <a:r>
-              <a:rPr sz="1600" b="1" i="0">
-                <a:solidFill>
-                  <a:srgbClr val="6B7280"/>
-                </a:solidFill>
-                <a:latin typeface="Calibri"/>
-              </a:rPr>
-              <a:t>What becomes possible:</a:t>
-            </a:r>
-          </a:p>
-        </p:txBody>
-      </p:sp>
-      <p:sp>
-        <p:nvSpPr>
-          <p:cNvPr id="7" name="TextBox 6"/>
-          <p:cNvSpPr txBox="1"/>
-          <p:nvPr/>
-        </p:nvSpPr>
-        <p:spPr>
-          <a:xfrm>
-            <a:off x="6492240" y="1874519"/>
-            <a:ext cx="5120640" cy="3200400"/>
-          </a:xfrm>
-          <a:prstGeom prst="rect">
-            <a:avLst/>
-          </a:prstGeom>
-          <a:noFill/>
-        </p:spPr>
-        <p:txBody>
-          <a:bodyPr wrap="square">
-            <a:spAutoFit/>
-          </a:bodyPr>
-          <a:lstStyle/>
-          <a:p>
-            <a:pPr>
-              <a:spcBef>
-                <a:spcPts val="0"/>
-              </a:spcBef>
-            </a:pPr>
-            <a:r>
-              <a:rPr sz="1800" b="1" i="0">
-                <a:solidFill>
-                  <a:srgbClr val="0D2B4E"/>
-                </a:solidFill>
-                <a:latin typeface="Calibri"/>
-              </a:rPr>
-              <a:t>"Run first-pass diligence on Motion Sports. Materials attached."</a:t>
-            </a:r>
-          </a:p>
-          <a:p>
-            <a:pPr>
-              <a:spcBef>
-                <a:spcPts val="600"/>
-              </a:spcBef>
-            </a:pPr>
-            <a:r>
-              <a:rPr sz="1700" b="0" i="0">
-                <a:solidFill>
-                  <a:srgbClr val="6B7280"/>
-                </a:solidFill>
-                <a:latin typeface="Calibri"/>
-              </a:rPr>
-              <a:t>Claude knows the format, the standards, the evaluation criteria, and the sourcing rules -- without being told. It already read everything at session start.</a:t>
-            </a:r>
-          </a:p>
-          <a:p>
-            <a:pPr>
-              <a:spcBef>
-                <a:spcPts val="600"/>
-              </a:spcBef>
-            </a:pPr>
-            <a:r>
-              <a:rPr sz="1700" b="1" i="0">
-                <a:solidFill>
-                  <a:srgbClr val="0D2B4E"/>
-                </a:solidFill>
-                <a:latin typeface="Calibri"/>
-              </a:rPr>
-              <a:t>Output: a structured first draft, sourced, flagged where information is missing.</a:t>
-            </a:r>
-          </a:p>
-          <a:p>
-            <a:pPr>
-              <a:spcBef>
-                <a:spcPts val="200"/>
-              </a:spcBef>
-            </a:pPr>
-            <a:r>
-              <a:rPr sz="600" b="0" i="0">
-                <a:solidFill>
-                  <a:srgbClr val="0D2B4E"/>
-                </a:solidFill>
-                <a:latin typeface="Calibri"/>
-              </a:rPr>
-              <a:t/>
-            </a:r>
-          </a:p>
-          <a:p>
-            <a:pPr>
-              <a:spcBef>
-                <a:spcPts val="600"/>
-              </a:spcBef>
-            </a:pPr>
-            <a:r>
-              <a:rPr sz="1700" b="0" i="0">
-                <a:solidFill>
-                  <a:srgbClr val="6B7280"/>
-                </a:solidFill>
-                <a:latin typeface="Calibri"/>
-              </a:rPr>
-              <a:t>Four hours of research and writing.</a:t>
-            </a:r>
-          </a:p>
-          <a:p>
-            <a:pPr>
-              <a:spcBef>
-                <a:spcPts val="600"/>
-              </a:spcBef>
-            </a:pPr>
-            <a:r>
-              <a:rPr sz="2200" b="1" i="0">
-                <a:solidFill>
-                  <a:srgbClr val="C9913A"/>
-                </a:solidFill>
-                <a:latin typeface="Calibri"/>
-              </a:rPr>
-              <a:t>First draft in minutes.</a:t>
-            </a:r>
-          </a:p>
-        </p:txBody>
-      </p:sp>
-      <p:sp>
-        <p:nvSpPr>
-          <p:cNvPr id="8" name="Rectangle 7"/>
+              <a:t>The system already knows who you are.</a:t>
+            </a:r>
+          </a:p>
+        </p:txBody>
+      </p:sp>
+      <p:sp>
+        <p:nvSpPr>
+          <p:cNvPr id="4" name="Rectangle 3"/>
           <p:cNvSpPr/>
           <p:nvPr/>
         </p:nvSpPr>
         <p:spPr>
           <a:xfrm>
-            <a:off x="548640" y="5120640"/>
-            <a:ext cx="11064240" cy="27432"/>
+            <a:off x="548640" y="1115568"/>
+            <a:ext cx="365760" cy="50292"/>
           </a:xfrm>
           <a:prstGeom prst="rect">
             <a:avLst/>
           </a:prstGeom>
           <a:solidFill>
-            <a:srgbClr val="CCCCCC"/>
+            <a:srgbClr val="C9913A"/>
           </a:solidFill>
           <a:ln>
             <a:noFill/>
@@ -4601,19 +4395,20 @@
           <a:lstStyle/>
           <a:p>
             <a:pPr algn="ctr"/>
-          </a:p>
-        </p:txBody>
-      </p:sp>
-      <p:sp>
-        <p:nvSpPr>
-          <p:cNvPr id="9" name="TextBox 8"/>
-          <p:cNvSpPr txBox="1"/>
-          <p:nvPr/>
-        </p:nvSpPr>
-        <p:spPr>
-          <a:xfrm>
-            <a:off x="548640" y="5212080"/>
-            <a:ext cx="11064240" cy="822960"/>
+            <a:endParaRPr/>
+          </a:p>
+        </p:txBody>
+      </p:sp>
+      <p:sp>
+        <p:nvSpPr>
+          <p:cNvPr id="5" name="TextBox 4"/>
+          <p:cNvSpPr txBox="1"/>
+          <p:nvPr/>
+        </p:nvSpPr>
+        <p:spPr>
+          <a:xfrm>
+            <a:off x="548640" y="1371600"/>
+            <a:ext cx="11064240" cy="5029200"/>
           </a:xfrm>
           <a:prstGeom prst="rect">
             <a:avLst/>
@@ -4632,13 +4427,77 @@
               </a:spcBef>
             </a:pPr>
             <a:r>
-              <a:rPr sz="1700" b="0" i="0">
+              <a:rPr sz="1900" b="0" i="0">
+                <a:solidFill>
+                  <a:srgbClr val="0D2B4E"/>
+                </a:solidFill>
+                <a:latin typeface="Calibri"/>
+              </a:rPr>
+              <a:t>A master briefing file lives in your workspace and loads automatically every time you open Claude. Before you type anything, Claude already knows:</a:t>
+            </a:r>
+          </a:p>
+          <a:p>
+            <a:pPr>
+              <a:spcBef>
+                <a:spcPts val="600"/>
+              </a:spcBef>
+            </a:pPr>
+            <a:r>
+              <a:rPr sz="1900" b="1" i="0">
+                <a:solidFill>
+                  <a:srgbClr val="0D2B4E"/>
+                </a:solidFill>
+                <a:latin typeface="Calibri"/>
+              </a:rPr>
+              <a:t>Who you are and what you do.   The standards you hold your work to.   The formats you prefer.   The things you want to avoid.   Which files to check before doing anything.</a:t>
+            </a:r>
+          </a:p>
+          <a:p>
+            <a:pPr>
+              <a:spcBef>
+                <a:spcPts val="600"/>
+              </a:spcBef>
+            </a:pPr>
+            <a:r>
+              <a:rPr sz="1900" b="0" i="0">
                 <a:solidFill>
                   <a:srgbClr val="6B7280"/>
                 </a:solidFill>
                 <a:latin typeface="Calibri"/>
               </a:rPr>
-              <a:t>This is not AI doing your job. It is AI doing the 80% that surrounds your judgment so you can spend your time on the 20% only you can do.</a:t>
+              <a:t>Your files live next to Claude in the same workspace. When Olivia works on diligence, Claude has access to her template, past reports, and investment criteria -- automatically, every session. When Jon drafts alumni communications, Claude has access to his voice document and alumni database.</a:t>
+            </a:r>
+          </a:p>
+          <a:p>
+            <a:pPr>
+              <a:spcBef>
+                <a:spcPts val="600"/>
+              </a:spcBef>
+            </a:pPr>
+            <a:r>
+              <a:rPr sz="1900" b="1" i="0">
+                <a:solidFill>
+                  <a:srgbClr val="0D2B4E"/>
+                </a:solidFill>
+                <a:latin typeface="Calibri"/>
+              </a:rPr>
+              <a:t>You do not paste these things in every time. They are already there.</a:t>
+            </a:r>
+          </a:p>
+          <a:p>
+            <a:pPr>
+              <a:spcBef>
+                <a:spcPts val="600"/>
+              </a:spcBef>
+            </a:pPr>
+            <a:r>
+              <a:rPr sz="1900" b="0" i="0">
+                <a:solidFill>
+                  <a:srgbClr val="C9913A"/>
+                </a:solidFill>
+                <a:latin typeface="Calibri"/>
+              </a:rPr>
+              <a:t>This is what Phil is building with you today.</a:t>
             </a:r>
           </a:p>
         </p:txBody>
@@ -4651,8 +4510,928 @@
 </p:sld>
 </file>
 
-<file path=ppt/slides/slide14.xml><?xml version="1.0" encoding="utf-8"?>
-<p:sld xmlns:a="http://schemas.openxmlformats.org/drawingml/2006/main" xmlns:p="http://schemas.openxmlformats.org/presentationml/2006/main" xmlns:r="http://schemas.openxmlformats.org/officeDocument/2006/relationships">
+<file path=ppt/slides/slide15.xml><?xml version="1.0" encoding="utf-8"?>
+<p:sld xmlns:a="http://schemas.openxmlformats.org/drawingml/2006/main" xmlns:r="http://schemas.openxmlformats.org/officeDocument/2006/relationships" xmlns:p="http://schemas.openxmlformats.org/presentationml/2006/main">
+  <p:cSld>
+    <p:bg>
+      <p:bgPr>
+        <a:solidFill>
+          <a:srgbClr val="F8F7F4"/>
+        </a:solidFill>
+        <a:effectLst/>
+      </p:bgPr>
+    </p:bg>
+    <p:spTree>
+      <p:nvGrpSpPr>
+        <p:cNvPr id="1" name=""/>
+        <p:cNvGrpSpPr/>
+        <p:nvPr/>
+      </p:nvGrpSpPr>
+      <p:grpSpPr>
+        <a:xfrm>
+          <a:off x="0" y="0"/>
+          <a:ext cx="0" cy="0"/>
+          <a:chOff x="0" y="0"/>
+          <a:chExt cx="0" cy="0"/>
+        </a:xfrm>
+      </p:grpSpPr>
+      <p:sp>
+        <p:nvSpPr>
+          <p:cNvPr id="2" name="TextBox 1"/>
+          <p:cNvSpPr txBox="1"/>
+          <p:nvPr/>
+        </p:nvSpPr>
+        <p:spPr>
+          <a:xfrm>
+            <a:off x="548640" y="384048"/>
+            <a:ext cx="11064240" cy="749808"/>
+          </a:xfrm>
+          <a:prstGeom prst="rect">
+            <a:avLst/>
+          </a:prstGeom>
+          <a:noFill/>
+        </p:spPr>
+        <p:txBody>
+          <a:bodyPr wrap="square">
+            <a:spAutoFit/>
+          </a:bodyPr>
+          <a:lstStyle/>
+          <a:p>
+            <a:pPr algn="l"/>
+            <a:r>
+              <a:rPr sz="3300" b="1" i="0">
+                <a:solidFill>
+                  <a:srgbClr val="0D2B4E"/>
+                </a:solidFill>
+                <a:latin typeface="Calibri"/>
+              </a:rPr>
+              <a:t>Stage 2 in practice -- Jon's workspace.</a:t>
+            </a:r>
+          </a:p>
+        </p:txBody>
+      </p:sp>
+      <p:sp>
+        <p:nvSpPr>
+          <p:cNvPr id="3" name="Rectangle 2"/>
+          <p:cNvSpPr/>
+          <p:nvPr/>
+        </p:nvSpPr>
+        <p:spPr>
+          <a:xfrm>
+            <a:off x="548640" y="1115568"/>
+            <a:ext cx="365760" cy="50292"/>
+          </a:xfrm>
+          <a:prstGeom prst="rect">
+            <a:avLst/>
+          </a:prstGeom>
+          <a:solidFill>
+            <a:srgbClr val="C9913A"/>
+          </a:solidFill>
+          <a:ln>
+            <a:noFill/>
+          </a:ln>
+        </p:spPr>
+        <p:style>
+          <a:lnRef idx="1">
+            <a:schemeClr val="accent1"/>
+          </a:lnRef>
+          <a:fillRef idx="3">
+            <a:schemeClr val="accent1"/>
+          </a:fillRef>
+          <a:effectRef idx="2">
+            <a:schemeClr val="accent1"/>
+          </a:effectRef>
+          <a:fontRef idx="minor">
+            <a:schemeClr val="lt1"/>
+          </a:fontRef>
+        </p:style>
+        <p:txBody>
+          <a:bodyPr rtlCol="0" anchor="ctr"/>
+          <a:lstStyle/>
+          <a:p>
+            <a:pPr algn="ctr"/>
+            <a:endParaRPr/>
+          </a:p>
+        </p:txBody>
+      </p:sp>
+      <p:sp>
+        <p:nvSpPr>
+          <p:cNvPr id="4" name="TextBox 3"/>
+          <p:cNvSpPr txBox="1"/>
+          <p:nvPr/>
+        </p:nvSpPr>
+        <p:spPr>
+          <a:xfrm>
+            <a:off x="548640" y="1417320"/>
+            <a:ext cx="5303520" cy="411480"/>
+          </a:xfrm>
+          <a:prstGeom prst="rect">
+            <a:avLst/>
+          </a:prstGeom>
+          <a:noFill/>
+        </p:spPr>
+        <p:txBody>
+          <a:bodyPr wrap="square">
+            <a:spAutoFit/>
+          </a:bodyPr>
+          <a:lstStyle/>
+          <a:p>
+            <a:pPr algn="l"/>
+            <a:r>
+              <a:rPr sz="1600" b="1" i="0">
+                <a:solidFill>
+                  <a:srgbClr val="6B7280"/>
+                </a:solidFill>
+                <a:latin typeface="Calibri"/>
+              </a:rPr>
+              <a:t>What is in the system:</a:t>
+            </a:r>
+          </a:p>
+        </p:txBody>
+      </p:sp>
+      <p:sp>
+        <p:nvSpPr>
+          <p:cNvPr id="5" name="TextBox 4"/>
+          <p:cNvSpPr txBox="1"/>
+          <p:nvPr/>
+        </p:nvSpPr>
+        <p:spPr>
+          <a:xfrm>
+            <a:off x="548640" y="1874519"/>
+            <a:ext cx="5303520" cy="3200400"/>
+          </a:xfrm>
+          <a:prstGeom prst="rect">
+            <a:avLst/>
+          </a:prstGeom>
+          <a:noFill/>
+        </p:spPr>
+        <p:txBody>
+          <a:bodyPr wrap="square">
+            <a:spAutoFit/>
+          </a:bodyPr>
+          <a:lstStyle/>
+          <a:p>
+            <a:pPr>
+              <a:spcBef>
+                <a:spcPts val="0"/>
+              </a:spcBef>
+            </a:pPr>
+            <a:r>
+              <a:rPr sz="1700" b="0" i="0">
+                <a:solidFill>
+                  <a:srgbClr val="0D2B4E"/>
+                </a:solidFill>
+                <a:latin typeface="Calibri"/>
+              </a:rPr>
+              <a:t>Master briefing file -- Jon's role, the Founders and Funders Network mandate, the Venture Summit, engagement standards, what tone to hold.</a:t>
+            </a:r>
+          </a:p>
+          <a:p>
+            <a:pPr>
+              <a:spcBef>
+                <a:spcPts val="600"/>
+              </a:spcBef>
+            </a:pPr>
+            <a:r>
+              <a:rPr sz="1700" b="0" i="0">
+                <a:solidFill>
+                  <a:srgbClr val="0D2B4E"/>
+                </a:solidFill>
+                <a:latin typeface="Calibri"/>
+              </a:rPr>
+              <a:t>Voice document -- examples of his best alumni introductions, newsletter tone, phrases he uses and ones he avoids. Every draft reads like him.</a:t>
+            </a:r>
+          </a:p>
+          <a:p>
+            <a:pPr>
+              <a:spcBef>
+                <a:spcPts val="600"/>
+              </a:spcBef>
+            </a:pPr>
+            <a:r>
+              <a:rPr sz="1700" b="0" i="0">
+                <a:solidFill>
+                  <a:srgbClr val="0D2B4E"/>
+                </a:solidFill>
+                <a:latin typeface="Calibri"/>
+              </a:rPr>
+              <a:t>Alumni database -- one file per person in his network. Background, IU connection, last touchpoint, every meeting note. Updated as he works.</a:t>
+            </a:r>
+          </a:p>
+        </p:txBody>
+      </p:sp>
+      <p:sp>
+        <p:nvSpPr>
+          <p:cNvPr id="6" name="TextBox 5"/>
+          <p:cNvSpPr txBox="1"/>
+          <p:nvPr/>
+        </p:nvSpPr>
+        <p:spPr>
+          <a:xfrm>
+            <a:off x="6492240" y="1417320"/>
+            <a:ext cx="5120640" cy="411480"/>
+          </a:xfrm>
+          <a:prstGeom prst="rect">
+            <a:avLst/>
+          </a:prstGeom>
+          <a:noFill/>
+        </p:spPr>
+        <p:txBody>
+          <a:bodyPr wrap="square">
+            <a:spAutoFit/>
+          </a:bodyPr>
+          <a:lstStyle/>
+          <a:p>
+            <a:pPr algn="l"/>
+            <a:r>
+              <a:rPr sz="1600" b="1" i="0">
+                <a:solidFill>
+                  <a:srgbClr val="6B7280"/>
+                </a:solidFill>
+                <a:latin typeface="Calibri"/>
+              </a:rPr>
+              <a:t>What becomes possible:</a:t>
+            </a:r>
+          </a:p>
+        </p:txBody>
+      </p:sp>
+      <p:sp>
+        <p:nvSpPr>
+          <p:cNvPr id="7" name="TextBox 6"/>
+          <p:cNvSpPr txBox="1"/>
+          <p:nvPr/>
+        </p:nvSpPr>
+        <p:spPr>
+          <a:xfrm>
+            <a:off x="6492240" y="1874519"/>
+            <a:ext cx="5120640" cy="3200400"/>
+          </a:xfrm>
+          <a:prstGeom prst="rect">
+            <a:avLst/>
+          </a:prstGeom>
+          <a:noFill/>
+        </p:spPr>
+        <p:txBody>
+          <a:bodyPr wrap="square">
+            <a:spAutoFit/>
+          </a:bodyPr>
+          <a:lstStyle/>
+          <a:p>
+            <a:pPr>
+              <a:spcBef>
+                <a:spcPts val="0"/>
+              </a:spcBef>
+            </a:pPr>
+            <a:r>
+              <a:rPr sz="1800" b="1" i="0">
+                <a:solidFill>
+                  <a:srgbClr val="0D2B4E"/>
+                </a:solidFill>
+                <a:latin typeface="Calibri"/>
+              </a:rPr>
+              <a:t>"Draft an intro between Sarah Chen and Mark Fuller."</a:t>
+            </a:r>
+          </a:p>
+          <a:p>
+            <a:pPr>
+              <a:spcBef>
+                <a:spcPts val="600"/>
+              </a:spcBef>
+            </a:pPr>
+            <a:r>
+              <a:rPr sz="1700" b="0" i="0">
+                <a:solidFill>
+                  <a:srgbClr val="6B7280"/>
+                </a:solidFill>
+                <a:latin typeface="Calibri"/>
+              </a:rPr>
+              <a:t>Claude reads Sarah's file. Reads Mark's file. Finds the specific reason these two should connect. Writes a personalized introduction that references both of their histories.</a:t>
+            </a:r>
+          </a:p>
+          <a:p>
+            <a:pPr>
+              <a:spcBef>
+                <a:spcPts val="600"/>
+              </a:spcBef>
+            </a:pPr>
+            <a:r>
+              <a:rPr sz="1700" b="1" i="0">
+                <a:solidFill>
+                  <a:srgbClr val="0D2B4E"/>
+                </a:solidFill>
+                <a:latin typeface="Calibri"/>
+              </a:rPr>
+              <a:t>Jon makes one small edit and sends.</a:t>
+            </a:r>
+          </a:p>
+          <a:p>
+            <a:pPr>
+              <a:spcBef>
+                <a:spcPts val="200"/>
+              </a:spcBef>
+            </a:pPr>
+            <a:endParaRPr sz="1700" b="1" i="0">
+              <a:solidFill>
+                <a:srgbClr val="0D2B4E"/>
+              </a:solidFill>
+              <a:latin typeface="Calibri"/>
+            </a:endParaRPr>
+          </a:p>
+          <a:p>
+            <a:pPr>
+              <a:spcBef>
+                <a:spcPts val="600"/>
+              </a:spcBef>
+            </a:pPr>
+            <a:r>
+              <a:rPr sz="1700" b="0" i="0">
+                <a:solidFill>
+                  <a:srgbClr val="6B7280"/>
+                </a:solidFill>
+                <a:latin typeface="Calibri"/>
+              </a:rPr>
+              <a:t>15 minutes of memory retrieval and manual typing.</a:t>
+            </a:r>
+          </a:p>
+          <a:p>
+            <a:pPr>
+              <a:spcBef>
+                <a:spcPts val="600"/>
+              </a:spcBef>
+            </a:pPr>
+            <a:r>
+              <a:rPr sz="2200" b="1" i="0">
+                <a:solidFill>
+                  <a:srgbClr val="C9913A"/>
+                </a:solidFill>
+                <a:latin typeface="Calibri"/>
+              </a:rPr>
+              <a:t>90 seconds.</a:t>
+            </a:r>
+          </a:p>
+        </p:txBody>
+      </p:sp>
+      <p:sp>
+        <p:nvSpPr>
+          <p:cNvPr id="8" name="Rectangle 7"/>
+          <p:cNvSpPr/>
+          <p:nvPr/>
+        </p:nvSpPr>
+        <p:spPr>
+          <a:xfrm>
+            <a:off x="548640" y="5120640"/>
+            <a:ext cx="11064240" cy="27432"/>
+          </a:xfrm>
+          <a:prstGeom prst="rect">
+            <a:avLst/>
+          </a:prstGeom>
+          <a:solidFill>
+            <a:srgbClr val="CCCCCC"/>
+          </a:solidFill>
+          <a:ln>
+            <a:noFill/>
+          </a:ln>
+        </p:spPr>
+        <p:style>
+          <a:lnRef idx="1">
+            <a:schemeClr val="accent1"/>
+          </a:lnRef>
+          <a:fillRef idx="3">
+            <a:schemeClr val="accent1"/>
+          </a:fillRef>
+          <a:effectRef idx="2">
+            <a:schemeClr val="accent1"/>
+          </a:effectRef>
+          <a:fontRef idx="minor">
+            <a:schemeClr val="lt1"/>
+          </a:fontRef>
+        </p:style>
+        <p:txBody>
+          <a:bodyPr rtlCol="0" anchor="ctr"/>
+          <a:lstStyle/>
+          <a:p>
+            <a:pPr algn="ctr"/>
+            <a:endParaRPr/>
+          </a:p>
+        </p:txBody>
+      </p:sp>
+      <p:sp>
+        <p:nvSpPr>
+          <p:cNvPr id="9" name="TextBox 8"/>
+          <p:cNvSpPr txBox="1"/>
+          <p:nvPr/>
+        </p:nvSpPr>
+        <p:spPr>
+          <a:xfrm>
+            <a:off x="548640" y="5212080"/>
+            <a:ext cx="11064240" cy="822960"/>
+          </a:xfrm>
+          <a:prstGeom prst="rect">
+            <a:avLst/>
+          </a:prstGeom>
+          <a:noFill/>
+        </p:spPr>
+        <p:txBody>
+          <a:bodyPr wrap="square">
+            <a:spAutoFit/>
+          </a:bodyPr>
+          <a:lstStyle/>
+          <a:p>
+            <a:pPr>
+              <a:spcBef>
+                <a:spcPts val="0"/>
+              </a:spcBef>
+            </a:pPr>
+            <a:r>
+              <a:rPr sz="1700" b="0" i="0">
+                <a:solidFill>
+                  <a:srgbClr val="6B7280"/>
+                </a:solidFill>
+                <a:latin typeface="Calibri"/>
+              </a:rPr>
+              <a:t>The key: Claude is not working from a general understanding of Jon's job. It is reading actual files about actual people before it writes a single word.</a:t>
+            </a:r>
+          </a:p>
+        </p:txBody>
+      </p:sp>
+    </p:spTree>
+  </p:cSld>
+  <p:clrMapOvr>
+    <a:masterClrMapping/>
+  </p:clrMapOvr>
+</p:sld>
+</file>
+
+<file path=ppt/slides/slide16.xml><?xml version="1.0" encoding="utf-8"?>
+<p:sld xmlns:a="http://schemas.openxmlformats.org/drawingml/2006/main" xmlns:r="http://schemas.openxmlformats.org/officeDocument/2006/relationships" xmlns:p="http://schemas.openxmlformats.org/presentationml/2006/main">
+  <p:cSld>
+    <p:bg>
+      <p:bgPr>
+        <a:solidFill>
+          <a:srgbClr val="F8F7F4"/>
+        </a:solidFill>
+        <a:effectLst/>
+      </p:bgPr>
+    </p:bg>
+    <p:spTree>
+      <p:nvGrpSpPr>
+        <p:cNvPr id="1" name=""/>
+        <p:cNvGrpSpPr/>
+        <p:nvPr/>
+      </p:nvGrpSpPr>
+      <p:grpSpPr>
+        <a:xfrm>
+          <a:off x="0" y="0"/>
+          <a:ext cx="0" cy="0"/>
+          <a:chOff x="0" y="0"/>
+          <a:chExt cx="0" cy="0"/>
+        </a:xfrm>
+      </p:grpSpPr>
+      <p:sp>
+        <p:nvSpPr>
+          <p:cNvPr id="2" name="TextBox 1"/>
+          <p:cNvSpPr txBox="1"/>
+          <p:nvPr/>
+        </p:nvSpPr>
+        <p:spPr>
+          <a:xfrm>
+            <a:off x="548640" y="384048"/>
+            <a:ext cx="11064240" cy="749808"/>
+          </a:xfrm>
+          <a:prstGeom prst="rect">
+            <a:avLst/>
+          </a:prstGeom>
+          <a:noFill/>
+        </p:spPr>
+        <p:txBody>
+          <a:bodyPr wrap="square">
+            <a:spAutoFit/>
+          </a:bodyPr>
+          <a:lstStyle/>
+          <a:p>
+            <a:pPr algn="l"/>
+            <a:r>
+              <a:rPr sz="3300" b="1" i="0">
+                <a:solidFill>
+                  <a:srgbClr val="0D2B4E"/>
+                </a:solidFill>
+                <a:latin typeface="Calibri"/>
+              </a:rPr>
+              <a:t>Stage 2 in practice -- Olivia's workspace.</a:t>
+            </a:r>
+          </a:p>
+        </p:txBody>
+      </p:sp>
+      <p:sp>
+        <p:nvSpPr>
+          <p:cNvPr id="3" name="Rectangle 2"/>
+          <p:cNvSpPr/>
+          <p:nvPr/>
+        </p:nvSpPr>
+        <p:spPr>
+          <a:xfrm>
+            <a:off x="548640" y="1115568"/>
+            <a:ext cx="365760" cy="50292"/>
+          </a:xfrm>
+          <a:prstGeom prst="rect">
+            <a:avLst/>
+          </a:prstGeom>
+          <a:solidFill>
+            <a:srgbClr val="C9913A"/>
+          </a:solidFill>
+          <a:ln>
+            <a:noFill/>
+          </a:ln>
+        </p:spPr>
+        <p:style>
+          <a:lnRef idx="1">
+            <a:schemeClr val="accent1"/>
+          </a:lnRef>
+          <a:fillRef idx="3">
+            <a:schemeClr val="accent1"/>
+          </a:fillRef>
+          <a:effectRef idx="2">
+            <a:schemeClr val="accent1"/>
+          </a:effectRef>
+          <a:fontRef idx="minor">
+            <a:schemeClr val="lt1"/>
+          </a:fontRef>
+        </p:style>
+        <p:txBody>
+          <a:bodyPr rtlCol="0" anchor="ctr"/>
+          <a:lstStyle/>
+          <a:p>
+            <a:pPr algn="ctr"/>
+            <a:endParaRPr/>
+          </a:p>
+        </p:txBody>
+      </p:sp>
+      <p:sp>
+        <p:nvSpPr>
+          <p:cNvPr id="4" name="TextBox 3"/>
+          <p:cNvSpPr txBox="1"/>
+          <p:nvPr/>
+        </p:nvSpPr>
+        <p:spPr>
+          <a:xfrm>
+            <a:off x="548640" y="1417320"/>
+            <a:ext cx="5303520" cy="411480"/>
+          </a:xfrm>
+          <a:prstGeom prst="rect">
+            <a:avLst/>
+          </a:prstGeom>
+          <a:noFill/>
+        </p:spPr>
+        <p:txBody>
+          <a:bodyPr wrap="square">
+            <a:spAutoFit/>
+          </a:bodyPr>
+          <a:lstStyle/>
+          <a:p>
+            <a:pPr algn="l"/>
+            <a:r>
+              <a:rPr sz="1600" b="1" i="0">
+                <a:solidFill>
+                  <a:srgbClr val="6B7280"/>
+                </a:solidFill>
+                <a:latin typeface="Calibri"/>
+              </a:rPr>
+              <a:t>What is in the system:</a:t>
+            </a:r>
+          </a:p>
+        </p:txBody>
+      </p:sp>
+      <p:sp>
+        <p:nvSpPr>
+          <p:cNvPr id="5" name="TextBox 4"/>
+          <p:cNvSpPr txBox="1"/>
+          <p:nvPr/>
+        </p:nvSpPr>
+        <p:spPr>
+          <a:xfrm>
+            <a:off x="548640" y="1874519"/>
+            <a:ext cx="5303520" cy="3200400"/>
+          </a:xfrm>
+          <a:prstGeom prst="rect">
+            <a:avLst/>
+          </a:prstGeom>
+          <a:noFill/>
+        </p:spPr>
+        <p:txBody>
+          <a:bodyPr wrap="square">
+            <a:spAutoFit/>
+          </a:bodyPr>
+          <a:lstStyle/>
+          <a:p>
+            <a:pPr>
+              <a:spcBef>
+                <a:spcPts val="0"/>
+              </a:spcBef>
+            </a:pPr>
+            <a:r>
+              <a:rPr sz="1700" b="0" i="0">
+                <a:solidFill>
+                  <a:srgbClr val="0D2B4E"/>
+                </a:solidFill>
+                <a:latin typeface="Calibri"/>
+              </a:rPr>
+              <a:t>Master briefing file -- Olivia's role, IU Angel Network mandate, evaluation criteria, LP communication standards, what to flag and what to avoid.</a:t>
+            </a:r>
+          </a:p>
+          <a:p>
+            <a:pPr>
+              <a:spcBef>
+                <a:spcPts val="600"/>
+              </a:spcBef>
+            </a:pPr>
+            <a:r>
+              <a:rPr sz="1700" b="0" i="0">
+                <a:solidFill>
+                  <a:srgbClr val="0D2B4E"/>
+                </a:solidFill>
+                <a:latin typeface="Calibri"/>
+              </a:rPr>
+              <a:t>Diligence template -- section order, required coverage, sourcing standards, how to handle missing information.</a:t>
+            </a:r>
+          </a:p>
+          <a:p>
+            <a:pPr>
+              <a:spcBef>
+                <a:spcPts val="600"/>
+              </a:spcBef>
+            </a:pPr>
+            <a:r>
+              <a:rPr sz="1700" b="0" i="0">
+                <a:solidFill>
+                  <a:srgbClr val="0D2B4E"/>
+                </a:solidFill>
+                <a:latin typeface="Calibri"/>
+              </a:rPr>
+              <a:t>Investment criteria -- stage focus, check size range, IU affiliation requirements, sector priorities.</a:t>
+            </a:r>
+          </a:p>
+          <a:p>
+            <a:pPr>
+              <a:spcBef>
+                <a:spcPts val="600"/>
+              </a:spcBef>
+            </a:pPr>
+            <a:r>
+              <a:rPr sz="1700" b="0" i="0">
+                <a:solidFill>
+                  <a:srgbClr val="0D2B4E"/>
+                </a:solidFill>
+                <a:latin typeface="Calibri"/>
+              </a:rPr>
+              <a:t>Past reports -- examples of best work, sections that have been revised, recurring questions to ask founders.</a:t>
+            </a:r>
+          </a:p>
+        </p:txBody>
+      </p:sp>
+      <p:sp>
+        <p:nvSpPr>
+          <p:cNvPr id="6" name="TextBox 5"/>
+          <p:cNvSpPr txBox="1"/>
+          <p:nvPr/>
+        </p:nvSpPr>
+        <p:spPr>
+          <a:xfrm>
+            <a:off x="6492240" y="1417320"/>
+            <a:ext cx="5120640" cy="411480"/>
+          </a:xfrm>
+          <a:prstGeom prst="rect">
+            <a:avLst/>
+          </a:prstGeom>
+          <a:noFill/>
+        </p:spPr>
+        <p:txBody>
+          <a:bodyPr wrap="square">
+            <a:spAutoFit/>
+          </a:bodyPr>
+          <a:lstStyle/>
+          <a:p>
+            <a:pPr algn="l"/>
+            <a:r>
+              <a:rPr sz="1600" b="1" i="0">
+                <a:solidFill>
+                  <a:srgbClr val="6B7280"/>
+                </a:solidFill>
+                <a:latin typeface="Calibri"/>
+              </a:rPr>
+              <a:t>What becomes possible:</a:t>
+            </a:r>
+          </a:p>
+        </p:txBody>
+      </p:sp>
+      <p:sp>
+        <p:nvSpPr>
+          <p:cNvPr id="7" name="TextBox 6"/>
+          <p:cNvSpPr txBox="1"/>
+          <p:nvPr/>
+        </p:nvSpPr>
+        <p:spPr>
+          <a:xfrm>
+            <a:off x="6492240" y="1874519"/>
+            <a:ext cx="5120640" cy="3200400"/>
+          </a:xfrm>
+          <a:prstGeom prst="rect">
+            <a:avLst/>
+          </a:prstGeom>
+          <a:noFill/>
+        </p:spPr>
+        <p:txBody>
+          <a:bodyPr wrap="square">
+            <a:spAutoFit/>
+          </a:bodyPr>
+          <a:lstStyle/>
+          <a:p>
+            <a:pPr>
+              <a:spcBef>
+                <a:spcPts val="0"/>
+              </a:spcBef>
+            </a:pPr>
+            <a:r>
+              <a:rPr sz="1800" b="1" i="0">
+                <a:solidFill>
+                  <a:srgbClr val="0D2B4E"/>
+                </a:solidFill>
+                <a:latin typeface="Calibri"/>
+              </a:rPr>
+              <a:t>"Run first-pass diligence on Motion Sports. Materials attached."</a:t>
+            </a:r>
+          </a:p>
+          <a:p>
+            <a:pPr>
+              <a:spcBef>
+                <a:spcPts val="600"/>
+              </a:spcBef>
+            </a:pPr>
+            <a:r>
+              <a:rPr sz="1700" b="0" i="0">
+                <a:solidFill>
+                  <a:srgbClr val="6B7280"/>
+                </a:solidFill>
+                <a:latin typeface="Calibri"/>
+              </a:rPr>
+              <a:t>Claude knows the format, the standards, the evaluation criteria, and the sourcing rules -- without being told. It already read everything at session start.</a:t>
+            </a:r>
+          </a:p>
+          <a:p>
+            <a:pPr>
+              <a:spcBef>
+                <a:spcPts val="600"/>
+              </a:spcBef>
+            </a:pPr>
+            <a:r>
+              <a:rPr sz="1700" b="1" i="0">
+                <a:solidFill>
+                  <a:srgbClr val="0D2B4E"/>
+                </a:solidFill>
+                <a:latin typeface="Calibri"/>
+              </a:rPr>
+              <a:t>Output: a structured first draft, sourced, flagged where information is missing.</a:t>
+            </a:r>
+          </a:p>
+          <a:p>
+            <a:pPr>
+              <a:spcBef>
+                <a:spcPts val="200"/>
+              </a:spcBef>
+            </a:pPr>
+            <a:endParaRPr sz="1700" b="1" i="0">
+              <a:solidFill>
+                <a:srgbClr val="0D2B4E"/>
+              </a:solidFill>
+              <a:latin typeface="Calibri"/>
+            </a:endParaRPr>
+          </a:p>
+          <a:p>
+            <a:pPr>
+              <a:spcBef>
+                <a:spcPts val="600"/>
+              </a:spcBef>
+            </a:pPr>
+            <a:r>
+              <a:rPr sz="1700" b="0" i="0">
+                <a:solidFill>
+                  <a:srgbClr val="6B7280"/>
+                </a:solidFill>
+                <a:latin typeface="Calibri"/>
+              </a:rPr>
+              <a:t>Four hours of research and writing.</a:t>
+            </a:r>
+          </a:p>
+          <a:p>
+            <a:pPr>
+              <a:spcBef>
+                <a:spcPts val="600"/>
+              </a:spcBef>
+            </a:pPr>
+            <a:r>
+              <a:rPr sz="2200" b="1" i="0">
+                <a:solidFill>
+                  <a:srgbClr val="C9913A"/>
+                </a:solidFill>
+                <a:latin typeface="Calibri"/>
+              </a:rPr>
+              <a:t>First draft in minutes.</a:t>
+            </a:r>
+          </a:p>
+        </p:txBody>
+      </p:sp>
+      <p:sp>
+        <p:nvSpPr>
+          <p:cNvPr id="8" name="Rectangle 7"/>
+          <p:cNvSpPr/>
+          <p:nvPr/>
+        </p:nvSpPr>
+        <p:spPr>
+          <a:xfrm>
+            <a:off x="548640" y="5120640"/>
+            <a:ext cx="11064240" cy="27432"/>
+          </a:xfrm>
+          <a:prstGeom prst="rect">
+            <a:avLst/>
+          </a:prstGeom>
+          <a:solidFill>
+            <a:srgbClr val="CCCCCC"/>
+          </a:solidFill>
+          <a:ln>
+            <a:noFill/>
+          </a:ln>
+        </p:spPr>
+        <p:style>
+          <a:lnRef idx="1">
+            <a:schemeClr val="accent1"/>
+          </a:lnRef>
+          <a:fillRef idx="3">
+            <a:schemeClr val="accent1"/>
+          </a:fillRef>
+          <a:effectRef idx="2">
+            <a:schemeClr val="accent1"/>
+          </a:effectRef>
+          <a:fontRef idx="minor">
+            <a:schemeClr val="lt1"/>
+          </a:fontRef>
+        </p:style>
+        <p:txBody>
+          <a:bodyPr rtlCol="0" anchor="ctr"/>
+          <a:lstStyle/>
+          <a:p>
+            <a:pPr algn="ctr"/>
+            <a:endParaRPr/>
+          </a:p>
+        </p:txBody>
+      </p:sp>
+      <p:sp>
+        <p:nvSpPr>
+          <p:cNvPr id="9" name="TextBox 8"/>
+          <p:cNvSpPr txBox="1"/>
+          <p:nvPr/>
+        </p:nvSpPr>
+        <p:spPr>
+          <a:xfrm>
+            <a:off x="548640" y="5212080"/>
+            <a:ext cx="11064240" cy="822960"/>
+          </a:xfrm>
+          <a:prstGeom prst="rect">
+            <a:avLst/>
+          </a:prstGeom>
+          <a:noFill/>
+        </p:spPr>
+        <p:txBody>
+          <a:bodyPr wrap="square">
+            <a:spAutoFit/>
+          </a:bodyPr>
+          <a:lstStyle/>
+          <a:p>
+            <a:pPr>
+              <a:spcBef>
+                <a:spcPts val="0"/>
+              </a:spcBef>
+            </a:pPr>
+            <a:r>
+              <a:rPr sz="1700" b="0" i="0">
+                <a:solidFill>
+                  <a:srgbClr val="6B7280"/>
+                </a:solidFill>
+                <a:latin typeface="Calibri"/>
+              </a:rPr>
+              <a:t>This is not AI doing your job. It is AI doing the 80% that surrounds your judgment so you can spend your time on the 20% only you can do.</a:t>
+            </a:r>
+          </a:p>
+        </p:txBody>
+      </p:sp>
+    </p:spTree>
+  </p:cSld>
+  <p:clrMapOvr>
+    <a:masterClrMapping/>
+  </p:clrMapOvr>
+</p:sld>
+</file>
+
+<file path=ppt/slides/slide17.xml><?xml version="1.0" encoding="utf-8"?>
+<p:sld xmlns:a="http://schemas.openxmlformats.org/drawingml/2006/main" xmlns:r="http://schemas.openxmlformats.org/officeDocument/2006/relationships" xmlns:p="http://schemas.openxmlformats.org/presentationml/2006/main">
   <p:cSld>
     <p:bg>
       <p:bgPr>
@@ -4668,7 +5447,14 @@
         <p:cNvGrpSpPr/>
         <p:nvPr/>
       </p:nvGrpSpPr>
-      <p:grpSpPr/>
+      <p:grpSpPr>
+        <a:xfrm>
+          <a:off x="0" y="0"/>
+          <a:ext cx="0" cy="0"/>
+          <a:chOff x="0" y="0"/>
+          <a:chExt cx="0" cy="0"/>
+        </a:xfrm>
+      </p:grpSpPr>
       <p:sp>
         <p:nvSpPr>
           <p:cNvPr id="2" name="TextBox 1"/>
@@ -4712,7 +5498,7 @@
         </p:nvSpPr>
         <p:spPr>
           <a:xfrm>
-            <a:off x="548640" y="384048"/>
+            <a:off x="548640" y="550111"/>
             <a:ext cx="11064240" cy="749808"/>
           </a:xfrm>
           <a:prstGeom prst="rect">
@@ -4779,6 +5565,7 @@
           <a:lstStyle/>
           <a:p>
             <a:pPr algn="ctr"/>
+            <a:endParaRPr/>
           </a:p>
         </p:txBody>
       </p:sp>
@@ -4873,15 +5660,12 @@
                 <a:spcPts val="200"/>
               </a:spcBef>
             </a:pPr>
-            <a:r>
-              <a:rPr sz="600" b="0" i="0">
-                <a:solidFill>
-                  <a:srgbClr val="0D2B4E"/>
-                </a:solidFill>
-                <a:latin typeface="Calibri"/>
-              </a:rPr>
-              <a:t/>
-            </a:r>
+            <a:endParaRPr sz="1900" b="1" i="0">
+              <a:solidFill>
+                <a:srgbClr val="FFFFFF"/>
+              </a:solidFill>
+              <a:latin typeface="Calibri"/>
+            </a:endParaRPr>
           </a:p>
           <a:p>
             <a:pPr>
@@ -4909,8 +5693,8 @@
 </p:sld>
 </file>
 
-<file path=ppt/slides/slide15.xml><?xml version="1.0" encoding="utf-8"?>
-<p:sld xmlns:a="http://schemas.openxmlformats.org/drawingml/2006/main" xmlns:p="http://schemas.openxmlformats.org/presentationml/2006/main" xmlns:r="http://schemas.openxmlformats.org/officeDocument/2006/relationships">
+<file path=ppt/slides/slide18.xml><?xml version="1.0" encoding="utf-8"?>
+<p:sld xmlns:a="http://schemas.openxmlformats.org/drawingml/2006/main" xmlns:r="http://schemas.openxmlformats.org/officeDocument/2006/relationships" xmlns:p="http://schemas.openxmlformats.org/presentationml/2006/main">
   <p:cSld>
     <p:bg>
       <p:bgPr>
@@ -4926,7 +5710,14 @@
         <p:cNvGrpSpPr/>
         <p:nvPr/>
       </p:nvGrpSpPr>
-      <p:grpSpPr/>
+      <p:grpSpPr>
+        <a:xfrm>
+          <a:off x="0" y="0"/>
+          <a:ext cx="0" cy="0"/>
+          <a:chOff x="0" y="0"/>
+          <a:chExt cx="0" cy="0"/>
+        </a:xfrm>
+      </p:grpSpPr>
       <p:sp>
         <p:nvSpPr>
           <p:cNvPr id="2" name="TextBox 1"/>
@@ -5002,6 +5793,7 @@
           <a:lstStyle/>
           <a:p>
             <a:pPr algn="ctr"/>
+            <a:endParaRPr/>
           </a:p>
         </p:txBody>
       </p:sp>
@@ -5080,15 +5872,12 @@
                 <a:spcPts val="200"/>
               </a:spcBef>
             </a:pPr>
-            <a:r>
-              <a:rPr sz="600" b="0" i="0">
-                <a:solidFill>
-                  <a:srgbClr val="0D2B4E"/>
-                </a:solidFill>
-                <a:latin typeface="Calibri"/>
-              </a:rPr>
-              <a:t/>
-            </a:r>
+            <a:endParaRPr sz="1900" b="0" i="0">
+              <a:solidFill>
+                <a:srgbClr val="6B7280"/>
+              </a:solidFill>
+              <a:latin typeface="Calibri"/>
+            </a:endParaRPr>
           </a:p>
           <a:p>
             <a:pPr>
@@ -5148,8 +5937,8 @@
 </p:sld>
 </file>
 
-<file path=ppt/slides/slide16.xml><?xml version="1.0" encoding="utf-8"?>
-<p:sld xmlns:a="http://schemas.openxmlformats.org/drawingml/2006/main" xmlns:p="http://schemas.openxmlformats.org/presentationml/2006/main" xmlns:r="http://schemas.openxmlformats.org/officeDocument/2006/relationships">
+<file path=ppt/slides/slide19.xml><?xml version="1.0" encoding="utf-8"?>
+<p:sld xmlns:a="http://schemas.openxmlformats.org/drawingml/2006/main" xmlns:r="http://schemas.openxmlformats.org/officeDocument/2006/relationships" xmlns:p="http://schemas.openxmlformats.org/presentationml/2006/main">
   <p:cSld>
     <p:bg>
       <p:bgPr>
@@ -5165,7 +5954,14 @@
         <p:cNvGrpSpPr/>
         <p:nvPr/>
       </p:nvGrpSpPr>
-      <p:grpSpPr/>
+      <p:grpSpPr>
+        <a:xfrm>
+          <a:off x="0" y="0"/>
+          <a:ext cx="0" cy="0"/>
+          <a:chOff x="0" y="0"/>
+          <a:chExt cx="0" cy="0"/>
+        </a:xfrm>
+      </p:grpSpPr>
       <p:sp>
         <p:nvSpPr>
           <p:cNvPr id="2" name="TextBox 1"/>
@@ -5241,6 +6037,7 @@
           <a:lstStyle/>
           <a:p>
             <a:pPr algn="ctr"/>
+            <a:endParaRPr/>
           </a:p>
         </p:txBody>
       </p:sp>
@@ -5335,15 +6132,12 @@
                 <a:spcPts val="200"/>
               </a:spcBef>
             </a:pPr>
-            <a:r>
-              <a:rPr sz="600" b="0" i="0">
-                <a:solidFill>
-                  <a:srgbClr val="0D2B4E"/>
-                </a:solidFill>
-                <a:latin typeface="Calibri"/>
-              </a:rPr>
-              <a:t/>
-            </a:r>
+            <a:endParaRPr sz="1900" b="1" i="0">
+              <a:solidFill>
+                <a:srgbClr val="C9913A"/>
+              </a:solidFill>
+              <a:latin typeface="Calibri"/>
+            </a:endParaRPr>
           </a:p>
           <a:p>
             <a:pPr>
@@ -5371,8 +6165,467 @@
 </p:sld>
 </file>
 
-<file path=ppt/slides/slide17.xml><?xml version="1.0" encoding="utf-8"?>
-<p:sld xmlns:a="http://schemas.openxmlformats.org/drawingml/2006/main" xmlns:p="http://schemas.openxmlformats.org/presentationml/2006/main" xmlns:r="http://schemas.openxmlformats.org/officeDocument/2006/relationships">
+<file path=ppt/slides/slide2.xml><?xml version="1.0" encoding="utf-8"?>
+<p:sld xmlns:a="http://schemas.openxmlformats.org/drawingml/2006/main" xmlns:r="http://schemas.openxmlformats.org/officeDocument/2006/relationships" xmlns:p="http://schemas.openxmlformats.org/presentationml/2006/main">
+  <p:cSld>
+    <p:bg>
+      <p:bgPr>
+        <a:solidFill>
+          <a:srgbClr val="0D2B4E"/>
+        </a:solidFill>
+        <a:effectLst/>
+      </p:bgPr>
+    </p:bg>
+    <p:spTree>
+      <p:nvGrpSpPr>
+        <p:cNvPr id="1" name=""/>
+        <p:cNvGrpSpPr/>
+        <p:nvPr/>
+      </p:nvGrpSpPr>
+      <p:grpSpPr>
+        <a:xfrm>
+          <a:off x="0" y="0"/>
+          <a:ext cx="0" cy="0"/>
+          <a:chOff x="0" y="0"/>
+          <a:chExt cx="0" cy="0"/>
+        </a:xfrm>
+      </p:grpSpPr>
+      <p:sp>
+        <p:nvSpPr>
+          <p:cNvPr id="2" name="TextBox 1"/>
+          <p:cNvSpPr txBox="1"/>
+          <p:nvPr/>
+        </p:nvSpPr>
+        <p:spPr>
+          <a:xfrm>
+            <a:off x="822960" y="502920"/>
+            <a:ext cx="10515600" cy="685800"/>
+          </a:xfrm>
+          <a:prstGeom prst="rect">
+            <a:avLst/>
+          </a:prstGeom>
+          <a:noFill/>
+        </p:spPr>
+        <p:txBody>
+          <a:bodyPr wrap="square">
+            <a:spAutoFit/>
+          </a:bodyPr>
+          <a:lstStyle/>
+          <a:p>
+            <a:pPr algn="ctr"/>
+            <a:r>
+              <a:rPr sz="2200" b="0" i="0">
+                <a:solidFill>
+                  <a:srgbClr val="AABBCC"/>
+                </a:solidFill>
+                <a:latin typeface="Calibri"/>
+              </a:rPr>
+              <a:t>Your facilitators today.</a:t>
+            </a:r>
+          </a:p>
+        </p:txBody>
+      </p:sp>
+      <p:sp>
+        <p:nvSpPr>
+          <p:cNvPr id="3" name="Rectangle 2"/>
+          <p:cNvSpPr/>
+          <p:nvPr/>
+        </p:nvSpPr>
+        <p:spPr>
+          <a:xfrm>
+            <a:off x="5715000" y="1170432"/>
+            <a:ext cx="777240" cy="50292"/>
+          </a:xfrm>
+          <a:prstGeom prst="rect">
+            <a:avLst/>
+          </a:prstGeom>
+          <a:solidFill>
+            <a:srgbClr val="C9913A"/>
+          </a:solidFill>
+          <a:ln>
+            <a:noFill/>
+          </a:ln>
+        </p:spPr>
+        <p:style>
+          <a:lnRef idx="1">
+            <a:schemeClr val="accent1"/>
+          </a:lnRef>
+          <a:fillRef idx="3">
+            <a:schemeClr val="accent1"/>
+          </a:fillRef>
+          <a:effectRef idx="2">
+            <a:schemeClr val="accent1"/>
+          </a:effectRef>
+          <a:fontRef idx="minor">
+            <a:schemeClr val="lt1"/>
+          </a:fontRef>
+        </p:style>
+        <p:txBody>
+          <a:bodyPr rtlCol="0" anchor="ctr"/>
+          <a:lstStyle/>
+          <a:p>
+            <a:pPr algn="ctr"/>
+            <a:endParaRPr/>
+          </a:p>
+        </p:txBody>
+      </p:sp>
+      <p:sp>
+        <p:nvSpPr>
+          <p:cNvPr id="4" name="TextBox 3"/>
+          <p:cNvSpPr txBox="1"/>
+          <p:nvPr/>
+        </p:nvSpPr>
+        <p:spPr>
+          <a:xfrm>
+            <a:off x="1097280" y="1463040"/>
+            <a:ext cx="4572000" cy="685800"/>
+          </a:xfrm>
+          <a:prstGeom prst="rect">
+            <a:avLst/>
+          </a:prstGeom>
+          <a:noFill/>
+        </p:spPr>
+        <p:txBody>
+          <a:bodyPr wrap="square">
+            <a:spAutoFit/>
+          </a:bodyPr>
+          <a:lstStyle/>
+          <a:p>
+            <a:pPr algn="l"/>
+            <a:r>
+              <a:rPr sz="3000" b="1" i="0">
+                <a:solidFill>
+                  <a:srgbClr val="FFFFFF"/>
+                </a:solidFill>
+                <a:latin typeface="Calibri"/>
+              </a:rPr>
+              <a:t>Nick Frische</a:t>
+            </a:r>
+          </a:p>
+        </p:txBody>
+      </p:sp>
+      <p:sp>
+        <p:nvSpPr>
+          <p:cNvPr id="5" name="TextBox 4"/>
+          <p:cNvSpPr txBox="1"/>
+          <p:nvPr/>
+        </p:nvSpPr>
+        <p:spPr>
+          <a:xfrm>
+            <a:off x="1097280" y="2148840"/>
+            <a:ext cx="4572000" cy="457200"/>
+          </a:xfrm>
+          <a:prstGeom prst="rect">
+            <a:avLst/>
+          </a:prstGeom>
+          <a:noFill/>
+        </p:spPr>
+        <p:txBody>
+          <a:bodyPr wrap="square">
+            <a:spAutoFit/>
+          </a:bodyPr>
+          <a:lstStyle/>
+          <a:p>
+            <a:pPr algn="l"/>
+            <a:r>
+              <a:rPr sz="1700" b="0" i="0">
+                <a:solidFill>
+                  <a:srgbClr val="C9913A"/>
+                </a:solidFill>
+                <a:latin typeface="Calibri"/>
+              </a:rPr>
+              <a:t>Co-founder, BPN Solutions</a:t>
+            </a:r>
+          </a:p>
+        </p:txBody>
+      </p:sp>
+      <p:sp>
+        <p:nvSpPr>
+          <p:cNvPr id="6" name="TextBox 5"/>
+          <p:cNvSpPr txBox="1"/>
+          <p:nvPr/>
+        </p:nvSpPr>
+        <p:spPr>
+          <a:xfrm>
+            <a:off x="1097280" y="2697480"/>
+            <a:ext cx="4754880" cy="2011680"/>
+          </a:xfrm>
+          <a:prstGeom prst="rect">
+            <a:avLst/>
+          </a:prstGeom>
+          <a:noFill/>
+        </p:spPr>
+        <p:txBody>
+          <a:bodyPr wrap="square">
+            <a:spAutoFit/>
+          </a:bodyPr>
+          <a:lstStyle/>
+          <a:p>
+            <a:pPr>
+              <a:spcBef>
+                <a:spcPts val="0"/>
+              </a:spcBef>
+            </a:pPr>
+            <a:r>
+              <a:rPr sz="1700" b="0" i="0">
+                <a:solidFill>
+                  <a:srgbClr val="AABBCC"/>
+                </a:solidFill>
+                <a:latin typeface="Calibri"/>
+              </a:rPr>
+              <a:t>Leads business development and client relationships.</a:t>
+            </a:r>
+          </a:p>
+          <a:p>
+            <a:pPr>
+              <a:spcBef>
+                <a:spcPts val="600"/>
+              </a:spcBef>
+            </a:pPr>
+            <a:r>
+              <a:rPr sz="1700" b="0" i="0">
+                <a:solidFill>
+                  <a:srgbClr val="AABBCC"/>
+                </a:solidFill>
+                <a:latin typeface="Calibri"/>
+              </a:rPr>
+              <a:t>Taking you through Phase 1 today -- the foundation, the mental model, and the concepts that make everything Phil builds with you actually land.</a:t>
+            </a:r>
+          </a:p>
+        </p:txBody>
+      </p:sp>
+      <p:sp>
+        <p:nvSpPr>
+          <p:cNvPr id="7" name="Rectangle 6"/>
+          <p:cNvSpPr/>
+          <p:nvPr/>
+        </p:nvSpPr>
+        <p:spPr>
+          <a:xfrm>
+            <a:off x="6263640" y="1463040"/>
+            <a:ext cx="36576" cy="3474720"/>
+          </a:xfrm>
+          <a:prstGeom prst="rect">
+            <a:avLst/>
+          </a:prstGeom>
+          <a:solidFill>
+            <a:srgbClr val="334466"/>
+          </a:solidFill>
+          <a:ln>
+            <a:noFill/>
+          </a:ln>
+        </p:spPr>
+        <p:style>
+          <a:lnRef idx="1">
+            <a:schemeClr val="accent1"/>
+          </a:lnRef>
+          <a:fillRef idx="3">
+            <a:schemeClr val="accent1"/>
+          </a:fillRef>
+          <a:effectRef idx="2">
+            <a:schemeClr val="accent1"/>
+          </a:effectRef>
+          <a:fontRef idx="minor">
+            <a:schemeClr val="lt1"/>
+          </a:fontRef>
+        </p:style>
+        <p:txBody>
+          <a:bodyPr rtlCol="0" anchor="ctr"/>
+          <a:lstStyle/>
+          <a:p>
+            <a:pPr algn="ctr"/>
+            <a:endParaRPr/>
+          </a:p>
+        </p:txBody>
+      </p:sp>
+      <p:sp>
+        <p:nvSpPr>
+          <p:cNvPr id="8" name="TextBox 7"/>
+          <p:cNvSpPr txBox="1"/>
+          <p:nvPr/>
+        </p:nvSpPr>
+        <p:spPr>
+          <a:xfrm>
+            <a:off x="6675120" y="1463040"/>
+            <a:ext cx="4572000" cy="685800"/>
+          </a:xfrm>
+          <a:prstGeom prst="rect">
+            <a:avLst/>
+          </a:prstGeom>
+          <a:noFill/>
+        </p:spPr>
+        <p:txBody>
+          <a:bodyPr wrap="square">
+            <a:spAutoFit/>
+          </a:bodyPr>
+          <a:lstStyle/>
+          <a:p>
+            <a:pPr algn="l"/>
+            <a:r>
+              <a:rPr sz="3000" b="1" i="0">
+                <a:solidFill>
+                  <a:srgbClr val="FFFFFF"/>
+                </a:solidFill>
+                <a:latin typeface="Calibri"/>
+              </a:rPr>
+              <a:t>Phil Hess</a:t>
+            </a:r>
+          </a:p>
+        </p:txBody>
+      </p:sp>
+      <p:sp>
+        <p:nvSpPr>
+          <p:cNvPr id="9" name="TextBox 8"/>
+          <p:cNvSpPr txBox="1"/>
+          <p:nvPr/>
+        </p:nvSpPr>
+        <p:spPr>
+          <a:xfrm>
+            <a:off x="6675120" y="2148840"/>
+            <a:ext cx="4572000" cy="457200"/>
+          </a:xfrm>
+          <a:prstGeom prst="rect">
+            <a:avLst/>
+          </a:prstGeom>
+          <a:noFill/>
+        </p:spPr>
+        <p:txBody>
+          <a:bodyPr wrap="square">
+            <a:spAutoFit/>
+          </a:bodyPr>
+          <a:lstStyle/>
+          <a:p>
+            <a:pPr algn="l"/>
+            <a:r>
+              <a:rPr sz="1700" b="0" i="0">
+                <a:solidFill>
+                  <a:srgbClr val="C9913A"/>
+                </a:solidFill>
+                <a:latin typeface="Calibri"/>
+              </a:rPr>
+              <a:t>Co-founder, BPN Solutions</a:t>
+            </a:r>
+          </a:p>
+        </p:txBody>
+      </p:sp>
+      <p:sp>
+        <p:nvSpPr>
+          <p:cNvPr id="10" name="TextBox 9"/>
+          <p:cNvSpPr txBox="1"/>
+          <p:nvPr/>
+        </p:nvSpPr>
+        <p:spPr>
+          <a:xfrm>
+            <a:off x="6675120" y="2697480"/>
+            <a:ext cx="5029200" cy="954107"/>
+          </a:xfrm>
+          <a:prstGeom prst="rect">
+            <a:avLst/>
+          </a:prstGeom>
+          <a:noFill/>
+        </p:spPr>
+        <p:txBody>
+          <a:bodyPr wrap="square">
+            <a:spAutoFit/>
+          </a:bodyPr>
+          <a:lstStyle/>
+          <a:p>
+            <a:pPr>
+              <a:spcBef>
+                <a:spcPts val="0"/>
+              </a:spcBef>
+            </a:pPr>
+            <a:r>
+              <a:rPr sz="1700" b="0" i="0" dirty="0">
+                <a:solidFill>
+                  <a:srgbClr val="AABBCC"/>
+                </a:solidFill>
+                <a:latin typeface="Calibri"/>
+              </a:rPr>
+              <a:t>Leads technical delivery and </a:t>
+            </a:r>
+            <a:r>
+              <a:rPr lang="en-US" sz="1700" dirty="0">
+                <a:solidFill>
+                  <a:srgbClr val="AABBCC"/>
+                </a:solidFill>
+                <a:latin typeface="Calibri"/>
+              </a:rPr>
+              <a:t>industry partnerships</a:t>
+            </a:r>
+            <a:r>
+              <a:rPr sz="1700" b="0" i="0" dirty="0">
+                <a:solidFill>
+                  <a:srgbClr val="AABBCC"/>
+                </a:solidFill>
+                <a:latin typeface="Calibri"/>
+              </a:rPr>
+              <a:t>.</a:t>
+            </a:r>
+          </a:p>
+          <a:p>
+            <a:pPr>
+              <a:spcBef>
+                <a:spcPts val="600"/>
+              </a:spcBef>
+            </a:pPr>
+            <a:r>
+              <a:rPr sz="1700" b="0" i="0" dirty="0">
+                <a:solidFill>
+                  <a:srgbClr val="AABBCC"/>
+                </a:solidFill>
+                <a:latin typeface="Calibri"/>
+              </a:rPr>
+              <a:t>Running Phases 2 through 4 -- hands-on setup, context bank build, and live automation work.</a:t>
+            </a:r>
+          </a:p>
+        </p:txBody>
+      </p:sp>
+      <p:sp>
+        <p:nvSpPr>
+          <p:cNvPr id="11" name="TextBox 10"/>
+          <p:cNvSpPr txBox="1"/>
+          <p:nvPr/>
+        </p:nvSpPr>
+        <p:spPr>
+          <a:xfrm>
+            <a:off x="822960" y="6035040"/>
+            <a:ext cx="10515600" cy="457200"/>
+          </a:xfrm>
+          <a:prstGeom prst="rect">
+            <a:avLst/>
+          </a:prstGeom>
+          <a:noFill/>
+        </p:spPr>
+        <p:txBody>
+          <a:bodyPr wrap="square">
+            <a:spAutoFit/>
+          </a:bodyPr>
+          <a:lstStyle/>
+          <a:p>
+            <a:pPr algn="ctr"/>
+            <a:r>
+              <a:rPr sz="1300" b="0" i="0">
+                <a:solidFill>
+                  <a:srgbClr val="AABBCC"/>
+                </a:solidFill>
+                <a:latin typeface="Calibri"/>
+              </a:rPr>
+              <a:t>bpnsolutions.com  ·  Bloomington, Indiana</a:t>
+            </a:r>
+          </a:p>
+        </p:txBody>
+      </p:sp>
+    </p:spTree>
+  </p:cSld>
+  <p:clrMapOvr>
+    <a:masterClrMapping/>
+  </p:clrMapOvr>
+</p:sld>
+</file>
+
+<file path=ppt/slides/slide20.xml><?xml version="1.0" encoding="utf-8"?>
+<p:sld xmlns:a="http://schemas.openxmlformats.org/drawingml/2006/main" xmlns:r="http://schemas.openxmlformats.org/officeDocument/2006/relationships" xmlns:p="http://schemas.openxmlformats.org/presentationml/2006/main">
   <p:cSld>
     <p:bg>
       <p:bgPr>
@@ -5388,7 +6641,14 @@
         <p:cNvGrpSpPr/>
         <p:nvPr/>
       </p:nvGrpSpPr>
-      <p:grpSpPr/>
+      <p:grpSpPr>
+        <a:xfrm>
+          <a:off x="0" y="0"/>
+          <a:ext cx="0" cy="0"/>
+          <a:chOff x="0" y="0"/>
+          <a:chExt cx="0" cy="0"/>
+        </a:xfrm>
+      </p:grpSpPr>
       <p:sp>
         <p:nvSpPr>
           <p:cNvPr id="2" name="TextBox 1"/>
@@ -5464,6 +6724,7 @@
           <a:lstStyle/>
           <a:p>
             <a:pPr algn="ctr"/>
+            <a:endParaRPr/>
           </a:p>
         </p:txBody>
       </p:sp>
@@ -5787,6 +7048,7 @@
           <a:lstStyle/>
           <a:p>
             <a:pPr algn="ctr"/>
+            <a:endParaRPr/>
           </a:p>
         </p:txBody>
       </p:sp>
@@ -5833,8 +7095,8 @@
 </p:sld>
 </file>
 
-<file path=ppt/slides/slide18.xml><?xml version="1.0" encoding="utf-8"?>
-<p:sld xmlns:a="http://schemas.openxmlformats.org/drawingml/2006/main" xmlns:p="http://schemas.openxmlformats.org/presentationml/2006/main" xmlns:r="http://schemas.openxmlformats.org/officeDocument/2006/relationships">
+<file path=ppt/slides/slide21.xml><?xml version="1.0" encoding="utf-8"?>
+<p:sld xmlns:a="http://schemas.openxmlformats.org/drawingml/2006/main" xmlns:r="http://schemas.openxmlformats.org/officeDocument/2006/relationships" xmlns:p="http://schemas.openxmlformats.org/presentationml/2006/main">
   <p:cSld>
     <p:bg>
       <p:bgPr>
@@ -5850,7 +7112,14 @@
         <p:cNvGrpSpPr/>
         <p:nvPr/>
       </p:nvGrpSpPr>
-      <p:grpSpPr/>
+      <p:grpSpPr>
+        <a:xfrm>
+          <a:off x="0" y="0"/>
+          <a:ext cx="0" cy="0"/>
+          <a:chOff x="0" y="0"/>
+          <a:chExt cx="0" cy="0"/>
+        </a:xfrm>
+      </p:grpSpPr>
       <p:sp>
         <p:nvSpPr>
           <p:cNvPr id="2" name="TextBox 1"/>
@@ -5926,6 +7195,7 @@
           <a:lstStyle/>
           <a:p>
             <a:pPr algn="ctr"/>
+            <a:endParaRPr/>
           </a:p>
         </p:txBody>
       </p:sp>
@@ -6004,61 +7274,58 @@
                 <a:spcPts val="200"/>
               </a:spcBef>
             </a:pPr>
-            <a:r>
-              <a:rPr sz="600" b="0" i="0">
+            <a:endParaRPr sz="1900" b="0" i="0">
+              <a:solidFill>
+                <a:srgbClr val="0D2B4E"/>
+              </a:solidFill>
+              <a:latin typeface="Calibri"/>
+            </a:endParaRPr>
+          </a:p>
+          <a:p>
+            <a:pPr>
+              <a:spcBef>
+                <a:spcPts val="600"/>
+              </a:spcBef>
+            </a:pPr>
+            <a:r>
+              <a:rPr sz="1900" b="1" i="0">
+                <a:solidFill>
+                  <a:srgbClr val="C9913A"/>
+                </a:solidFill>
+                <a:latin typeface="Calibri"/>
+              </a:rPr>
+              <a:t>The approval layer is not optional -- it is the design.</a:t>
+            </a:r>
+          </a:p>
+          <a:p>
+            <a:pPr>
+              <a:spcBef>
+                <a:spcPts val="600"/>
+              </a:spcBef>
+            </a:pPr>
+            <a:r>
+              <a:rPr sz="1900" b="0" i="0">
+                <a:solidFill>
+                  <a:srgbClr val="6B7280"/>
+                </a:solidFill>
+                <a:latin typeface="Calibri"/>
+              </a:rPr>
+              <a:t>Jon's introduction is drafted, formatted, and ready to send. Olivia's first-pass diligence is structured and sourced. Tony's deal brief is pulled and prioritized. Nothing leaves until a human reviews it and approves.</a:t>
+            </a:r>
+          </a:p>
+          <a:p>
+            <a:pPr>
+              <a:spcBef>
+                <a:spcPts val="600"/>
+              </a:spcBef>
+            </a:pPr>
+            <a:r>
+              <a:rPr sz="1900" b="1" i="0">
                 <a:solidFill>
                   <a:srgbClr val="0D2B4E"/>
                 </a:solidFill>
                 <a:latin typeface="Calibri"/>
               </a:rPr>
-              <a:t/>
-            </a:r>
-          </a:p>
-          <a:p>
-            <a:pPr>
-              <a:spcBef>
-                <a:spcPts val="600"/>
-              </a:spcBef>
-            </a:pPr>
-            <a:r>
-              <a:rPr sz="1900" b="1" i="0">
-                <a:solidFill>
-                  <a:srgbClr val="C9913A"/>
-                </a:solidFill>
-                <a:latin typeface="Calibri"/>
-              </a:rPr>
-              <a:t>The approval layer is not optional -- it is the design.</a:t>
-            </a:r>
-          </a:p>
-          <a:p>
-            <a:pPr>
-              <a:spcBef>
-                <a:spcPts val="600"/>
-              </a:spcBef>
-            </a:pPr>
-            <a:r>
-              <a:rPr sz="1900" b="0" i="0">
-                <a:solidFill>
-                  <a:srgbClr val="6B7280"/>
-                </a:solidFill>
-                <a:latin typeface="Calibri"/>
-              </a:rPr>
-              <a:t>Jon's introduction is drafted, formatted, and ready to send. Olivia's first-pass diligence is structured and sourced. Tony's deal brief is pulled and prioritized. Nothing leaves until a human reviews it and approves.</a:t>
-            </a:r>
-          </a:p>
-          <a:p>
-            <a:pPr>
-              <a:spcBef>
-                <a:spcPts val="600"/>
-              </a:spcBef>
-            </a:pPr>
-            <a:r>
-              <a:rPr sz="1900" b="1" i="0">
-                <a:solidFill>
-                  <a:srgbClr val="0D2B4E"/>
-                </a:solidFill>
-                <a:latin typeface="Calibri"/>
-              </a:rPr>
               <a:t>The human is no longer doing the 80% that surrounds the decision. They are doing the decision.</a:t>
             </a:r>
           </a:p>
@@ -6068,15 +7335,12 @@
                 <a:spcPts val="200"/>
               </a:spcBef>
             </a:pPr>
-            <a:r>
-              <a:rPr sz="600" b="0" i="0">
-                <a:solidFill>
-                  <a:srgbClr val="0D2B4E"/>
-                </a:solidFill>
-                <a:latin typeface="Calibri"/>
-              </a:rPr>
-              <a:t/>
-            </a:r>
+            <a:endParaRPr sz="1900" b="1" i="0">
+              <a:solidFill>
+                <a:srgbClr val="0D2B4E"/>
+              </a:solidFill>
+              <a:latin typeface="Calibri"/>
+            </a:endParaRPr>
           </a:p>
           <a:p>
             <a:pPr>
@@ -6104,8 +7368,8 @@
 </p:sld>
 </file>
 
-<file path=ppt/slides/slide19.xml><?xml version="1.0" encoding="utf-8"?>
-<p:sld xmlns:a="http://schemas.openxmlformats.org/drawingml/2006/main" xmlns:p="http://schemas.openxmlformats.org/presentationml/2006/main" xmlns:r="http://schemas.openxmlformats.org/officeDocument/2006/relationships">
+<file path=ppt/slides/slide22.xml><?xml version="1.0" encoding="utf-8"?>
+<p:sld xmlns:a="http://schemas.openxmlformats.org/drawingml/2006/main" xmlns:r="http://schemas.openxmlformats.org/officeDocument/2006/relationships" xmlns:p="http://schemas.openxmlformats.org/presentationml/2006/main">
   <p:cSld>
     <p:bg>
       <p:bgPr>
@@ -6121,7 +7385,14 @@
         <p:cNvGrpSpPr/>
         <p:nvPr/>
       </p:nvGrpSpPr>
-      <p:grpSpPr/>
+      <p:grpSpPr>
+        <a:xfrm>
+          <a:off x="0" y="0"/>
+          <a:ext cx="0" cy="0"/>
+          <a:chOff x="0" y="0"/>
+          <a:chExt cx="0" cy="0"/>
+        </a:xfrm>
+      </p:grpSpPr>
       <p:sp>
         <p:nvSpPr>
           <p:cNvPr id="2" name="TextBox 1"/>
@@ -6197,6 +7468,7 @@
           <a:lstStyle/>
           <a:p>
             <a:pPr algn="ctr"/>
+            <a:endParaRPr/>
           </a:p>
         </p:txBody>
       </p:sp>
@@ -6209,7 +7481,7 @@
         <p:spPr>
           <a:xfrm>
             <a:off x="548640" y="1371600"/>
-            <a:ext cx="11064240" cy="5029200"/>
+            <a:ext cx="11064240" cy="3190617"/>
           </a:xfrm>
           <a:prstGeom prst="rect">
             <a:avLst/>
@@ -6228,7 +7500,7 @@
               </a:spcBef>
             </a:pPr>
             <a:r>
-              <a:rPr sz="2200" b="1" i="0">
+              <a:rPr sz="2200" b="1" i="0" dirty="0">
                 <a:solidFill>
                   <a:srgbClr val="FFFFFF"/>
                 </a:solidFill>
@@ -6244,7 +7516,7 @@
               </a:spcBef>
             </a:pPr>
             <a:r>
-              <a:rPr sz="1900" b="0" i="0">
+              <a:rPr sz="1900" b="0" i="0" dirty="0">
                 <a:solidFill>
                   <a:srgbClr val="AABBCC"/>
                 </a:solidFill>
@@ -6259,15 +7531,12 @@
                 <a:spcPts val="200"/>
               </a:spcBef>
             </a:pPr>
-            <a:r>
-              <a:rPr sz="800" b="0" i="0">
-                <a:solidFill>
-                  <a:srgbClr val="0D2B4E"/>
-                </a:solidFill>
-                <a:latin typeface="Calibri"/>
-              </a:rPr>
-              <a:t/>
-            </a:r>
+            <a:endParaRPr sz="1900" b="0" i="0" dirty="0">
+              <a:solidFill>
+                <a:srgbClr val="AABBCC"/>
+              </a:solidFill>
+              <a:latin typeface="Calibri"/>
+            </a:endParaRPr>
           </a:p>
           <a:p>
             <a:pPr>
@@ -6276,7 +7545,7 @@
               </a:spcBef>
             </a:pPr>
             <a:r>
-              <a:rPr sz="1900" b="1" i="0">
+              <a:rPr sz="1900" b="1" i="0" dirty="0">
                 <a:solidFill>
                   <a:srgbClr val="C9913A"/>
                 </a:solidFill>
@@ -6292,7 +7561,7 @@
               </a:spcBef>
             </a:pPr>
             <a:r>
-              <a:rPr sz="1900" b="0" i="0">
+              <a:rPr sz="1900" b="0" i="0" dirty="0">
                 <a:solidFill>
                   <a:srgbClr val="FFFFFF"/>
                 </a:solidFill>
@@ -6308,7 +7577,7 @@
               </a:spcBef>
             </a:pPr>
             <a:r>
-              <a:rPr sz="2100" b="1" i="0">
+              <a:rPr sz="2100" b="1" i="0" dirty="0">
                 <a:solidFill>
                   <a:srgbClr val="C9913A"/>
                 </a:solidFill>
@@ -6323,31 +7592,12 @@
                 <a:spcPts val="200"/>
               </a:spcBef>
             </a:pPr>
-            <a:r>
-              <a:rPr sz="600" b="0" i="0">
-                <a:solidFill>
-                  <a:srgbClr val="0D2B4E"/>
-                </a:solidFill>
-                <a:latin typeface="Calibri"/>
-              </a:rPr>
-              <a:t/>
-            </a:r>
-          </a:p>
-          <a:p>
-            <a:pPr>
-              <a:spcBef>
-                <a:spcPts val="600"/>
-              </a:spcBef>
-            </a:pPr>
-            <a:r>
-              <a:rPr sz="1600" b="0" i="0">
-                <a:solidFill>
-                  <a:srgbClr val="AABBCC"/>
-                </a:solidFill>
-                <a:latin typeface="Calibri"/>
-              </a:rPr>
-              <a:t>Phil, over to you.</a:t>
-            </a:r>
+            <a:endParaRPr sz="2100" b="1" i="0" dirty="0">
+              <a:solidFill>
+                <a:srgbClr val="C9913A"/>
+              </a:solidFill>
+              <a:latin typeface="Calibri"/>
+            </a:endParaRPr>
           </a:p>
         </p:txBody>
       </p:sp>
@@ -6359,8 +7609,8 @@
 </p:sld>
 </file>
 
-<file path=ppt/slides/slide2.xml><?xml version="1.0" encoding="utf-8"?>
-<p:sld xmlns:a="http://schemas.openxmlformats.org/drawingml/2006/main" xmlns:p="http://schemas.openxmlformats.org/presentationml/2006/main" xmlns:r="http://schemas.openxmlformats.org/officeDocument/2006/relationships">
+<file path=ppt/slides/slide3.xml><?xml version="1.0" encoding="utf-8"?>
+<p:sld xmlns:a="http://schemas.openxmlformats.org/drawingml/2006/main" xmlns:r="http://schemas.openxmlformats.org/officeDocument/2006/relationships" xmlns:p="http://schemas.openxmlformats.org/presentationml/2006/main">
   <p:cSld>
     <p:bg>
       <p:bgPr>
@@ -6376,7 +7626,14 @@
         <p:cNvGrpSpPr/>
         <p:nvPr/>
       </p:nvGrpSpPr>
-      <p:grpSpPr/>
+      <p:grpSpPr>
+        <a:xfrm>
+          <a:off x="0" y="0"/>
+          <a:ext cx="0" cy="0"/>
+          <a:chOff x="0" y="0"/>
+          <a:chExt cx="0" cy="0"/>
+        </a:xfrm>
+      </p:grpSpPr>
       <p:sp>
         <p:nvSpPr>
           <p:cNvPr id="2" name="TextBox 1"/>
@@ -6407,7 +7664,7 @@
                 </a:solidFill>
                 <a:latin typeface="Calibri"/>
               </a:rPr>
-              <a:t>We did the homework.</a:t>
+              <a:t>Today's agenda.</a:t>
             </a:r>
           </a:p>
         </p:txBody>
@@ -6452,6 +7709,7 @@
           <a:lstStyle/>
           <a:p>
             <a:pPr algn="ctr"/>
+            <a:endParaRPr/>
           </a:p>
         </p:txBody>
       </p:sp>
@@ -6463,129 +7721,948 @@
         </p:nvSpPr>
         <p:spPr>
           <a:xfrm>
-            <a:off x="548640" y="1371600"/>
-            <a:ext cx="11064240" cy="5029200"/>
-          </a:xfrm>
-          <a:prstGeom prst="rect">
-            <a:avLst/>
-          </a:prstGeom>
-          <a:noFill/>
-        </p:spPr>
-        <p:txBody>
-          <a:bodyPr wrap="square">
-            <a:spAutoFit/>
-          </a:bodyPr>
-          <a:lstStyle/>
-          <a:p>
-            <a:pPr>
-              <a:spcBef>
-                <a:spcPts val="0"/>
-              </a:spcBef>
-            </a:pPr>
-            <a:r>
-              <a:rPr sz="1900" b="0" i="0">
+            <a:off x="548640" y="1444752"/>
+            <a:ext cx="914400" cy="438912"/>
+          </a:xfrm>
+          <a:prstGeom prst="rect">
+            <a:avLst/>
+          </a:prstGeom>
+          <a:noFill/>
+        </p:spPr>
+        <p:txBody>
+          <a:bodyPr wrap="square">
+            <a:spAutoFit/>
+          </a:bodyPr>
+          <a:lstStyle/>
+          <a:p>
+            <a:pPr algn="l"/>
+            <a:r>
+              <a:rPr sz="1700" b="0" i="0">
+                <a:solidFill>
+                  <a:srgbClr val="6B7280"/>
+                </a:solidFill>
+                <a:latin typeface="Calibri"/>
+              </a:rPr>
+              <a:t>10:00</a:t>
+            </a:r>
+          </a:p>
+        </p:txBody>
+      </p:sp>
+      <p:sp>
+        <p:nvSpPr>
+          <p:cNvPr id="5" name="TextBox 4"/>
+          <p:cNvSpPr txBox="1"/>
+          <p:nvPr/>
+        </p:nvSpPr>
+        <p:spPr>
+          <a:xfrm>
+            <a:off x="1554480" y="1444752"/>
+            <a:ext cx="1920240" cy="438912"/>
+          </a:xfrm>
+          <a:prstGeom prst="rect">
+            <a:avLst/>
+          </a:prstGeom>
+          <a:noFill/>
+        </p:spPr>
+        <p:txBody>
+          <a:bodyPr wrap="square">
+            <a:spAutoFit/>
+          </a:bodyPr>
+          <a:lstStyle/>
+          <a:p>
+            <a:pPr algn="l"/>
+            <a:r>
+              <a:rPr sz="1700" b="1" i="0">
+                <a:solidFill>
+                  <a:srgbClr val="C9913A"/>
+                </a:solidFill>
+                <a:latin typeface="Calibri"/>
+              </a:rPr>
+              <a:t>Phase 1</a:t>
+            </a:r>
+          </a:p>
+        </p:txBody>
+      </p:sp>
+      <p:sp>
+        <p:nvSpPr>
+          <p:cNvPr id="6" name="TextBox 5"/>
+          <p:cNvSpPr txBox="1"/>
+          <p:nvPr/>
+        </p:nvSpPr>
+        <p:spPr>
+          <a:xfrm>
+            <a:off x="3566160" y="1444752"/>
+            <a:ext cx="6400800" cy="438912"/>
+          </a:xfrm>
+          <a:prstGeom prst="rect">
+            <a:avLst/>
+          </a:prstGeom>
+          <a:noFill/>
+        </p:spPr>
+        <p:txBody>
+          <a:bodyPr wrap="square">
+            <a:spAutoFit/>
+          </a:bodyPr>
+          <a:lstStyle/>
+          <a:p>
+            <a:pPr algn="l"/>
+            <a:r>
+              <a:rPr sz="1700" b="0" i="0">
                 <a:solidFill>
                   <a:srgbClr val="0D2B4E"/>
                 </a:solidFill>
                 <a:latin typeface="Calibri"/>
               </a:rPr>
-              <a:t>All three of you named email as your biggest time sink. Two named scheduling.</a:t>
-            </a:r>
-          </a:p>
-          <a:p>
-            <a:pPr>
-              <a:spcBef>
-                <a:spcPts val="600"/>
-              </a:spcBef>
-            </a:pPr>
-            <a:r>
-              <a:rPr sz="1900" b="0" i="0">
+              <a:t>AI fundamentals and the mental model</a:t>
+            </a:r>
+          </a:p>
+        </p:txBody>
+      </p:sp>
+      <p:sp>
+        <p:nvSpPr>
+          <p:cNvPr id="7" name="TextBox 6"/>
+          <p:cNvSpPr txBox="1"/>
+          <p:nvPr/>
+        </p:nvSpPr>
+        <p:spPr>
+          <a:xfrm>
+            <a:off x="10149840" y="1444752"/>
+            <a:ext cx="1463040" cy="438912"/>
+          </a:xfrm>
+          <a:prstGeom prst="rect">
+            <a:avLst/>
+          </a:prstGeom>
+          <a:noFill/>
+        </p:spPr>
+        <p:txBody>
+          <a:bodyPr wrap="square">
+            <a:spAutoFit/>
+          </a:bodyPr>
+          <a:lstStyle/>
+          <a:p>
+            <a:pPr algn="r"/>
+            <a:r>
+              <a:rPr sz="1500" b="0" i="0">
                 <a:solidFill>
                   <a:srgbClr val="6B7280"/>
                 </a:solidFill>
                 <a:latin typeface="Calibri"/>
               </a:rPr>
-              <a:t>Olivia -- 15 to 20 hours a week on diligence. Her exact words: "Could include more depth if I had the time."</a:t>
-            </a:r>
-          </a:p>
-          <a:p>
-            <a:pPr>
-              <a:spcBef>
-                <a:spcPts val="600"/>
-              </a:spcBef>
-            </a:pPr>
-            <a:r>
-              <a:rPr sz="1900" b="0" i="0">
+              <a:t>Nick</a:t>
+            </a:r>
+          </a:p>
+        </p:txBody>
+      </p:sp>
+      <p:sp>
+        <p:nvSpPr>
+          <p:cNvPr id="8" name="TextBox 7"/>
+          <p:cNvSpPr txBox="1"/>
+          <p:nvPr/>
+        </p:nvSpPr>
+        <p:spPr>
+          <a:xfrm>
+            <a:off x="548640" y="2194560"/>
+            <a:ext cx="914400" cy="438912"/>
+          </a:xfrm>
+          <a:prstGeom prst="rect">
+            <a:avLst/>
+          </a:prstGeom>
+          <a:noFill/>
+        </p:spPr>
+        <p:txBody>
+          <a:bodyPr wrap="square">
+            <a:spAutoFit/>
+          </a:bodyPr>
+          <a:lstStyle/>
+          <a:p>
+            <a:pPr algn="l"/>
+            <a:r>
+              <a:rPr sz="1700" b="0" i="0">
                 <a:solidFill>
                   <a:srgbClr val="6B7280"/>
                 </a:solidFill>
                 <a:latin typeface="Calibri"/>
               </a:rPr>
-              <a:t>Tony -- deal analysis and LP updates taking time that should go to judgment.</a:t>
-            </a:r>
-          </a:p>
-          <a:p>
-            <a:pPr>
-              <a:spcBef>
-                <a:spcPts val="600"/>
-              </a:spcBef>
-            </a:pPr>
-            <a:r>
-              <a:rPr sz="1900" b="0" i="0">
+              <a:t>11:00</a:t>
+            </a:r>
+          </a:p>
+        </p:txBody>
+      </p:sp>
+      <p:sp>
+        <p:nvSpPr>
+          <p:cNvPr id="9" name="TextBox 8"/>
+          <p:cNvSpPr txBox="1"/>
+          <p:nvPr/>
+        </p:nvSpPr>
+        <p:spPr>
+          <a:xfrm>
+            <a:off x="1554480" y="2194560"/>
+            <a:ext cx="1920240" cy="438912"/>
+          </a:xfrm>
+          <a:prstGeom prst="rect">
+            <a:avLst/>
+          </a:prstGeom>
+          <a:noFill/>
+        </p:spPr>
+        <p:txBody>
+          <a:bodyPr wrap="square">
+            <a:spAutoFit/>
+          </a:bodyPr>
+          <a:lstStyle/>
+          <a:p>
+            <a:pPr algn="l"/>
+            <a:r>
+              <a:rPr sz="1700" b="0" i="0">
                 <a:solidFill>
                   <a:srgbClr val="6B7280"/>
                 </a:solidFill>
                 <a:latin typeface="Calibri"/>
               </a:rPr>
-              <a:t>Jon -- alumni intro emails typed manually, one at a time. Newsletter never gets done.</a:t>
-            </a:r>
-          </a:p>
-          <a:p>
-            <a:pPr>
-              <a:spcBef>
-                <a:spcPts val="200"/>
-              </a:spcBef>
-            </a:pPr>
-            <a:r>
-              <a:rPr sz="800" b="0" i="0">
+              <a:t>Break</a:t>
+            </a:r>
+          </a:p>
+        </p:txBody>
+      </p:sp>
+      <p:sp>
+        <p:nvSpPr>
+          <p:cNvPr id="10" name="TextBox 9"/>
+          <p:cNvSpPr txBox="1"/>
+          <p:nvPr/>
+        </p:nvSpPr>
+        <p:spPr>
+          <a:xfrm>
+            <a:off x="3566160" y="2194560"/>
+            <a:ext cx="6400800" cy="438912"/>
+          </a:xfrm>
+          <a:prstGeom prst="rect">
+            <a:avLst/>
+          </a:prstGeom>
+          <a:noFill/>
+        </p:spPr>
+        <p:txBody>
+          <a:bodyPr wrap="square">
+            <a:spAutoFit/>
+          </a:bodyPr>
+          <a:lstStyle/>
+          <a:p>
+            <a:pPr algn="l"/>
+            <a:r>
+              <a:rPr sz="1700" b="0" i="0">
+                <a:solidFill>
+                  <a:srgbClr val="6B7280"/>
+                </a:solidFill>
+                <a:latin typeface="Calibri"/>
+              </a:rPr>
+              <a:t>15 minutes</a:t>
+            </a:r>
+          </a:p>
+        </p:txBody>
+      </p:sp>
+      <p:sp>
+        <p:nvSpPr>
+          <p:cNvPr id="11" name="TextBox 10"/>
+          <p:cNvSpPr txBox="1"/>
+          <p:nvPr/>
+        </p:nvSpPr>
+        <p:spPr>
+          <a:xfrm>
+            <a:off x="548640" y="2944368"/>
+            <a:ext cx="914400" cy="438912"/>
+          </a:xfrm>
+          <a:prstGeom prst="rect">
+            <a:avLst/>
+          </a:prstGeom>
+          <a:noFill/>
+        </p:spPr>
+        <p:txBody>
+          <a:bodyPr wrap="square">
+            <a:spAutoFit/>
+          </a:bodyPr>
+          <a:lstStyle/>
+          <a:p>
+            <a:pPr algn="l"/>
+            <a:r>
+              <a:rPr sz="1700" b="0" i="0">
+                <a:solidFill>
+                  <a:srgbClr val="6B7280"/>
+                </a:solidFill>
+                <a:latin typeface="Calibri"/>
+              </a:rPr>
+              <a:t>11:15</a:t>
+            </a:r>
+          </a:p>
+        </p:txBody>
+      </p:sp>
+      <p:sp>
+        <p:nvSpPr>
+          <p:cNvPr id="12" name="TextBox 11"/>
+          <p:cNvSpPr txBox="1"/>
+          <p:nvPr/>
+        </p:nvSpPr>
+        <p:spPr>
+          <a:xfrm>
+            <a:off x="1554480" y="2944368"/>
+            <a:ext cx="1920240" cy="438912"/>
+          </a:xfrm>
+          <a:prstGeom prst="rect">
+            <a:avLst/>
+          </a:prstGeom>
+          <a:noFill/>
+        </p:spPr>
+        <p:txBody>
+          <a:bodyPr wrap="square">
+            <a:spAutoFit/>
+          </a:bodyPr>
+          <a:lstStyle/>
+          <a:p>
+            <a:pPr algn="l"/>
+            <a:r>
+              <a:rPr sz="1700" b="1" i="0">
+                <a:solidFill>
+                  <a:srgbClr val="C9913A"/>
+                </a:solidFill>
+                <a:latin typeface="Calibri"/>
+              </a:rPr>
+              <a:t>Phase 2</a:t>
+            </a:r>
+          </a:p>
+        </p:txBody>
+      </p:sp>
+      <p:sp>
+        <p:nvSpPr>
+          <p:cNvPr id="13" name="TextBox 12"/>
+          <p:cNvSpPr txBox="1"/>
+          <p:nvPr/>
+        </p:nvSpPr>
+        <p:spPr>
+          <a:xfrm>
+            <a:off x="3566160" y="2944368"/>
+            <a:ext cx="6400800" cy="438912"/>
+          </a:xfrm>
+          <a:prstGeom prst="rect">
+            <a:avLst/>
+          </a:prstGeom>
+          <a:noFill/>
+        </p:spPr>
+        <p:txBody>
+          <a:bodyPr wrap="square">
+            <a:spAutoFit/>
+          </a:bodyPr>
+          <a:lstStyle/>
+          <a:p>
+            <a:pPr algn="l"/>
+            <a:r>
+              <a:rPr sz="1700" b="0" i="0">
                 <a:solidFill>
                   <a:srgbClr val="0D2B4E"/>
                 </a:solidFill>
                 <a:latin typeface="Calibri"/>
               </a:rPr>
-              <a:t/>
-            </a:r>
-          </a:p>
-          <a:p>
-            <a:pPr>
-              <a:spcBef>
-                <a:spcPts val="600"/>
-              </a:spcBef>
-            </a:pPr>
-            <a:r>
-              <a:rPr sz="2200" b="1" i="0">
+              <a:t>Environment setup -- VS Code and Claude Code</a:t>
+            </a:r>
+          </a:p>
+        </p:txBody>
+      </p:sp>
+      <p:sp>
+        <p:nvSpPr>
+          <p:cNvPr id="14" name="TextBox 13"/>
+          <p:cNvSpPr txBox="1"/>
+          <p:nvPr/>
+        </p:nvSpPr>
+        <p:spPr>
+          <a:xfrm>
+            <a:off x="10149840" y="2944368"/>
+            <a:ext cx="1463040" cy="438912"/>
+          </a:xfrm>
+          <a:prstGeom prst="rect">
+            <a:avLst/>
+          </a:prstGeom>
+          <a:noFill/>
+        </p:spPr>
+        <p:txBody>
+          <a:bodyPr wrap="square">
+            <a:spAutoFit/>
+          </a:bodyPr>
+          <a:lstStyle/>
+          <a:p>
+            <a:pPr algn="r"/>
+            <a:r>
+              <a:rPr sz="1500" b="0" i="0">
+                <a:solidFill>
+                  <a:srgbClr val="6B7280"/>
+                </a:solidFill>
+                <a:latin typeface="Calibri"/>
+              </a:rPr>
+              <a:t>Phil</a:t>
+            </a:r>
+          </a:p>
+        </p:txBody>
+      </p:sp>
+      <p:sp>
+        <p:nvSpPr>
+          <p:cNvPr id="15" name="TextBox 14"/>
+          <p:cNvSpPr txBox="1"/>
+          <p:nvPr/>
+        </p:nvSpPr>
+        <p:spPr>
+          <a:xfrm>
+            <a:off x="548640" y="3694176"/>
+            <a:ext cx="914400" cy="438912"/>
+          </a:xfrm>
+          <a:prstGeom prst="rect">
+            <a:avLst/>
+          </a:prstGeom>
+          <a:noFill/>
+        </p:spPr>
+        <p:txBody>
+          <a:bodyPr wrap="square">
+            <a:spAutoFit/>
+          </a:bodyPr>
+          <a:lstStyle/>
+          <a:p>
+            <a:pPr algn="l"/>
+            <a:r>
+              <a:rPr sz="1700" b="0" i="0">
+                <a:solidFill>
+                  <a:srgbClr val="6B7280"/>
+                </a:solidFill>
+                <a:latin typeface="Calibri"/>
+              </a:rPr>
+              <a:t>12:15</a:t>
+            </a:r>
+          </a:p>
+        </p:txBody>
+      </p:sp>
+      <p:sp>
+        <p:nvSpPr>
+          <p:cNvPr id="16" name="TextBox 15"/>
+          <p:cNvSpPr txBox="1"/>
+          <p:nvPr/>
+        </p:nvSpPr>
+        <p:spPr>
+          <a:xfrm>
+            <a:off x="1554480" y="3694176"/>
+            <a:ext cx="1920240" cy="438912"/>
+          </a:xfrm>
+          <a:prstGeom prst="rect">
+            <a:avLst/>
+          </a:prstGeom>
+          <a:noFill/>
+        </p:spPr>
+        <p:txBody>
+          <a:bodyPr wrap="square">
+            <a:spAutoFit/>
+          </a:bodyPr>
+          <a:lstStyle/>
+          <a:p>
+            <a:pPr algn="l"/>
+            <a:r>
+              <a:rPr sz="1700" b="0" i="0">
+                <a:solidFill>
+                  <a:srgbClr val="6B7280"/>
+                </a:solidFill>
+                <a:latin typeface="Calibri"/>
+              </a:rPr>
+              <a:t>Lunch</a:t>
+            </a:r>
+          </a:p>
+        </p:txBody>
+      </p:sp>
+      <p:sp>
+        <p:nvSpPr>
+          <p:cNvPr id="17" name="TextBox 16"/>
+          <p:cNvSpPr txBox="1"/>
+          <p:nvPr/>
+        </p:nvSpPr>
+        <p:spPr>
+          <a:xfrm>
+            <a:off x="3566160" y="3694176"/>
+            <a:ext cx="6400800" cy="438912"/>
+          </a:xfrm>
+          <a:prstGeom prst="rect">
+            <a:avLst/>
+          </a:prstGeom>
+          <a:noFill/>
+        </p:spPr>
+        <p:txBody>
+          <a:bodyPr wrap="square">
+            <a:spAutoFit/>
+          </a:bodyPr>
+          <a:lstStyle/>
+          <a:p>
+            <a:pPr algn="l"/>
+            <a:r>
+              <a:rPr sz="1700" b="0" i="0">
+                <a:solidFill>
+                  <a:srgbClr val="6B7280"/>
+                </a:solidFill>
+                <a:latin typeface="Calibri"/>
+              </a:rPr>
+              <a:t>90 minutes</a:t>
+            </a:r>
+          </a:p>
+        </p:txBody>
+      </p:sp>
+      <p:sp>
+        <p:nvSpPr>
+          <p:cNvPr id="18" name="TextBox 17"/>
+          <p:cNvSpPr txBox="1"/>
+          <p:nvPr/>
+        </p:nvSpPr>
+        <p:spPr>
+          <a:xfrm>
+            <a:off x="548640" y="4443984"/>
+            <a:ext cx="914400" cy="438912"/>
+          </a:xfrm>
+          <a:prstGeom prst="rect">
+            <a:avLst/>
+          </a:prstGeom>
+          <a:noFill/>
+        </p:spPr>
+        <p:txBody>
+          <a:bodyPr wrap="square">
+            <a:spAutoFit/>
+          </a:bodyPr>
+          <a:lstStyle/>
+          <a:p>
+            <a:pPr algn="l"/>
+            <a:r>
+              <a:rPr sz="1700" b="0" i="0">
+                <a:solidFill>
+                  <a:srgbClr val="6B7280"/>
+                </a:solidFill>
+                <a:latin typeface="Calibri"/>
+              </a:rPr>
+              <a:t>1:45</a:t>
+            </a:r>
+          </a:p>
+        </p:txBody>
+      </p:sp>
+      <p:sp>
+        <p:nvSpPr>
+          <p:cNvPr id="19" name="TextBox 18"/>
+          <p:cNvSpPr txBox="1"/>
+          <p:nvPr/>
+        </p:nvSpPr>
+        <p:spPr>
+          <a:xfrm>
+            <a:off x="1554480" y="4443984"/>
+            <a:ext cx="1920240" cy="438912"/>
+          </a:xfrm>
+          <a:prstGeom prst="rect">
+            <a:avLst/>
+          </a:prstGeom>
+          <a:noFill/>
+        </p:spPr>
+        <p:txBody>
+          <a:bodyPr wrap="square">
+            <a:spAutoFit/>
+          </a:bodyPr>
+          <a:lstStyle/>
+          <a:p>
+            <a:pPr algn="l"/>
+            <a:r>
+              <a:rPr sz="1700" b="1" i="0">
+                <a:solidFill>
+                  <a:srgbClr val="C9913A"/>
+                </a:solidFill>
+                <a:latin typeface="Calibri"/>
+              </a:rPr>
+              <a:t>Phase 3</a:t>
+            </a:r>
+          </a:p>
+        </p:txBody>
+      </p:sp>
+      <p:sp>
+        <p:nvSpPr>
+          <p:cNvPr id="20" name="TextBox 19"/>
+          <p:cNvSpPr txBox="1"/>
+          <p:nvPr/>
+        </p:nvSpPr>
+        <p:spPr>
+          <a:xfrm>
+            <a:off x="3566160" y="4443984"/>
+            <a:ext cx="6400800" cy="438912"/>
+          </a:xfrm>
+          <a:prstGeom prst="rect">
+            <a:avLst/>
+          </a:prstGeom>
+          <a:noFill/>
+        </p:spPr>
+        <p:txBody>
+          <a:bodyPr wrap="square">
+            <a:spAutoFit/>
+          </a:bodyPr>
+          <a:lstStyle/>
+          <a:p>
+            <a:pPr algn="l"/>
+            <a:r>
+              <a:rPr sz="1700" b="0" i="0">
                 <a:solidFill>
                   <a:srgbClr val="0D2B4E"/>
                 </a:solidFill>
                 <a:latin typeface="Calibri"/>
               </a:rPr>
-              <a:t>These are not separate problems. They are the same problem.</a:t>
-            </a:r>
-          </a:p>
-          <a:p>
-            <a:pPr>
-              <a:spcBef>
-                <a:spcPts val="600"/>
-              </a:spcBef>
-            </a:pPr>
-            <a:r>
-              <a:rPr sz="1900" b="0" i="0">
+              <a:t>Building your context bank</a:t>
+            </a:r>
+          </a:p>
+        </p:txBody>
+      </p:sp>
+      <p:sp>
+        <p:nvSpPr>
+          <p:cNvPr id="21" name="TextBox 20"/>
+          <p:cNvSpPr txBox="1"/>
+          <p:nvPr/>
+        </p:nvSpPr>
+        <p:spPr>
+          <a:xfrm>
+            <a:off x="10149840" y="4443984"/>
+            <a:ext cx="1463040" cy="438912"/>
+          </a:xfrm>
+          <a:prstGeom prst="rect">
+            <a:avLst/>
+          </a:prstGeom>
+          <a:noFill/>
+        </p:spPr>
+        <p:txBody>
+          <a:bodyPr wrap="square">
+            <a:spAutoFit/>
+          </a:bodyPr>
+          <a:lstStyle/>
+          <a:p>
+            <a:pPr algn="r"/>
+            <a:r>
+              <a:rPr sz="1500" b="0" i="0">
                 <a:solidFill>
                   <a:srgbClr val="6B7280"/>
                 </a:solidFill>
                 <a:latin typeface="Calibri"/>
               </a:rPr>
-              <a:t>Good work getting slowed down by the volume of routine around it. Every hour reclaimed from routine is an hour back for the work only you can do. That is what we are building today.</a:t>
+              <a:t>Phil</a:t>
+            </a:r>
+          </a:p>
+        </p:txBody>
+      </p:sp>
+      <p:sp>
+        <p:nvSpPr>
+          <p:cNvPr id="22" name="TextBox 21"/>
+          <p:cNvSpPr txBox="1"/>
+          <p:nvPr/>
+        </p:nvSpPr>
+        <p:spPr>
+          <a:xfrm>
+            <a:off x="548640" y="5193792"/>
+            <a:ext cx="914400" cy="438912"/>
+          </a:xfrm>
+          <a:prstGeom prst="rect">
+            <a:avLst/>
+          </a:prstGeom>
+          <a:noFill/>
+        </p:spPr>
+        <p:txBody>
+          <a:bodyPr wrap="square">
+            <a:spAutoFit/>
+          </a:bodyPr>
+          <a:lstStyle/>
+          <a:p>
+            <a:pPr algn="l"/>
+            <a:r>
+              <a:rPr sz="1700" b="0" i="0">
+                <a:solidFill>
+                  <a:srgbClr val="6B7280"/>
+                </a:solidFill>
+                <a:latin typeface="Calibri"/>
+              </a:rPr>
+              <a:t>2:45</a:t>
+            </a:r>
+          </a:p>
+        </p:txBody>
+      </p:sp>
+      <p:sp>
+        <p:nvSpPr>
+          <p:cNvPr id="23" name="TextBox 22"/>
+          <p:cNvSpPr txBox="1"/>
+          <p:nvPr/>
+        </p:nvSpPr>
+        <p:spPr>
+          <a:xfrm>
+            <a:off x="1554480" y="5193792"/>
+            <a:ext cx="1920240" cy="438912"/>
+          </a:xfrm>
+          <a:prstGeom prst="rect">
+            <a:avLst/>
+          </a:prstGeom>
+          <a:noFill/>
+        </p:spPr>
+        <p:txBody>
+          <a:bodyPr wrap="square">
+            <a:spAutoFit/>
+          </a:bodyPr>
+          <a:lstStyle/>
+          <a:p>
+            <a:pPr algn="l"/>
+            <a:r>
+              <a:rPr sz="1700" b="0" i="0">
+                <a:solidFill>
+                  <a:srgbClr val="6B7280"/>
+                </a:solidFill>
+                <a:latin typeface="Calibri"/>
+              </a:rPr>
+              <a:t>Break</a:t>
+            </a:r>
+          </a:p>
+        </p:txBody>
+      </p:sp>
+      <p:sp>
+        <p:nvSpPr>
+          <p:cNvPr id="24" name="TextBox 23"/>
+          <p:cNvSpPr txBox="1"/>
+          <p:nvPr/>
+        </p:nvSpPr>
+        <p:spPr>
+          <a:xfrm>
+            <a:off x="3566160" y="5193792"/>
+            <a:ext cx="6400800" cy="438912"/>
+          </a:xfrm>
+          <a:prstGeom prst="rect">
+            <a:avLst/>
+          </a:prstGeom>
+          <a:noFill/>
+        </p:spPr>
+        <p:txBody>
+          <a:bodyPr wrap="square">
+            <a:spAutoFit/>
+          </a:bodyPr>
+          <a:lstStyle/>
+          <a:p>
+            <a:pPr algn="l"/>
+            <a:r>
+              <a:rPr sz="1700" b="0" i="0">
+                <a:solidFill>
+                  <a:srgbClr val="6B7280"/>
+                </a:solidFill>
+                <a:latin typeface="Calibri"/>
+              </a:rPr>
+              <a:t>15 minutes</a:t>
+            </a:r>
+          </a:p>
+        </p:txBody>
+      </p:sp>
+      <p:sp>
+        <p:nvSpPr>
+          <p:cNvPr id="25" name="TextBox 24"/>
+          <p:cNvSpPr txBox="1"/>
+          <p:nvPr/>
+        </p:nvSpPr>
+        <p:spPr>
+          <a:xfrm>
+            <a:off x="548640" y="5943600"/>
+            <a:ext cx="914400" cy="438912"/>
+          </a:xfrm>
+          <a:prstGeom prst="rect">
+            <a:avLst/>
+          </a:prstGeom>
+          <a:noFill/>
+        </p:spPr>
+        <p:txBody>
+          <a:bodyPr wrap="square">
+            <a:spAutoFit/>
+          </a:bodyPr>
+          <a:lstStyle/>
+          <a:p>
+            <a:pPr algn="l"/>
+            <a:r>
+              <a:rPr sz="1700" b="0" i="0">
+                <a:solidFill>
+                  <a:srgbClr val="6B7280"/>
+                </a:solidFill>
+                <a:latin typeface="Calibri"/>
+              </a:rPr>
+              <a:t>3:00</a:t>
+            </a:r>
+          </a:p>
+        </p:txBody>
+      </p:sp>
+      <p:sp>
+        <p:nvSpPr>
+          <p:cNvPr id="26" name="TextBox 25"/>
+          <p:cNvSpPr txBox="1"/>
+          <p:nvPr/>
+        </p:nvSpPr>
+        <p:spPr>
+          <a:xfrm>
+            <a:off x="1554480" y="5943600"/>
+            <a:ext cx="1920240" cy="438912"/>
+          </a:xfrm>
+          <a:prstGeom prst="rect">
+            <a:avLst/>
+          </a:prstGeom>
+          <a:noFill/>
+        </p:spPr>
+        <p:txBody>
+          <a:bodyPr wrap="square">
+            <a:spAutoFit/>
+          </a:bodyPr>
+          <a:lstStyle/>
+          <a:p>
+            <a:pPr algn="l"/>
+            <a:r>
+              <a:rPr sz="1700" b="1" i="0">
+                <a:solidFill>
+                  <a:srgbClr val="C9913A"/>
+                </a:solidFill>
+                <a:latin typeface="Calibri"/>
+              </a:rPr>
+              <a:t>Phase 4</a:t>
+            </a:r>
+          </a:p>
+        </p:txBody>
+      </p:sp>
+      <p:sp>
+        <p:nvSpPr>
+          <p:cNvPr id="27" name="TextBox 26"/>
+          <p:cNvSpPr txBox="1"/>
+          <p:nvPr/>
+        </p:nvSpPr>
+        <p:spPr>
+          <a:xfrm>
+            <a:off x="3566160" y="5943600"/>
+            <a:ext cx="6400800" cy="438912"/>
+          </a:xfrm>
+          <a:prstGeom prst="rect">
+            <a:avLst/>
+          </a:prstGeom>
+          <a:noFill/>
+        </p:spPr>
+        <p:txBody>
+          <a:bodyPr wrap="square">
+            <a:spAutoFit/>
+          </a:bodyPr>
+          <a:lstStyle/>
+          <a:p>
+            <a:pPr algn="l"/>
+            <a:r>
+              <a:rPr sz="1700" b="0" i="0">
+                <a:solidFill>
+                  <a:srgbClr val="0D2B4E"/>
+                </a:solidFill>
+                <a:latin typeface="Calibri"/>
+              </a:rPr>
+              <a:t>Building automations -- we work until it is done</a:t>
+            </a:r>
+          </a:p>
+        </p:txBody>
+      </p:sp>
+      <p:sp>
+        <p:nvSpPr>
+          <p:cNvPr id="28" name="TextBox 27"/>
+          <p:cNvSpPr txBox="1"/>
+          <p:nvPr/>
+        </p:nvSpPr>
+        <p:spPr>
+          <a:xfrm>
+            <a:off x="10149840" y="5943600"/>
+            <a:ext cx="1463040" cy="438912"/>
+          </a:xfrm>
+          <a:prstGeom prst="rect">
+            <a:avLst/>
+          </a:prstGeom>
+          <a:noFill/>
+        </p:spPr>
+        <p:txBody>
+          <a:bodyPr wrap="square">
+            <a:spAutoFit/>
+          </a:bodyPr>
+          <a:lstStyle/>
+          <a:p>
+            <a:pPr algn="r"/>
+            <a:r>
+              <a:rPr sz="1500" b="0" i="0">
+                <a:solidFill>
+                  <a:srgbClr val="6B7280"/>
+                </a:solidFill>
+                <a:latin typeface="Calibri"/>
+              </a:rPr>
+              <a:t>Phil</a:t>
+            </a:r>
+          </a:p>
+        </p:txBody>
+      </p:sp>
+      <p:sp>
+        <p:nvSpPr>
+          <p:cNvPr id="29" name="Rectangle 28"/>
+          <p:cNvSpPr/>
+          <p:nvPr/>
+        </p:nvSpPr>
+        <p:spPr>
+          <a:xfrm>
+            <a:off x="548640" y="6739128"/>
+            <a:ext cx="11064240" cy="27432"/>
+          </a:xfrm>
+          <a:prstGeom prst="rect">
+            <a:avLst/>
+          </a:prstGeom>
+          <a:solidFill>
+            <a:srgbClr val="CCCCCC"/>
+          </a:solidFill>
+          <a:ln>
+            <a:noFill/>
+          </a:ln>
+        </p:spPr>
+        <p:style>
+          <a:lnRef idx="1">
+            <a:schemeClr val="accent1"/>
+          </a:lnRef>
+          <a:fillRef idx="3">
+            <a:schemeClr val="accent1"/>
+          </a:fillRef>
+          <a:effectRef idx="2">
+            <a:schemeClr val="accent1"/>
+          </a:effectRef>
+          <a:fontRef idx="minor">
+            <a:schemeClr val="lt1"/>
+          </a:fontRef>
+        </p:style>
+        <p:txBody>
+          <a:bodyPr rtlCol="0" anchor="ctr"/>
+          <a:lstStyle/>
+          <a:p>
+            <a:pPr algn="ctr"/>
+            <a:endParaRPr/>
+          </a:p>
+        </p:txBody>
+      </p:sp>
+      <p:sp>
+        <p:nvSpPr>
+          <p:cNvPr id="30" name="TextBox 29"/>
+          <p:cNvSpPr txBox="1"/>
+          <p:nvPr/>
+        </p:nvSpPr>
+        <p:spPr>
+          <a:xfrm>
+            <a:off x="548640" y="6922008"/>
+            <a:ext cx="11064240" cy="502920"/>
+          </a:xfrm>
+          <a:prstGeom prst="rect">
+            <a:avLst/>
+          </a:prstGeom>
+          <a:noFill/>
+        </p:spPr>
+        <p:txBody>
+          <a:bodyPr wrap="square">
+            <a:spAutoFit/>
+          </a:bodyPr>
+          <a:lstStyle/>
+          <a:p>
+            <a:pPr algn="l"/>
+            <a:r>
+              <a:rPr sz="1600" b="0" i="1">
+                <a:solidFill>
+                  <a:srgbClr val="6B7280"/>
+                </a:solidFill>
+                <a:latin typeface="Calibri"/>
+              </a:rPr>
+              <a:t>Breaks are built in. We move at your pace. Phase 4 runs until we are satisfied with what you have built.</a:t>
             </a:r>
           </a:p>
         </p:txBody>
@@ -6598,8 +8675,8 @@
 </p:sld>
 </file>
 
-<file path=ppt/slides/slide3.xml><?xml version="1.0" encoding="utf-8"?>
-<p:sld xmlns:a="http://schemas.openxmlformats.org/drawingml/2006/main" xmlns:p="http://schemas.openxmlformats.org/presentationml/2006/main" xmlns:r="http://schemas.openxmlformats.org/officeDocument/2006/relationships">
+<file path=ppt/slides/slide4.xml><?xml version="1.0" encoding="utf-8"?>
+<p:sld xmlns:a="http://schemas.openxmlformats.org/drawingml/2006/main" xmlns:r="http://schemas.openxmlformats.org/officeDocument/2006/relationships" xmlns:p="http://schemas.openxmlformats.org/presentationml/2006/main">
   <p:cSld>
     <p:bg>
       <p:bgPr>
@@ -6615,7 +8692,14 @@
         <p:cNvGrpSpPr/>
         <p:nvPr/>
       </p:nvGrpSpPr>
-      <p:grpSpPr/>
+      <p:grpSpPr>
+        <a:xfrm>
+          <a:off x="0" y="0"/>
+          <a:ext cx="0" cy="0"/>
+          <a:chOff x="0" y="0"/>
+          <a:chExt cx="0" cy="0"/>
+        </a:xfrm>
+      </p:grpSpPr>
       <p:sp>
         <p:nvSpPr>
           <p:cNvPr id="2" name="TextBox 1"/>
@@ -6625,7 +8709,7 @@
         <p:spPr>
           <a:xfrm>
             <a:off x="548640" y="384048"/>
-            <a:ext cx="11064240" cy="749808"/>
+            <a:ext cx="11064240" cy="600164"/>
           </a:xfrm>
           <a:prstGeom prst="rect">
             <a:avLst/>
@@ -6640,14 +8724,29 @@
           <a:p>
             <a:pPr algn="l"/>
             <a:r>
-              <a:rPr sz="3300" b="1" i="0">
+              <a:rPr sz="3300" b="1" i="0" dirty="0">
                 <a:solidFill>
                   <a:srgbClr val="0D2B4E"/>
                 </a:solidFill>
                 <a:latin typeface="Calibri"/>
               </a:rPr>
-              <a:t>What AI Actually Is</a:t>
-            </a:r>
+              <a:t>What </a:t>
+            </a:r>
+            <a:r>
+              <a:rPr lang="en-US" sz="3300" b="1" i="0" dirty="0">
+                <a:solidFill>
+                  <a:srgbClr val="0D2B4E"/>
+                </a:solidFill>
+                <a:latin typeface="Calibri"/>
+              </a:rPr>
+              <a:t>We are working towards today</a:t>
+            </a:r>
+            <a:endParaRPr sz="3300" b="1" i="0" dirty="0">
+              <a:solidFill>
+                <a:srgbClr val="0D2B4E"/>
+              </a:solidFill>
+              <a:latin typeface="Calibri"/>
+            </a:endParaRPr>
           </a:p>
         </p:txBody>
       </p:sp>
@@ -6691,6 +8790,7 @@
           <a:lstStyle/>
           <a:p>
             <a:pPr algn="ctr"/>
+            <a:endParaRPr/>
           </a:p>
         </p:txBody>
       </p:sp>
@@ -6703,7 +8803,7 @@
         <p:spPr>
           <a:xfrm>
             <a:off x="548640" y="1371600"/>
-            <a:ext cx="11064240" cy="5029200"/>
+            <a:ext cx="11064240" cy="384721"/>
           </a:xfrm>
           <a:prstGeom prst="rect">
             <a:avLst/>
@@ -6722,69 +8822,390 @@
               </a:spcBef>
             </a:pPr>
             <a:r>
-              <a:rPr sz="2000" b="1" i="0">
+              <a:rPr sz="1900" b="0" i="0" dirty="0">
+                <a:solidFill>
+                  <a:srgbClr val="6B7280"/>
+                </a:solidFill>
+                <a:latin typeface="Calibri"/>
+              </a:rPr>
+              <a:t>By the end of today every one of you will have a working system.</a:t>
+            </a:r>
+          </a:p>
+        </p:txBody>
+      </p:sp>
+      <p:sp>
+        <p:nvSpPr>
+          <p:cNvPr id="5" name="TextBox 4"/>
+          <p:cNvSpPr txBox="1"/>
+          <p:nvPr/>
+        </p:nvSpPr>
+        <p:spPr>
+          <a:xfrm>
+            <a:off x="548640" y="1965960"/>
+            <a:ext cx="320040" cy="475488"/>
+          </a:xfrm>
+          <a:prstGeom prst="rect">
+            <a:avLst/>
+          </a:prstGeom>
+          <a:noFill/>
+        </p:spPr>
+        <p:txBody>
+          <a:bodyPr wrap="square">
+            <a:spAutoFit/>
+          </a:bodyPr>
+          <a:lstStyle/>
+          <a:p>
+            <a:pPr algn="l"/>
+            <a:r>
+              <a:rPr sz="1300" b="0" i="0">
+                <a:solidFill>
+                  <a:srgbClr val="C9913A"/>
+                </a:solidFill>
+                <a:latin typeface="Calibri"/>
+              </a:rPr>
+              <a:t>●</a:t>
+            </a:r>
+          </a:p>
+        </p:txBody>
+      </p:sp>
+      <p:sp>
+        <p:nvSpPr>
+          <p:cNvPr id="6" name="TextBox 5"/>
+          <p:cNvSpPr txBox="1"/>
+          <p:nvPr/>
+        </p:nvSpPr>
+        <p:spPr>
+          <a:xfrm>
+            <a:off x="868680" y="1965960"/>
+            <a:ext cx="3474720" cy="411480"/>
+          </a:xfrm>
+          <a:prstGeom prst="rect">
+            <a:avLst/>
+          </a:prstGeom>
+          <a:noFill/>
+        </p:spPr>
+        <p:txBody>
+          <a:bodyPr wrap="square">
+            <a:spAutoFit/>
+          </a:bodyPr>
+          <a:lstStyle/>
+          <a:p>
+            <a:pPr algn="l"/>
+            <a:r>
+              <a:rPr sz="1900" b="1" i="0">
                 <a:solidFill>
                   <a:srgbClr val="0D2B4E"/>
                 </a:solidFill>
                 <a:latin typeface="Calibri"/>
               </a:rPr>
-              <a:t>Not magic. Not a search engine. Not a robot that thinks like a human.</a:t>
-            </a:r>
-          </a:p>
-          <a:p>
-            <a:pPr>
-              <a:spcBef>
-                <a:spcPts val="600"/>
-              </a:spcBef>
-            </a:pPr>
-            <a:r>
-              <a:rPr sz="1900" b="0" i="0">
+              <a:t>Claude Code running</a:t>
+            </a:r>
+          </a:p>
+        </p:txBody>
+      </p:sp>
+      <p:sp>
+        <p:nvSpPr>
+          <p:cNvPr id="7" name="TextBox 6"/>
+          <p:cNvSpPr txBox="1"/>
+          <p:nvPr/>
+        </p:nvSpPr>
+        <p:spPr>
+          <a:xfrm>
+            <a:off x="4480560" y="1965960"/>
+            <a:ext cx="7178040" cy="685800"/>
+          </a:xfrm>
+          <a:prstGeom prst="rect">
+            <a:avLst/>
+          </a:prstGeom>
+          <a:noFill/>
+        </p:spPr>
+        <p:txBody>
+          <a:bodyPr wrap="square">
+            <a:spAutoFit/>
+          </a:bodyPr>
+          <a:lstStyle/>
+          <a:p>
+            <a:pPr algn="l"/>
+            <a:r>
+              <a:rPr sz="1700" b="0" i="0">
                 <a:solidFill>
                   <a:srgbClr val="6B7280"/>
                 </a:solidFill>
                 <a:latin typeface="Calibri"/>
               </a:rPr>
-              <a:t>AI was trained on an enormous volume of human-generated text -- books, research, articles, conversations, code, documentation. That training gives it the ability to recognize patterns and generate responses relevant to whatever you give it in the moment.</a:t>
-            </a:r>
-          </a:p>
-          <a:p>
-            <a:pPr>
-              <a:spcBef>
-                <a:spcPts val="600"/>
-              </a:spcBef>
-            </a:pPr>
-            <a:r>
-              <a:rPr sz="1900" b="0" i="0">
+              <a:t>Set up on your machine, inside VS Code, logged in and ready.</a:t>
+            </a:r>
+          </a:p>
+        </p:txBody>
+      </p:sp>
+      <p:sp>
+        <p:nvSpPr>
+          <p:cNvPr id="8" name="TextBox 7"/>
+          <p:cNvSpPr txBox="1"/>
+          <p:nvPr/>
+        </p:nvSpPr>
+        <p:spPr>
+          <a:xfrm>
+            <a:off x="548640" y="2770632"/>
+            <a:ext cx="320040" cy="475488"/>
+          </a:xfrm>
+          <a:prstGeom prst="rect">
+            <a:avLst/>
+          </a:prstGeom>
+          <a:noFill/>
+        </p:spPr>
+        <p:txBody>
+          <a:bodyPr wrap="square">
+            <a:spAutoFit/>
+          </a:bodyPr>
+          <a:lstStyle/>
+          <a:p>
+            <a:pPr algn="l"/>
+            <a:r>
+              <a:rPr sz="1300" b="0" i="0">
+                <a:solidFill>
+                  <a:srgbClr val="C9913A"/>
+                </a:solidFill>
+                <a:latin typeface="Calibri"/>
+              </a:rPr>
+              <a:t>●</a:t>
+            </a:r>
+          </a:p>
+        </p:txBody>
+      </p:sp>
+      <p:sp>
+        <p:nvSpPr>
+          <p:cNvPr id="9" name="TextBox 8"/>
+          <p:cNvSpPr txBox="1"/>
+          <p:nvPr/>
+        </p:nvSpPr>
+        <p:spPr>
+          <a:xfrm>
+            <a:off x="868680" y="2770632"/>
+            <a:ext cx="3474720" cy="411480"/>
+          </a:xfrm>
+          <a:prstGeom prst="rect">
+            <a:avLst/>
+          </a:prstGeom>
+          <a:noFill/>
+        </p:spPr>
+        <p:txBody>
+          <a:bodyPr wrap="square">
+            <a:spAutoFit/>
+          </a:bodyPr>
+          <a:lstStyle/>
+          <a:p>
+            <a:pPr algn="l"/>
+            <a:r>
+              <a:rPr sz="1900" b="1" i="0">
+                <a:solidFill>
+                  <a:srgbClr val="0D2B4E"/>
+                </a:solidFill>
+                <a:latin typeface="Calibri"/>
+              </a:rPr>
+              <a:t>Your context bank built</a:t>
+            </a:r>
+          </a:p>
+        </p:txBody>
+      </p:sp>
+      <p:sp>
+        <p:nvSpPr>
+          <p:cNvPr id="10" name="TextBox 9"/>
+          <p:cNvSpPr txBox="1"/>
+          <p:nvPr/>
+        </p:nvSpPr>
+        <p:spPr>
+          <a:xfrm>
+            <a:off x="4480560" y="2770632"/>
+            <a:ext cx="7178040" cy="685800"/>
+          </a:xfrm>
+          <a:prstGeom prst="rect">
+            <a:avLst/>
+          </a:prstGeom>
+          <a:noFill/>
+        </p:spPr>
+        <p:txBody>
+          <a:bodyPr wrap="square">
+            <a:spAutoFit/>
+          </a:bodyPr>
+          <a:lstStyle/>
+          <a:p>
+            <a:pPr algn="l"/>
+            <a:r>
+              <a:rPr sz="1700" b="0" i="0">
                 <a:solidFill>
                   <a:srgbClr val="6B7280"/>
                 </a:solidFill>
                 <a:latin typeface="Calibri"/>
               </a:rPr>
-              <a:t>When you type something into Claude, it is not looking up an answer. It is generating one -- shaped by everything it learned during training plus the context you give it right now.</a:t>
-            </a:r>
-          </a:p>
-          <a:p>
-            <a:pPr>
-              <a:spcBef>
-                <a:spcPts val="200"/>
-              </a:spcBef>
-            </a:pPr>
-            <a:r>
-              <a:rPr sz="800" b="0" i="0">
+              <a:t>A folder of files that tells Claude who you are before you type a word. Specific to your role, your standards, your voice.</a:t>
+            </a:r>
+          </a:p>
+        </p:txBody>
+      </p:sp>
+      <p:sp>
+        <p:nvSpPr>
+          <p:cNvPr id="11" name="TextBox 10"/>
+          <p:cNvSpPr txBox="1"/>
+          <p:nvPr/>
+        </p:nvSpPr>
+        <p:spPr>
+          <a:xfrm>
+            <a:off x="548640" y="3575303"/>
+            <a:ext cx="320040" cy="475488"/>
+          </a:xfrm>
+          <a:prstGeom prst="rect">
+            <a:avLst/>
+          </a:prstGeom>
+          <a:noFill/>
+        </p:spPr>
+        <p:txBody>
+          <a:bodyPr wrap="square">
+            <a:spAutoFit/>
+          </a:bodyPr>
+          <a:lstStyle/>
+          <a:p>
+            <a:pPr algn="l"/>
+            <a:r>
+              <a:rPr sz="1300" b="0" i="0">
+                <a:solidFill>
+                  <a:srgbClr val="C9913A"/>
+                </a:solidFill>
+                <a:latin typeface="Calibri"/>
+              </a:rPr>
+              <a:t>●</a:t>
+            </a:r>
+          </a:p>
+        </p:txBody>
+      </p:sp>
+      <p:sp>
+        <p:nvSpPr>
+          <p:cNvPr id="12" name="TextBox 11"/>
+          <p:cNvSpPr txBox="1"/>
+          <p:nvPr/>
+        </p:nvSpPr>
+        <p:spPr>
+          <a:xfrm>
+            <a:off x="868680" y="3575303"/>
+            <a:ext cx="3474720" cy="411480"/>
+          </a:xfrm>
+          <a:prstGeom prst="rect">
+            <a:avLst/>
+          </a:prstGeom>
+          <a:noFill/>
+        </p:spPr>
+        <p:txBody>
+          <a:bodyPr wrap="square">
+            <a:spAutoFit/>
+          </a:bodyPr>
+          <a:lstStyle/>
+          <a:p>
+            <a:pPr algn="l"/>
+            <a:r>
+              <a:rPr sz="1900" b="1" i="0">
                 <a:solidFill>
                   <a:srgbClr val="0D2B4E"/>
                 </a:solidFill>
                 <a:latin typeface="Calibri"/>
               </a:rPr>
-              <a:t/>
-            </a:r>
-          </a:p>
-          <a:p>
-            <a:pPr>
-              <a:spcBef>
-                <a:spcPts val="600"/>
-              </a:spcBef>
-            </a:pPr>
+              <a:t>Your first automations live</a:t>
+            </a:r>
+          </a:p>
+        </p:txBody>
+      </p:sp>
+      <p:sp>
+        <p:nvSpPr>
+          <p:cNvPr id="13" name="TextBox 12"/>
+          <p:cNvSpPr txBox="1"/>
+          <p:nvPr/>
+        </p:nvSpPr>
+        <p:spPr>
+          <a:xfrm>
+            <a:off x="4480560" y="3575303"/>
+            <a:ext cx="7178040" cy="685800"/>
+          </a:xfrm>
+          <a:prstGeom prst="rect">
+            <a:avLst/>
+          </a:prstGeom>
+          <a:noFill/>
+        </p:spPr>
+        <p:txBody>
+          <a:bodyPr wrap="square">
+            <a:spAutoFit/>
+          </a:bodyPr>
+          <a:lstStyle/>
+          <a:p>
+            <a:pPr algn="l"/>
+            <a:r>
+              <a:rPr sz="1700" b="0" i="0">
+                <a:solidFill>
+                  <a:srgbClr val="6B7280"/>
+                </a:solidFill>
+                <a:latin typeface="Calibri"/>
+              </a:rPr>
+              <a:t>At least one skill that runs a full workflow from a single command -- diligence, alumni intros, deal briefs.</a:t>
+            </a:r>
+          </a:p>
+        </p:txBody>
+      </p:sp>
+      <p:sp>
+        <p:nvSpPr>
+          <p:cNvPr id="14" name="TextBox 13"/>
+          <p:cNvSpPr txBox="1"/>
+          <p:nvPr/>
+        </p:nvSpPr>
+        <p:spPr>
+          <a:xfrm>
+            <a:off x="548640" y="4379976"/>
+            <a:ext cx="320040" cy="475488"/>
+          </a:xfrm>
+          <a:prstGeom prst="rect">
+            <a:avLst/>
+          </a:prstGeom>
+          <a:noFill/>
+        </p:spPr>
+        <p:txBody>
+          <a:bodyPr wrap="square">
+            <a:spAutoFit/>
+          </a:bodyPr>
+          <a:lstStyle/>
+          <a:p>
+            <a:pPr algn="l"/>
+            <a:r>
+              <a:rPr sz="1300" b="0" i="0">
+                <a:solidFill>
+                  <a:srgbClr val="C9913A"/>
+                </a:solidFill>
+                <a:latin typeface="Calibri"/>
+              </a:rPr>
+              <a:t>●</a:t>
+            </a:r>
+          </a:p>
+        </p:txBody>
+      </p:sp>
+      <p:sp>
+        <p:nvSpPr>
+          <p:cNvPr id="15" name="TextBox 14"/>
+          <p:cNvSpPr txBox="1"/>
+          <p:nvPr/>
+        </p:nvSpPr>
+        <p:spPr>
+          <a:xfrm>
+            <a:off x="868680" y="4379976"/>
+            <a:ext cx="3474720" cy="411480"/>
+          </a:xfrm>
+          <a:prstGeom prst="rect">
+            <a:avLst/>
+          </a:prstGeom>
+          <a:noFill/>
+        </p:spPr>
+        <p:txBody>
+          <a:bodyPr wrap="square">
+            <a:spAutoFit/>
+          </a:bodyPr>
+          <a:lstStyle/>
+          <a:p>
+            <a:pPr algn="l"/>
             <a:r>
               <a:rPr sz="1900" b="1" i="0">
                 <a:solidFill>
@@ -6792,23 +9213,147 @@
                 </a:solidFill>
                 <a:latin typeface="Calibri"/>
               </a:rPr>
-              <a:t>The critical fact:</a:t>
-            </a:r>
-          </a:p>
-          <a:p>
-            <a:pPr>
-              <a:spcBef>
-                <a:spcPts val="600"/>
-              </a:spcBef>
-            </a:pPr>
-            <a:r>
-              <a:rPr sz="1900" b="0" i="0">
+              <a:t>Your tools connected</a:t>
+            </a:r>
+          </a:p>
+        </p:txBody>
+      </p:sp>
+      <p:sp>
+        <p:nvSpPr>
+          <p:cNvPr id="16" name="TextBox 15"/>
+          <p:cNvSpPr txBox="1"/>
+          <p:nvPr/>
+        </p:nvSpPr>
+        <p:spPr>
+          <a:xfrm>
+            <a:off x="4480560" y="4379976"/>
+            <a:ext cx="7178040" cy="685800"/>
+          </a:xfrm>
+          <a:prstGeom prst="rect">
+            <a:avLst/>
+          </a:prstGeom>
+          <a:noFill/>
+        </p:spPr>
+        <p:txBody>
+          <a:bodyPr wrap="square">
+            <a:spAutoFit/>
+          </a:bodyPr>
+          <a:lstStyle/>
+          <a:p>
+            <a:pPr algn="l"/>
+            <a:r>
+              <a:rPr sz="1700" b="0" i="0">
+                <a:solidFill>
+                  <a:srgbClr val="6B7280"/>
+                </a:solidFill>
+                <a:latin typeface="Calibri"/>
+              </a:rPr>
+              <a:t>Claude linked to Airtable, Notion, Microsoft 365, or whichever connectors apply to your work.</a:t>
+            </a:r>
+          </a:p>
+        </p:txBody>
+      </p:sp>
+      <p:sp>
+        <p:nvSpPr>
+          <p:cNvPr id="17" name="TextBox 16"/>
+          <p:cNvSpPr txBox="1"/>
+          <p:nvPr/>
+        </p:nvSpPr>
+        <p:spPr>
+          <a:xfrm>
+            <a:off x="548640" y="5184648"/>
+            <a:ext cx="320040" cy="475488"/>
+          </a:xfrm>
+          <a:prstGeom prst="rect">
+            <a:avLst/>
+          </a:prstGeom>
+          <a:noFill/>
+        </p:spPr>
+        <p:txBody>
+          <a:bodyPr wrap="square">
+            <a:spAutoFit/>
+          </a:bodyPr>
+          <a:lstStyle/>
+          <a:p>
+            <a:pPr algn="l"/>
+            <a:r>
+              <a:rPr sz="1300" b="0" i="0">
+                <a:solidFill>
+                  <a:srgbClr val="C9913A"/>
+                </a:solidFill>
+                <a:latin typeface="Calibri"/>
+              </a:rPr>
+              <a:t>●</a:t>
+            </a:r>
+          </a:p>
+        </p:txBody>
+      </p:sp>
+      <p:sp>
+        <p:nvSpPr>
+          <p:cNvPr id="18" name="TextBox 17"/>
+          <p:cNvSpPr txBox="1"/>
+          <p:nvPr/>
+        </p:nvSpPr>
+        <p:spPr>
+          <a:xfrm>
+            <a:off x="868680" y="5184648"/>
+            <a:ext cx="3474720" cy="411480"/>
+          </a:xfrm>
+          <a:prstGeom prst="rect">
+            <a:avLst/>
+          </a:prstGeom>
+          <a:noFill/>
+        </p:spPr>
+        <p:txBody>
+          <a:bodyPr wrap="square">
+            <a:spAutoFit/>
+          </a:bodyPr>
+          <a:lstStyle/>
+          <a:p>
+            <a:pPr algn="l"/>
+            <a:r>
+              <a:rPr sz="1900" b="1" i="0">
                 <a:solidFill>
                   <a:srgbClr val="0D2B4E"/>
                 </a:solidFill>
                 <a:latin typeface="Calibri"/>
               </a:rPr>
-              <a:t>It does not know who you are, what you do, or what you care about unless you tell it. The goal of what we are building today is a system where Claude already knows your context before you type a single word.</a:t>
+              <a:t>A system that grows</a:t>
+            </a:r>
+          </a:p>
+        </p:txBody>
+      </p:sp>
+      <p:sp>
+        <p:nvSpPr>
+          <p:cNvPr id="19" name="TextBox 18"/>
+          <p:cNvSpPr txBox="1"/>
+          <p:nvPr/>
+        </p:nvSpPr>
+        <p:spPr>
+          <a:xfrm>
+            <a:off x="4480560" y="5184648"/>
+            <a:ext cx="7178040" cy="685800"/>
+          </a:xfrm>
+          <a:prstGeom prst="rect">
+            <a:avLst/>
+          </a:prstGeom>
+          <a:noFill/>
+        </p:spPr>
+        <p:txBody>
+          <a:bodyPr wrap="square">
+            <a:spAutoFit/>
+          </a:bodyPr>
+          <a:lstStyle/>
+          <a:p>
+            <a:pPr algn="l"/>
+            <a:r>
+              <a:rPr sz="1700" b="0" i="0">
+                <a:solidFill>
+                  <a:srgbClr val="6B7280"/>
+                </a:solidFill>
+                <a:latin typeface="Calibri"/>
+              </a:rPr>
+              <a:t>Every session adds context. Every output improves the next one. You will not have to maintain it -- it learns as you work.</a:t>
             </a:r>
           </a:p>
         </p:txBody>
@@ -6821,8 +9366,8 @@
 </p:sld>
 </file>
 
-<file path=ppt/slides/slide4.xml><?xml version="1.0" encoding="utf-8"?>
-<p:sld xmlns:a="http://schemas.openxmlformats.org/drawingml/2006/main" xmlns:p="http://schemas.openxmlformats.org/presentationml/2006/main" xmlns:r="http://schemas.openxmlformats.org/officeDocument/2006/relationships">
+<file path=ppt/slides/slide5.xml><?xml version="1.0" encoding="utf-8"?>
+<p:sld xmlns:a="http://schemas.openxmlformats.org/drawingml/2006/main" xmlns:r="http://schemas.openxmlformats.org/officeDocument/2006/relationships" xmlns:p="http://schemas.openxmlformats.org/presentationml/2006/main">
   <p:cSld>
     <p:bg>
       <p:bgPr>
@@ -6838,7 +9383,14 @@
         <p:cNvGrpSpPr/>
         <p:nvPr/>
       </p:nvGrpSpPr>
-      <p:grpSpPr/>
+      <p:grpSpPr>
+        <a:xfrm>
+          <a:off x="0" y="0"/>
+          <a:ext cx="0" cy="0"/>
+          <a:chOff x="0" y="0"/>
+          <a:chExt cx="0" cy="0"/>
+        </a:xfrm>
+      </p:grpSpPr>
       <p:sp>
         <p:nvSpPr>
           <p:cNvPr id="2" name="TextBox 1"/>
@@ -6848,7 +9400,7 @@
         <p:spPr>
           <a:xfrm>
             <a:off x="548640" y="384048"/>
-            <a:ext cx="11064240" cy="749808"/>
+            <a:ext cx="11064240" cy="600164"/>
           </a:xfrm>
           <a:prstGeom prst="rect">
             <a:avLst/>
@@ -6863,14 +9415,29 @@
           <a:p>
             <a:pPr algn="l"/>
             <a:r>
-              <a:rPr sz="3300" b="1" i="0">
+              <a:rPr lang="en-US" sz="3300" b="1" dirty="0">
                 <a:solidFill>
                   <a:srgbClr val="0D2B4E"/>
                 </a:solidFill>
                 <a:latin typeface="Calibri"/>
               </a:rPr>
-              <a:t>Think of the most capable person you have ever hired.</a:t>
-            </a:r>
+              <a:t>H</a:t>
+            </a:r>
+            <a:r>
+              <a:rPr lang="en-US" sz="3300" b="1" i="0" dirty="0">
+                <a:solidFill>
+                  <a:srgbClr val="0D2B4E"/>
+                </a:solidFill>
+                <a:latin typeface="Calibri"/>
+              </a:rPr>
+              <a:t>omework</a:t>
+            </a:r>
+            <a:endParaRPr sz="3300" b="1" i="0" dirty="0">
+              <a:solidFill>
+                <a:srgbClr val="0D2B4E"/>
+              </a:solidFill>
+              <a:latin typeface="Calibri"/>
+            </a:endParaRPr>
           </a:p>
         </p:txBody>
       </p:sp>
@@ -6914,6 +9481,7 @@
           <a:lstStyle/>
           <a:p>
             <a:pPr algn="ctr"/>
+            <a:endParaRPr/>
           </a:p>
         </p:txBody>
       </p:sp>
@@ -6945,13 +9513,13 @@
               </a:spcBef>
             </a:pPr>
             <a:r>
-              <a:rPr sz="2000" b="1" i="0">
+              <a:rPr sz="1900" b="0" i="0">
                 <a:solidFill>
                   <a:srgbClr val="0D2B4E"/>
                 </a:solidFill>
                 <a:latin typeface="Calibri"/>
               </a:rPr>
-              <a:t>Brilliant. Fast. No ego. No bad habits. Available at any hour.</a:t>
+              <a:t>All three of you named email as your biggest time sink. Two named scheduling.</a:t>
             </a:r>
           </a:p>
           <a:p>
@@ -6967,7 +9535,7 @@
                 </a:solidFill>
                 <a:latin typeface="Calibri"/>
               </a:rPr>
-              <a:t>But on day one, they know nothing about your organization, your standards, your relationships, or your history. The quality of their work in week one depends almost entirely on how well you brief them.</a:t>
+              <a:t>Olivia -- 15 to 20 hours a week on diligence. Her exact words: "Could include more depth if I had the time."</a:t>
             </a:r>
           </a:p>
           <a:p>
@@ -6977,29 +9545,58 @@
               </a:spcBef>
             </a:pPr>
             <a:r>
-              <a:rPr sz="2000" b="1" i="0">
+              <a:rPr sz="1900" b="0" i="0">
+                <a:solidFill>
+                  <a:srgbClr val="6B7280"/>
+                </a:solidFill>
+                <a:latin typeface="Calibri"/>
+              </a:rPr>
+              <a:t>Tony -- deal analysis and LP updates taking time that should go to judgment.</a:t>
+            </a:r>
+          </a:p>
+          <a:p>
+            <a:pPr>
+              <a:spcBef>
+                <a:spcPts val="600"/>
+              </a:spcBef>
+            </a:pPr>
+            <a:r>
+              <a:rPr sz="1900" b="0" i="0">
+                <a:solidFill>
+                  <a:srgbClr val="6B7280"/>
+                </a:solidFill>
+                <a:latin typeface="Calibri"/>
+              </a:rPr>
+              <a:t>Jon -- alumni intro emails typed manually, one at a time. Newsletter never gets done.</a:t>
+            </a:r>
+          </a:p>
+          <a:p>
+            <a:pPr>
+              <a:spcBef>
+                <a:spcPts val="200"/>
+              </a:spcBef>
+            </a:pPr>
+            <a:endParaRPr sz="1900" b="0" i="0">
+              <a:solidFill>
+                <a:srgbClr val="6B7280"/>
+              </a:solidFill>
+              <a:latin typeface="Calibri"/>
+            </a:endParaRPr>
+          </a:p>
+          <a:p>
+            <a:pPr>
+              <a:spcBef>
+                <a:spcPts val="600"/>
+              </a:spcBef>
+            </a:pPr>
+            <a:r>
+              <a:rPr sz="2200" b="1" i="0">
                 <a:solidFill>
                   <a:srgbClr val="0D2B4E"/>
                 </a:solidFill>
                 <a:latin typeface="Calibri"/>
               </a:rPr>
-              <a:t>That is Claude.</a:t>
-            </a:r>
-          </a:p>
-          <a:p>
-            <a:pPr>
-              <a:spcBef>
-                <a:spcPts val="200"/>
-              </a:spcBef>
-            </a:pPr>
-            <a:r>
-              <a:rPr sz="800" b="0" i="0">
-                <a:solidFill>
-                  <a:srgbClr val="0D2B4E"/>
-                </a:solidFill>
-                <a:latin typeface="Calibri"/>
-              </a:rPr>
-              <a:t/>
+              <a:t>These are not separate problems. They are the same problem.</a:t>
             </a:r>
           </a:p>
           <a:p>
@@ -7011,27 +9608,11 @@
             <a:r>
               <a:rPr sz="1900" b="0" i="0">
                 <a:solidFill>
-                  <a:srgbClr val="C9913A"/>
-                </a:solidFill>
-                <a:latin typeface="Calibri"/>
-              </a:rPr>
-              <a:t>The people getting extraordinary results from AI are not the ones who figured out better ways to ask questions. They are the ones who built better systems for briefing it -- once -- so they never have to brief it again.</a:t>
-            </a:r>
-          </a:p>
-          <a:p>
-            <a:pPr>
-              <a:spcBef>
-                <a:spcPts val="600"/>
-              </a:spcBef>
-            </a:pPr>
-            <a:r>
-              <a:rPr sz="1900" b="0" i="0">
-                <a:solidFill>
                   <a:srgbClr val="6B7280"/>
                 </a:solidFill>
                 <a:latin typeface="Calibri"/>
               </a:rPr>
-              <a:t>The question for today: what does a complete briefing system look like for your specific job? By the end of this session, Phil will have built it with you.</a:t>
+              <a:t>Good work getting slowed down by the volume of routine around it. Every hour reclaimed from routine is an hour back for the work only you can do. That is what we are building today.</a:t>
             </a:r>
           </a:p>
         </p:txBody>
@@ -7044,8 +9625,8 @@
 </p:sld>
 </file>
 
-<file path=ppt/slides/slide5.xml><?xml version="1.0" encoding="utf-8"?>
-<p:sld xmlns:a="http://schemas.openxmlformats.org/drawingml/2006/main" xmlns:p="http://schemas.openxmlformats.org/presentationml/2006/main" xmlns:r="http://schemas.openxmlformats.org/officeDocument/2006/relationships">
+<file path=ppt/slides/slide6.xml><?xml version="1.0" encoding="utf-8"?>
+<p:sld xmlns:a="http://schemas.openxmlformats.org/drawingml/2006/main" xmlns:r="http://schemas.openxmlformats.org/officeDocument/2006/relationships" xmlns:p="http://schemas.openxmlformats.org/presentationml/2006/main">
   <p:cSld>
     <p:bg>
       <p:bgPr>
@@ -7061,7 +9642,14 @@
         <p:cNvGrpSpPr/>
         <p:nvPr/>
       </p:nvGrpSpPr>
-      <p:grpSpPr/>
+      <p:grpSpPr>
+        <a:xfrm>
+          <a:off x="0" y="0"/>
+          <a:ext cx="0" cy="0"/>
+          <a:chOff x="0" y="0"/>
+          <a:chExt cx="0" cy="0"/>
+        </a:xfrm>
+      </p:grpSpPr>
       <p:sp>
         <p:nvSpPr>
           <p:cNvPr id="2" name="TextBox 1"/>
@@ -7092,7 +9680,7 @@
                 </a:solidFill>
                 <a:latin typeface="Calibri"/>
               </a:rPr>
-              <a:t>How People Are Actually Learning This</a:t>
+              <a:t>What AI Actually Is</a:t>
             </a:r>
           </a:p>
         </p:txBody>
@@ -7137,6 +9725,7 @@
           <a:lstStyle/>
           <a:p>
             <a:pPr algn="ctr"/>
+            <a:endParaRPr/>
           </a:p>
         </p:txBody>
       </p:sp>
@@ -7149,7 +9738,7 @@
         <p:spPr>
           <a:xfrm>
             <a:off x="548640" y="1371600"/>
-            <a:ext cx="11064240" cy="5029200"/>
+            <a:ext cx="11064240" cy="3365024"/>
           </a:xfrm>
           <a:prstGeom prst="rect">
             <a:avLst/>
@@ -7168,14 +9757,20 @@
               </a:spcBef>
             </a:pPr>
             <a:r>
-              <a:rPr sz="1900" b="1" i="0">
+              <a:rPr lang="en-US" sz="2000" b="1" i="0" dirty="0">
                 <a:solidFill>
                   <a:srgbClr val="0D2B4E"/>
                 </a:solidFill>
                 <a:latin typeface="Calibri"/>
               </a:rPr>
-              <a:t>The old model: take a course, read the manual, then use the tool. That does not work for AI.</a:t>
-            </a:r>
+              <a:t>It’s a tool.</a:t>
+            </a:r>
+            <a:endParaRPr sz="2000" b="1" i="0" dirty="0">
+              <a:solidFill>
+                <a:srgbClr val="0D2B4E"/>
+              </a:solidFill>
+              <a:latin typeface="Calibri"/>
+            </a:endParaRPr>
           </a:p>
           <a:p>
             <a:pPr>
@@ -7184,13 +9779,13 @@
               </a:spcBef>
             </a:pPr>
             <a:r>
-              <a:rPr sz="1900" b="0" i="0">
+              <a:rPr sz="1900" b="0" i="0" dirty="0">
                 <a:solidFill>
                   <a:srgbClr val="6B7280"/>
                 </a:solidFill>
                 <a:latin typeface="Calibri"/>
               </a:rPr>
-              <a:t>A course on prompting will not teach you how to make Claude useful for evaluating a seed-stage founder at IU Angel Network. A manual will not teach you how to draft alumni introductions that sound like Jon Barada.</a:t>
+              <a:t>AI was trained on an enormous volume of human-generated text -- books, research, articles, conversations, code, documentation. That training gives it the ability to recognize patterns and generate responses relevant to whatever you give it in the moment.</a:t>
             </a:r>
           </a:p>
           <a:p>
@@ -7200,13 +9795,13 @@
               </a:spcBef>
             </a:pPr>
             <a:r>
-              <a:rPr sz="1900" b="0" i="0">
+              <a:rPr sz="1900" b="0" i="0" dirty="0">
                 <a:solidFill>
                   <a:srgbClr val="6B7280"/>
                 </a:solidFill>
                 <a:latin typeface="Calibri"/>
               </a:rPr>
-              <a:t>The only way to learn what AI can do for your specific work is to work with it on your specific work.</a:t>
+              <a:t>When you type something into Claude, it is not looking up an answer. It is generating one -- shaped by everything it learned during training plus the context you give it right now.</a:t>
             </a:r>
           </a:p>
           <a:p>
@@ -7215,14 +9810,27 @@
                 <a:spcPts val="200"/>
               </a:spcBef>
             </a:pPr>
-            <a:r>
-              <a:rPr sz="800" b="0" i="0">
+            <a:endParaRPr sz="1900" b="0" i="0" dirty="0">
+              <a:solidFill>
+                <a:srgbClr val="6B7280"/>
+              </a:solidFill>
+              <a:latin typeface="Calibri"/>
+            </a:endParaRPr>
+          </a:p>
+          <a:p>
+            <a:pPr>
+              <a:spcBef>
+                <a:spcPts val="600"/>
+              </a:spcBef>
+            </a:pPr>
+            <a:r>
+              <a:rPr sz="1900" b="1" i="0" dirty="0">
                 <a:solidFill>
                   <a:srgbClr val="0D2B4E"/>
                 </a:solidFill>
                 <a:latin typeface="Calibri"/>
               </a:rPr>
-              <a:t/>
+              <a:t>The critical fact:</a:t>
             </a:r>
           </a:p>
           <a:p>
@@ -7232,45 +9840,13 @@
               </a:spcBef>
             </a:pPr>
             <a:r>
-              <a:rPr sz="2000" b="1" i="0">
+              <a:rPr sz="1900" b="0" i="0" dirty="0">
                 <a:solidFill>
                   <a:srgbClr val="0D2B4E"/>
                 </a:solidFill>
                 <a:latin typeface="Calibri"/>
               </a:rPr>
-              <a:t>The shift that matters most:</a:t>
-            </a:r>
-          </a:p>
-          <a:p>
-            <a:pPr>
-              <a:spcBef>
-                <a:spcPts val="600"/>
-              </a:spcBef>
-            </a:pPr>
-            <a:r>
-              <a:rPr sz="1900" b="0" i="0">
-                <a:solidFill>
-                  <a:srgbClr val="0D2B4E"/>
-                </a:solidFill>
-                <a:latin typeface="Calibri"/>
-              </a:rPr>
-              <a:t>Before you start any significant task, ask Claude how to approach it. Not "do this for me." Ask: "Here is what I am trying to do and here is what I have. What is the best way in? What do people usually miss?"</a:t>
-            </a:r>
-          </a:p>
-          <a:p>
-            <a:pPr>
-              <a:spcBef>
-                <a:spcPts val="600"/>
-              </a:spcBef>
-            </a:pPr>
-            <a:r>
-              <a:rPr sz="1900" b="0" i="0">
-                <a:solidFill>
-                  <a:srgbClr val="C9913A"/>
-                </a:solidFill>
-                <a:latin typeface="Calibri"/>
-              </a:rPr>
-              <a:t>This single behavior separates people who get mediocre results from people who get results that make their colleagues wonder how they did it so fast.</a:t>
+              <a:t>It does not know who you are, what you do, or what you care about unless you tell it. The goal of what we are building today is a system where Claude already knows your context before you type a single word.</a:t>
             </a:r>
           </a:p>
         </p:txBody>
@@ -7283,8 +9859,8 @@
 </p:sld>
 </file>
 
-<file path=ppt/slides/slide6.xml><?xml version="1.0" encoding="utf-8"?>
-<p:sld xmlns:a="http://schemas.openxmlformats.org/drawingml/2006/main" xmlns:p="http://schemas.openxmlformats.org/presentationml/2006/main" xmlns:r="http://schemas.openxmlformats.org/officeDocument/2006/relationships">
+<file path=ppt/slides/slide7.xml><?xml version="1.0" encoding="utf-8"?>
+<p:sld xmlns:a="http://schemas.openxmlformats.org/drawingml/2006/main" xmlns:r="http://schemas.openxmlformats.org/officeDocument/2006/relationships" xmlns:p="http://schemas.openxmlformats.org/presentationml/2006/main">
   <p:cSld>
     <p:bg>
       <p:bgPr>
@@ -7300,7 +9876,14 @@
         <p:cNvGrpSpPr/>
         <p:nvPr/>
       </p:nvGrpSpPr>
-      <p:grpSpPr/>
+      <p:grpSpPr>
+        <a:xfrm>
+          <a:off x="0" y="0"/>
+          <a:ext cx="0" cy="0"/>
+          <a:chOff x="0" y="0"/>
+          <a:chExt cx="0" cy="0"/>
+        </a:xfrm>
+      </p:grpSpPr>
       <p:sp>
         <p:nvSpPr>
           <p:cNvPr id="2" name="TextBox 1"/>
@@ -7331,7 +9914,7 @@
                 </a:solidFill>
                 <a:latin typeface="Calibri"/>
               </a:rPr>
-              <a:t>What this looks like for each of you.</a:t>
+              <a:t>Think of the most capable person you have ever hired.</a:t>
             </a:r>
           </a:p>
         </p:txBody>
@@ -7376,6 +9959,7 @@
           <a:lstStyle/>
           <a:p>
             <a:pPr algn="ctr"/>
+            <a:endParaRPr/>
           </a:p>
         </p:txBody>
       </p:sp>
@@ -7388,67 +9972,93 @@
         <p:spPr>
           <a:xfrm>
             <a:off x="548640" y="1371600"/>
-            <a:ext cx="2286000" cy="502920"/>
-          </a:xfrm>
-          <a:prstGeom prst="rect">
-            <a:avLst/>
-          </a:prstGeom>
-          <a:noFill/>
-        </p:spPr>
-        <p:txBody>
-          <a:bodyPr wrap="square">
-            <a:spAutoFit/>
-          </a:bodyPr>
-          <a:lstStyle/>
-          <a:p>
-            <a:pPr algn="l"/>
-            <a:r>
-              <a:rPr sz="2200" b="1" i="0">
+            <a:ext cx="11064240" cy="5029200"/>
+          </a:xfrm>
+          <a:prstGeom prst="rect">
+            <a:avLst/>
+          </a:prstGeom>
+          <a:noFill/>
+        </p:spPr>
+        <p:txBody>
+          <a:bodyPr wrap="square">
+            <a:spAutoFit/>
+          </a:bodyPr>
+          <a:lstStyle/>
+          <a:p>
+            <a:pPr>
+              <a:spcBef>
+                <a:spcPts val="0"/>
+              </a:spcBef>
+            </a:pPr>
+            <a:r>
+              <a:rPr sz="2000" b="1" i="0" dirty="0">
+                <a:solidFill>
+                  <a:srgbClr val="0D2B4E"/>
+                </a:solidFill>
+                <a:latin typeface="Calibri"/>
+              </a:rPr>
+              <a:t>Brilliant. Fast. No ego. No bad habits. Available at any hour.</a:t>
+            </a:r>
+          </a:p>
+          <a:p>
+            <a:pPr>
+              <a:spcBef>
+                <a:spcPts val="600"/>
+              </a:spcBef>
+            </a:pPr>
+            <a:r>
+              <a:rPr sz="1900" b="0" i="0" dirty="0">
+                <a:solidFill>
+                  <a:srgbClr val="6B7280"/>
+                </a:solidFill>
+                <a:latin typeface="Calibri"/>
+              </a:rPr>
+              <a:t>But on day one, they know nothing about your organization, your standards, your relationships, or your history. The quality of their work in week one depends almost entirely on how well you brief them.</a:t>
+            </a:r>
+          </a:p>
+          <a:p>
+            <a:pPr>
+              <a:spcBef>
+                <a:spcPts val="600"/>
+              </a:spcBef>
+            </a:pPr>
+            <a:r>
+              <a:rPr sz="2000" b="1" i="0" dirty="0">
+                <a:solidFill>
+                  <a:srgbClr val="0D2B4E"/>
+                </a:solidFill>
+                <a:latin typeface="Calibri"/>
+              </a:rPr>
+              <a:t>That is Claude.</a:t>
+            </a:r>
+          </a:p>
+          <a:p>
+            <a:pPr>
+              <a:spcBef>
+                <a:spcPts val="200"/>
+              </a:spcBef>
+            </a:pPr>
+            <a:endParaRPr sz="2000" b="1" i="0" dirty="0">
+              <a:solidFill>
+                <a:srgbClr val="0D2B4E"/>
+              </a:solidFill>
+              <a:latin typeface="Calibri"/>
+            </a:endParaRPr>
+          </a:p>
+          <a:p>
+            <a:pPr>
+              <a:spcBef>
+                <a:spcPts val="600"/>
+              </a:spcBef>
+            </a:pPr>
+            <a:r>
+              <a:rPr sz="1900" b="0" i="0" dirty="0">
                 <a:solidFill>
                   <a:srgbClr val="C9913A"/>
                 </a:solidFill>
                 <a:latin typeface="Calibri"/>
               </a:rPr>
-              <a:t>Tony.</a:t>
-            </a:r>
-          </a:p>
-        </p:txBody>
-      </p:sp>
-      <p:sp>
-        <p:nvSpPr>
-          <p:cNvPr id="5" name="TextBox 4"/>
-          <p:cNvSpPr txBox="1"/>
-          <p:nvPr/>
-        </p:nvSpPr>
-        <p:spPr>
-          <a:xfrm>
-            <a:off x="548640" y="1920240"/>
-            <a:ext cx="11064240" cy="1828800"/>
-          </a:xfrm>
-          <a:prstGeom prst="rect">
-            <a:avLst/>
-          </a:prstGeom>
-          <a:noFill/>
-        </p:spPr>
-        <p:txBody>
-          <a:bodyPr wrap="square">
-            <a:spAutoFit/>
-          </a:bodyPr>
-          <a:lstStyle/>
-          <a:p>
-            <a:pPr>
-              <a:spcBef>
-                <a:spcPts val="0"/>
-              </a:spcBef>
-            </a:pPr>
-            <a:r>
-              <a:rPr sz="1800" b="0" i="0">
-                <a:solidFill>
-                  <a:srgbClr val="0D2B4E"/>
-                </a:solidFill>
-                <a:latin typeface="Calibri"/>
-              </a:rPr>
-              <a:t>A dozen emails needing real responses. Four-plus calls. Deal analyses. LP updates every week.</a:t>
+              <a:t>The people getting extraordinary results from AI are not the ones who figured out better ways to ask questions. They are the ones who built better systems for briefing it -- once -- so they never have to brief it again.</a:t>
             </a:r>
           </a:p>
           <a:p>
@@ -7458,162 +10068,13 @@
               </a:spcBef>
             </a:pPr>
             <a:r>
-              <a:rPr sz="1800" b="0" i="0">
+              <a:rPr sz="1900" b="0" i="0" dirty="0">
                 <a:solidFill>
                   <a:srgbClr val="6B7280"/>
                 </a:solidFill>
                 <a:latin typeface="Calibri"/>
               </a:rPr>
-              <a:t>The question is not whether AI can write those emails. It is whether it can read the incoming ones, identify the 20% that actually need your judgment, and draft a first pass on the rest that sounds like IU Ventures.</a:t>
-            </a:r>
-          </a:p>
-          <a:p>
-            <a:pPr>
-              <a:spcBef>
-                <a:spcPts val="600"/>
-              </a:spcBef>
-            </a:pPr>
-            <a:r>
-              <a:rPr sz="1800" b="0" i="0">
-                <a:solidFill>
-                  <a:srgbClr val="6B7280"/>
-                </a:solidFill>
-                <a:latin typeface="Calibri"/>
-              </a:rPr>
-              <a:t>For that to work, Claude needs to understand who you are before it touches a message. It needs to know the difference between an LP relationship and a first-time founder cold pitch.</a:t>
-            </a:r>
-          </a:p>
-        </p:txBody>
-      </p:sp>
-      <p:sp>
-        <p:nvSpPr>
-          <p:cNvPr id="6" name="Rectangle 5"/>
-          <p:cNvSpPr/>
-          <p:nvPr/>
-        </p:nvSpPr>
-        <p:spPr>
-          <a:xfrm>
-            <a:off x="548640" y="3794760"/>
-            <a:ext cx="11064240" cy="27432"/>
-          </a:xfrm>
-          <a:prstGeom prst="rect">
-            <a:avLst/>
-          </a:prstGeom>
-          <a:solidFill>
-            <a:srgbClr val="CCCCCC"/>
-          </a:solidFill>
-          <a:ln>
-            <a:noFill/>
-          </a:ln>
-        </p:spPr>
-        <p:style>
-          <a:lnRef idx="1">
-            <a:schemeClr val="accent1"/>
-          </a:lnRef>
-          <a:fillRef idx="3">
-            <a:schemeClr val="accent1"/>
-          </a:fillRef>
-          <a:effectRef idx="2">
-            <a:schemeClr val="accent1"/>
-          </a:effectRef>
-          <a:fontRef idx="minor">
-            <a:schemeClr val="lt1"/>
-          </a:fontRef>
-        </p:style>
-        <p:txBody>
-          <a:bodyPr rtlCol="0" anchor="ctr"/>
-          <a:lstStyle/>
-          <a:p>
-            <a:pPr algn="ctr"/>
-          </a:p>
-        </p:txBody>
-      </p:sp>
-      <p:sp>
-        <p:nvSpPr>
-          <p:cNvPr id="7" name="TextBox 6"/>
-          <p:cNvSpPr txBox="1"/>
-          <p:nvPr/>
-        </p:nvSpPr>
-        <p:spPr>
-          <a:xfrm>
-            <a:off x="548640" y="3886200"/>
-            <a:ext cx="2286000" cy="502920"/>
-          </a:xfrm>
-          <a:prstGeom prst="rect">
-            <a:avLst/>
-          </a:prstGeom>
-          <a:noFill/>
-        </p:spPr>
-        <p:txBody>
-          <a:bodyPr wrap="square">
-            <a:spAutoFit/>
-          </a:bodyPr>
-          <a:lstStyle/>
-          <a:p>
-            <a:pPr algn="l"/>
-            <a:r>
-              <a:rPr sz="2200" b="1" i="0">
-                <a:solidFill>
-                  <a:srgbClr val="C9913A"/>
-                </a:solidFill>
-                <a:latin typeface="Calibri"/>
-              </a:rPr>
-              <a:t>Jon.</a:t>
-            </a:r>
-          </a:p>
-        </p:txBody>
-      </p:sp>
-      <p:sp>
-        <p:nvSpPr>
-          <p:cNvPr id="8" name="TextBox 7"/>
-          <p:cNvSpPr txBox="1"/>
-          <p:nvPr/>
-        </p:nvSpPr>
-        <p:spPr>
-          <a:xfrm>
-            <a:off x="548640" y="4389120"/>
-            <a:ext cx="11064240" cy="1371600"/>
-          </a:xfrm>
-          <a:prstGeom prst="rect">
-            <a:avLst/>
-          </a:prstGeom>
-          <a:noFill/>
-        </p:spPr>
-        <p:txBody>
-          <a:bodyPr wrap="square">
-            <a:spAutoFit/>
-          </a:bodyPr>
-          <a:lstStyle/>
-          <a:p>
-            <a:pPr>
-              <a:spcBef>
-                <a:spcPts val="0"/>
-              </a:spcBef>
-            </a:pPr>
-            <a:r>
-              <a:rPr sz="1800" b="0" i="0">
-                <a:solidFill>
-                  <a:srgbClr val="0D2B4E"/>
-                </a:solidFill>
-                <a:latin typeface="Calibri"/>
-              </a:rPr>
-              <a:t>Alumni intro emails written manually, one at a time. The newsletter that never gets done. Scheduling back-and-forth that takes more time than the meeting.</a:t>
-            </a:r>
-          </a:p>
-          <a:p>
-            <a:pPr>
-              <a:spcBef>
-                <a:spcPts val="600"/>
-              </a:spcBef>
-            </a:pPr>
-            <a:r>
-              <a:rPr sz="1800" b="0" i="0">
-                <a:solidFill>
-                  <a:srgbClr val="6B7280"/>
-                </a:solidFill>
-                <a:latin typeface="Calibri"/>
-              </a:rPr>
-              <a:t>What changes: you type one line. Claude reads both alumni files, finds the specific connection angle, writes the intro in your voice. 15 minutes becomes 90 seconds.</a:t>
+              <a:t>The question for today: what does a complete briefing system look like for your specific job? By the end of this session, Phil will have built it with you.</a:t>
             </a:r>
           </a:p>
         </p:txBody>
@@ -7626,8 +10087,8 @@
 </p:sld>
 </file>
 
-<file path=ppt/slides/slide7.xml><?xml version="1.0" encoding="utf-8"?>
-<p:sld xmlns:a="http://schemas.openxmlformats.org/drawingml/2006/main" xmlns:p="http://schemas.openxmlformats.org/presentationml/2006/main" xmlns:r="http://schemas.openxmlformats.org/officeDocument/2006/relationships">
+<file path=ppt/slides/slide8.xml><?xml version="1.0" encoding="utf-8"?>
+<p:sld xmlns:a="http://schemas.openxmlformats.org/drawingml/2006/main" xmlns:r="http://schemas.openxmlformats.org/officeDocument/2006/relationships" xmlns:p="http://schemas.openxmlformats.org/presentationml/2006/main">
   <p:cSld>
     <p:bg>
       <p:bgPr>
@@ -7643,7 +10104,14 @@
         <p:cNvGrpSpPr/>
         <p:nvPr/>
       </p:nvGrpSpPr>
-      <p:grpSpPr/>
+      <p:grpSpPr>
+        <a:xfrm>
+          <a:off x="0" y="0"/>
+          <a:ext cx="0" cy="0"/>
+          <a:chOff x="0" y="0"/>
+          <a:chExt cx="0" cy="0"/>
+        </a:xfrm>
+      </p:grpSpPr>
       <p:sp>
         <p:nvSpPr>
           <p:cNvPr id="2" name="TextBox 1"/>
@@ -7674,7 +10142,7 @@
                 </a:solidFill>
                 <a:latin typeface="Calibri"/>
               </a:rPr>
-              <a:t>Olivia -- asking Claude how to approach it before you start.</a:t>
+              <a:t>How People Are Actually Learning This</a:t>
             </a:r>
           </a:p>
         </p:txBody>
@@ -7719,6 +10187,7 @@
           <a:lstStyle/>
           <a:p>
             <a:pPr algn="ctr"/>
+            <a:endParaRPr/>
           </a:p>
         </p:txBody>
       </p:sp>
@@ -7731,7 +10200,7 @@
         <p:spPr>
           <a:xfrm>
             <a:off x="548640" y="1371600"/>
-            <a:ext cx="11064240" cy="457200"/>
+            <a:ext cx="11064240" cy="5029200"/>
           </a:xfrm>
           <a:prstGeom prst="rect">
             <a:avLst/>
@@ -7750,38 +10219,76 @@
               </a:spcBef>
             </a:pPr>
             <a:r>
+              <a:rPr sz="1900" b="1" i="0">
+                <a:solidFill>
+                  <a:srgbClr val="0D2B4E"/>
+                </a:solidFill>
+                <a:latin typeface="Calibri"/>
+              </a:rPr>
+              <a:t>The old model: take a course, read the manual, then use the tool. That does not work for AI.</a:t>
+            </a:r>
+          </a:p>
+          <a:p>
+            <a:pPr>
+              <a:spcBef>
+                <a:spcPts val="600"/>
+              </a:spcBef>
+            </a:pPr>
+            <a:r>
               <a:rPr sz="1900" b="0" i="0">
                 <a:solidFill>
+                  <a:srgbClr val="6B7280"/>
+                </a:solidFill>
+                <a:latin typeface="Calibri"/>
+              </a:rPr>
+              <a:t>A course on prompting will not teach you how to make Claude useful for evaluating a seed-stage founder at IU Angel Network. A manual will not teach you how to draft alumni introductions that sound like Jon Barada.</a:t>
+            </a:r>
+          </a:p>
+          <a:p>
+            <a:pPr>
+              <a:spcBef>
+                <a:spcPts val="600"/>
+              </a:spcBef>
+            </a:pPr>
+            <a:r>
+              <a:rPr sz="1900" b="0" i="0">
+                <a:solidFill>
+                  <a:srgbClr val="6B7280"/>
+                </a:solidFill>
+                <a:latin typeface="Calibri"/>
+              </a:rPr>
+              <a:t>The only way to learn what AI can do for your specific work is to work with it on your specific work.</a:t>
+            </a:r>
+          </a:p>
+          <a:p>
+            <a:pPr>
+              <a:spcBef>
+                <a:spcPts val="200"/>
+              </a:spcBef>
+            </a:pPr>
+            <a:endParaRPr sz="1900" b="0" i="0">
+              <a:solidFill>
+                <a:srgbClr val="6B7280"/>
+              </a:solidFill>
+              <a:latin typeface="Calibri"/>
+            </a:endParaRPr>
+          </a:p>
+          <a:p>
+            <a:pPr>
+              <a:spcBef>
+                <a:spcPts val="600"/>
+              </a:spcBef>
+            </a:pPr>
+            <a:r>
+              <a:rPr sz="2000" b="1" i="0">
+                <a:solidFill>
                   <a:srgbClr val="0D2B4E"/>
                 </a:solidFill>
                 <a:latin typeface="Calibri"/>
               </a:rPr>
-              <a:t>You spend 15 to 20 hours a week on diligence. Here is what the prompt looks like before you write anything:</a:t>
-            </a:r>
-          </a:p>
-        </p:txBody>
-      </p:sp>
-      <p:sp>
-        <p:nvSpPr>
-          <p:cNvPr id="5" name="TextBox 4"/>
-          <p:cNvSpPr txBox="1"/>
-          <p:nvPr/>
-        </p:nvSpPr>
-        <p:spPr>
-          <a:xfrm>
-            <a:off x="548640" y="1920240"/>
-            <a:ext cx="11064240" cy="1371600"/>
-          </a:xfrm>
-          <a:prstGeom prst="rect">
-            <a:avLst/>
-          </a:prstGeom>
-          <a:noFill/>
-        </p:spPr>
-        <p:txBody>
-          <a:bodyPr wrap="square">
-            <a:spAutoFit/>
-          </a:bodyPr>
-          <a:lstStyle/>
+              <a:t>The shift that matters most:</a:t>
+            </a:r>
+          </a:p>
           <a:p>
             <a:pPr>
               <a:spcBef>
@@ -7789,52 +10296,13 @@
               </a:spcBef>
             </a:pPr>
             <a:r>
-              <a:rPr sz="1800" b="0" i="1">
-                <a:solidFill>
-                  <a:srgbClr val="88AACC"/>
-                </a:solidFill>
-                <a:latin typeface="Calibri"/>
-              </a:rPr>
-              <a:t>"I need to produce a 10-12 page diligence report on an early-stage college athletics software startup. I have their pitch deck, their website, and some press coverage. Before I start, what is the best approach to structuring this? What sections should I cover? What are the most common gaps analysts miss in this kind of company at this stage? And what external research should I prioritize first?"</a:t>
-            </a:r>
-          </a:p>
-        </p:txBody>
-      </p:sp>
-      <p:sp>
-        <p:nvSpPr>
-          <p:cNvPr id="6" name="TextBox 5"/>
-          <p:cNvSpPr txBox="1"/>
-          <p:nvPr/>
-        </p:nvSpPr>
-        <p:spPr>
-          <a:xfrm>
-            <a:off x="548640" y="3429000"/>
-            <a:ext cx="11064240" cy="2286000"/>
-          </a:xfrm>
-          <a:prstGeom prst="rect">
-            <a:avLst/>
-          </a:prstGeom>
-          <a:noFill/>
-        </p:spPr>
-        <p:txBody>
-          <a:bodyPr wrap="square">
-            <a:spAutoFit/>
-          </a:bodyPr>
-          <a:lstStyle/>
-          <a:p>
-            <a:pPr>
-              <a:spcBef>
-                <a:spcPts val="0"/>
-              </a:spcBef>
-            </a:pPr>
-            <a:r>
               <a:rPr sz="1900" b="0" i="0">
                 <a:solidFill>
-                  <a:srgbClr val="6B7280"/>
-                </a:solidFill>
-                <a:latin typeface="Calibri"/>
-              </a:rPr>
-              <a:t>Claude comes back with: a structured approach, a suggested order of operations, the questions most investors get wrong at this stage, and specific things to look for in the materials.</a:t>
+                  <a:srgbClr val="0D2B4E"/>
+                </a:solidFill>
+                <a:latin typeface="Calibri"/>
+              </a:rPr>
+              <a:t>Before you start any significant task, ask Claude how to approach it. Not "do this for me." Ask: "Here is what I am trying to do and here is what I have. What is the best way in? What do people usually miss?"</a:t>
             </a:r>
           </a:p>
           <a:p>
@@ -7844,29 +10312,13 @@
               </a:spcBef>
             </a:pPr>
             <a:r>
-              <a:rPr sz="1900" b="1" i="0">
-                <a:solidFill>
-                  <a:srgbClr val="0D2B4E"/>
-                </a:solidFill>
-                <a:latin typeface="Calibri"/>
-              </a:rPr>
-              <a:t>You have not produced a single sentence of the report yet.</a:t>
-            </a:r>
-          </a:p>
-          <a:p>
-            <a:pPr>
-              <a:spcBef>
-                <a:spcPts val="600"/>
-              </a:spcBef>
-            </a:pPr>
-            <a:r>
               <a:rPr sz="1900" b="0" i="0">
                 <a:solidFill>
-                  <a:srgbClr val="6B7280"/>
-                </a:solidFill>
-                <a:latin typeface="Calibri"/>
-              </a:rPr>
-              <a:t>You now have a better framework than the one you started with -- in under a minute. This is just-in-time learning applied to your actual job.</a:t>
+                  <a:srgbClr val="C9913A"/>
+                </a:solidFill>
+                <a:latin typeface="Calibri"/>
+              </a:rPr>
+              <a:t>This single behavior separates people who get mediocre results from people who get results that make their colleagues wonder how they did it so fast.</a:t>
             </a:r>
           </a:p>
         </p:txBody>
@@ -7879,8 +10331,8 @@
 </p:sld>
 </file>
 
-<file path=ppt/slides/slide8.xml><?xml version="1.0" encoding="utf-8"?>
-<p:sld xmlns:a="http://schemas.openxmlformats.org/drawingml/2006/main" xmlns:p="http://schemas.openxmlformats.org/presentationml/2006/main" xmlns:r="http://schemas.openxmlformats.org/officeDocument/2006/relationships">
+<file path=ppt/slides/slide9.xml><?xml version="1.0" encoding="utf-8"?>
+<p:sld xmlns:a="http://schemas.openxmlformats.org/drawingml/2006/main" xmlns:r="http://schemas.openxmlformats.org/officeDocument/2006/relationships" xmlns:p="http://schemas.openxmlformats.org/presentationml/2006/main">
   <p:cSld>
     <p:bg>
       <p:bgPr>
@@ -7896,7 +10348,14 @@
         <p:cNvGrpSpPr/>
         <p:nvPr/>
       </p:nvGrpSpPr>
-      <p:grpSpPr/>
+      <p:grpSpPr>
+        <a:xfrm>
+          <a:off x="0" y="0"/>
+          <a:ext cx="0" cy="0"/>
+          <a:chOff x="0" y="0"/>
+          <a:chExt cx="0" cy="0"/>
+        </a:xfrm>
+      </p:grpSpPr>
       <p:sp>
         <p:nvSpPr>
           <p:cNvPr id="2" name="TextBox 1"/>
@@ -7927,7 +10386,7 @@
                 </a:solidFill>
                 <a:latin typeface="Calibri"/>
               </a:rPr>
-              <a:t>The posture: humble curiosity.</a:t>
+              <a:t>What this looks like for each of you.</a:t>
             </a:r>
           </a:p>
         </p:txBody>
@@ -7972,6 +10431,7 @@
           <a:lstStyle/>
           <a:p>
             <a:pPr algn="ctr"/>
+            <a:endParaRPr/>
           </a:p>
         </p:txBody>
       </p:sp>
@@ -7984,7 +10444,42 @@
         <p:spPr>
           <a:xfrm>
             <a:off x="548640" y="1371600"/>
-            <a:ext cx="11064240" cy="5029200"/>
+            <a:ext cx="2286000" cy="502920"/>
+          </a:xfrm>
+          <a:prstGeom prst="rect">
+            <a:avLst/>
+          </a:prstGeom>
+          <a:noFill/>
+        </p:spPr>
+        <p:txBody>
+          <a:bodyPr wrap="square">
+            <a:spAutoFit/>
+          </a:bodyPr>
+          <a:lstStyle/>
+          <a:p>
+            <a:pPr algn="l"/>
+            <a:r>
+              <a:rPr sz="2200" b="1" i="0">
+                <a:solidFill>
+                  <a:srgbClr val="C9913A"/>
+                </a:solidFill>
+                <a:latin typeface="Calibri"/>
+              </a:rPr>
+              <a:t>Tony.</a:t>
+            </a:r>
+          </a:p>
+        </p:txBody>
+      </p:sp>
+      <p:sp>
+        <p:nvSpPr>
+          <p:cNvPr id="5" name="TextBox 4"/>
+          <p:cNvSpPr txBox="1"/>
+          <p:nvPr/>
+        </p:nvSpPr>
+        <p:spPr>
+          <a:xfrm>
+            <a:off x="548640" y="1920240"/>
+            <a:ext cx="11064240" cy="1828800"/>
           </a:xfrm>
           <a:prstGeom prst="rect">
             <a:avLst/>
@@ -8003,13 +10498,29 @@
               </a:spcBef>
             </a:pPr>
             <a:r>
-              <a:rPr sz="2000" b="0" i="0">
+              <a:rPr sz="1800" b="0" i="0">
+                <a:solidFill>
+                  <a:srgbClr val="0D2B4E"/>
+                </a:solidFill>
+                <a:latin typeface="Calibri"/>
+              </a:rPr>
+              <a:t>A dozen emails needing real responses. Four-plus calls. Deal analyses. LP updates every week.</a:t>
+            </a:r>
+          </a:p>
+          <a:p>
+            <a:pPr>
+              <a:spcBef>
+                <a:spcPts val="600"/>
+              </a:spcBef>
+            </a:pPr>
+            <a:r>
+              <a:rPr sz="1800" b="0" i="0">
                 <a:solidFill>
                   <a:srgbClr val="6B7280"/>
                 </a:solidFill>
                 <a:latin typeface="Calibri"/>
               </a:rPr>
-              <a:t>Not "tell me the answer."  Not "do this for me."</a:t>
+              <a:t>The question is not whether AI can write those emails. It is whether it can read the incoming ones, identify the 20% that actually need your judgment, and draft a first pass on the rest that sounds like IU Ventures.</a:t>
             </a:r>
           </a:p>
           <a:p>
@@ -8019,190 +10530,33 @@
               </a:spcBef>
             </a:pPr>
             <a:r>
-              <a:rPr sz="2200" b="1" i="0">
-                <a:solidFill>
-                  <a:srgbClr val="C9913A"/>
-                </a:solidFill>
-                <a:latin typeface="Calibri"/>
-              </a:rPr>
-              <a:t>"Here is what I know. Here is what I have. What am I missing? What is the best way in?"</a:t>
-            </a:r>
-          </a:p>
-          <a:p>
-            <a:pPr>
-              <a:spcBef>
-                <a:spcPts val="600"/>
-              </a:spcBef>
-            </a:pPr>
-            <a:r>
-              <a:rPr sz="1900" b="0" i="0">
+              <a:rPr sz="1800" b="0" i="0">
                 <a:solidFill>
                   <a:srgbClr val="6B7280"/>
                 </a:solidFill>
                 <a:latin typeface="Calibri"/>
               </a:rPr>
-              <a:t>The people getting the most out of AI in 2026 are not the most technically sophisticated. They are the most willing to ask before they assume.</a:t>
-            </a:r>
-          </a:p>
-          <a:p>
-            <a:pPr>
-              <a:spcBef>
-                <a:spcPts val="200"/>
-              </a:spcBef>
-            </a:pPr>
-            <a:r>
-              <a:rPr sz="600" b="0" i="0">
-                <a:solidFill>
-                  <a:srgbClr val="0D2B4E"/>
-                </a:solidFill>
-                <a:latin typeface="Calibri"/>
-              </a:rPr>
-              <a:t/>
-            </a:r>
-          </a:p>
-          <a:p>
-            <a:pPr>
-              <a:spcBef>
-                <a:spcPts val="600"/>
-              </a:spcBef>
-            </a:pPr>
-            <a:r>
-              <a:rPr sz="2000" b="1" i="0">
-                <a:solidFill>
-                  <a:srgbClr val="0D2B4E"/>
-                </a:solidFill>
-                <a:latin typeface="Calibri"/>
-              </a:rPr>
-              <a:t>Two strategies worth keeping:</a:t>
-            </a:r>
-          </a:p>
-          <a:p>
-            <a:pPr>
-              <a:spcBef>
-                <a:spcPts val="600"/>
-              </a:spcBef>
-            </a:pPr>
-            <a:r>
-              <a:rPr sz="1800" b="0" i="0">
-                <a:solidFill>
-                  <a:srgbClr val="0D2B4E"/>
-                </a:solidFill>
-                <a:latin typeface="Calibri"/>
-              </a:rPr>
-              <a:t>Plan before you act:  "Walk me through the full approach and the potential issues -- then wait for my input before you start." Claude surfaces things you had not thought of. You decide whether to proceed or adjust before any work is done.</a:t>
-            </a:r>
-          </a:p>
-          <a:p>
-            <a:pPr>
-              <a:spcBef>
-                <a:spcPts val="600"/>
-              </a:spcBef>
-            </a:pPr>
-            <a:r>
-              <a:rPr sz="1800" b="0" i="0">
-                <a:solidFill>
-                  <a:srgbClr val="0D2B4E"/>
-                </a:solidFill>
-                <a:latin typeface="Calibri"/>
-              </a:rPr>
-              <a:t>Ask for options:  "Give me three ways to approach this and the tradeoffs of each. I will pick one." Prevents anchoring on the first thing Claude suggests. 30 seconds of options usually beats the first path you would have taken.</a:t>
-            </a:r>
-          </a:p>
-          <a:p>
-            <a:pPr>
-              <a:spcBef>
-                <a:spcPts val="600"/>
-              </a:spcBef>
-            </a:pPr>
-            <a:r>
-              <a:rPr sz="1900" b="1" i="0">
-                <a:solidFill>
-                  <a:srgbClr val="C9913A"/>
-                </a:solidFill>
-                <a:latin typeface="Calibri"/>
-              </a:rPr>
-              <a:t>Both keep you as the decision-maker. Claude is the thinking partner.</a:t>
-            </a:r>
-          </a:p>
-        </p:txBody>
-      </p:sp>
-    </p:spTree>
-  </p:cSld>
-  <p:clrMapOvr>
-    <a:masterClrMapping/>
-  </p:clrMapOvr>
-</p:sld>
-</file>
-
-<file path=ppt/slides/slide9.xml><?xml version="1.0" encoding="utf-8"?>
-<p:sld xmlns:a="http://schemas.openxmlformats.org/drawingml/2006/main" xmlns:p="http://schemas.openxmlformats.org/presentationml/2006/main" xmlns:r="http://schemas.openxmlformats.org/officeDocument/2006/relationships">
-  <p:cSld>
-    <p:bg>
-      <p:bgPr>
-        <a:solidFill>
-          <a:srgbClr val="F8F7F4"/>
-        </a:solidFill>
-        <a:effectLst/>
-      </p:bgPr>
-    </p:bg>
-    <p:spTree>
-      <p:nvGrpSpPr>
-        <p:cNvPr id="1" name=""/>
-        <p:cNvGrpSpPr/>
-        <p:nvPr/>
-      </p:nvGrpSpPr>
-      <p:grpSpPr/>
-      <p:sp>
-        <p:nvSpPr>
-          <p:cNvPr id="2" name="TextBox 1"/>
-          <p:cNvSpPr txBox="1"/>
-          <p:nvPr/>
-        </p:nvSpPr>
-        <p:spPr>
-          <a:xfrm>
-            <a:off x="548640" y="384048"/>
-            <a:ext cx="11064240" cy="749808"/>
-          </a:xfrm>
-          <a:prstGeom prst="rect">
-            <a:avLst/>
-          </a:prstGeom>
-          <a:noFill/>
-        </p:spPr>
-        <p:txBody>
-          <a:bodyPr wrap="square">
-            <a:spAutoFit/>
-          </a:bodyPr>
-          <a:lstStyle/>
-          <a:p>
-            <a:pPr algn="l"/>
-            <a:r>
-              <a:rPr sz="3300" b="1" i="0">
-                <a:solidFill>
-                  <a:srgbClr val="0D2B4E"/>
-                </a:solidFill>
-                <a:latin typeface="Calibri"/>
-              </a:rPr>
-              <a:t>How Context Works -- The Most Important Concept Today</a:t>
-            </a:r>
-          </a:p>
-        </p:txBody>
-      </p:sp>
-      <p:sp>
-        <p:nvSpPr>
-          <p:cNvPr id="3" name="Rectangle 2"/>
+              <a:t>For that to work, Claude needs to understand who you are before it touches a message. It needs to know the difference between an LP relationship and a first-time founder cold pitch.</a:t>
+            </a:r>
+          </a:p>
+        </p:txBody>
+      </p:sp>
+      <p:sp>
+        <p:nvSpPr>
+          <p:cNvPr id="6" name="Rectangle 5"/>
           <p:cNvSpPr/>
           <p:nvPr/>
         </p:nvSpPr>
         <p:spPr>
           <a:xfrm>
-            <a:off x="548640" y="1115568"/>
-            <a:ext cx="365760" cy="50292"/>
+            <a:off x="548640" y="3794760"/>
+            <a:ext cx="11064240" cy="27432"/>
           </a:xfrm>
           <a:prstGeom prst="rect">
             <a:avLst/>
           </a:prstGeom>
           <a:solidFill>
-            <a:srgbClr val="C9913A"/>
+            <a:srgbClr val="CCCCCC"/>
           </a:solidFill>
           <a:ln>
             <a:noFill/>
@@ -8227,19 +10581,55 @@
           <a:lstStyle/>
           <a:p>
             <a:pPr algn="ctr"/>
-          </a:p>
-        </p:txBody>
-      </p:sp>
-      <p:sp>
-        <p:nvSpPr>
-          <p:cNvPr id="4" name="TextBox 3"/>
-          <p:cNvSpPr txBox="1"/>
-          <p:nvPr/>
-        </p:nvSpPr>
-        <p:spPr>
-          <a:xfrm>
-            <a:off x="548640" y="1371600"/>
-            <a:ext cx="11064240" cy="5029200"/>
+            <a:endParaRPr/>
+          </a:p>
+        </p:txBody>
+      </p:sp>
+      <p:sp>
+        <p:nvSpPr>
+          <p:cNvPr id="7" name="TextBox 6"/>
+          <p:cNvSpPr txBox="1"/>
+          <p:nvPr/>
+        </p:nvSpPr>
+        <p:spPr>
+          <a:xfrm>
+            <a:off x="548640" y="3886200"/>
+            <a:ext cx="2286000" cy="502920"/>
+          </a:xfrm>
+          <a:prstGeom prst="rect">
+            <a:avLst/>
+          </a:prstGeom>
+          <a:noFill/>
+        </p:spPr>
+        <p:txBody>
+          <a:bodyPr wrap="square">
+            <a:spAutoFit/>
+          </a:bodyPr>
+          <a:lstStyle/>
+          <a:p>
+            <a:pPr algn="l"/>
+            <a:r>
+              <a:rPr sz="2200" b="1" i="0">
+                <a:solidFill>
+                  <a:srgbClr val="C9913A"/>
+                </a:solidFill>
+                <a:latin typeface="Calibri"/>
+              </a:rPr>
+              <a:t>Jon.</a:t>
+            </a:r>
+          </a:p>
+        </p:txBody>
+      </p:sp>
+      <p:sp>
+        <p:nvSpPr>
+          <p:cNvPr id="8" name="TextBox 7"/>
+          <p:cNvSpPr txBox="1"/>
+          <p:nvPr/>
+        </p:nvSpPr>
+        <p:spPr>
+          <a:xfrm>
+            <a:off x="548640" y="4389120"/>
+            <a:ext cx="11064240" cy="1371600"/>
           </a:xfrm>
           <a:prstGeom prst="rect">
             <a:avLst/>
@@ -8258,13 +10648,13 @@
               </a:spcBef>
             </a:pPr>
             <a:r>
-              <a:rPr sz="1900" b="0" i="0">
+              <a:rPr sz="1800" b="0" i="0">
                 <a:solidFill>
                   <a:srgbClr val="0D2B4E"/>
                 </a:solidFill>
                 <a:latin typeface="Calibri"/>
               </a:rPr>
-              <a:t>When most people first use AI, they write a long detailed prompt at the start of every session:</a:t>
+              <a:t>Alumni intro emails written manually, one at a time. The newsletter that never gets done. Scheduling back-and-forth that takes more time than the meeting.</a:t>
             </a:r>
           </a:p>
           <a:p>
@@ -8274,77 +10664,13 @@
               </a:spcBef>
             </a:pPr>
             <a:r>
-              <a:rPr sz="1800" b="0" i="1">
-                <a:solidFill>
-                  <a:srgbClr val="88AACC"/>
-                </a:solidFill>
-                <a:latin typeface="Calibri"/>
-              </a:rPr>
-              <a:t>"I am the Executive Director of a university angel investment network. I evaluate seed-stage companies for potential investment. I produce 10-12 page diligence reports. I need you to..."</a:t>
-            </a:r>
-          </a:p>
-          <a:p>
-            <a:pPr>
-              <a:spcBef>
-                <a:spcPts val="600"/>
-              </a:spcBef>
-            </a:pPr>
-            <a:r>
-              <a:rPr sz="1900" b="0" i="0">
+              <a:rPr sz="1800" b="0" i="0">
                 <a:solidFill>
                   <a:srgbClr val="6B7280"/>
                 </a:solidFill>
                 <a:latin typeface="Calibri"/>
               </a:rPr>
-              <a:t>Every single time. Because Claude does not remember the last conversation. Every session starts from zero.</a:t>
-            </a:r>
-          </a:p>
-          <a:p>
-            <a:pPr>
-              <a:spcBef>
-                <a:spcPts val="600"/>
-              </a:spcBef>
-            </a:pPr>
-            <a:r>
-              <a:rPr sz="1900" b="1" i="0">
-                <a:solidFill>
-                  <a:srgbClr val="0D2B4E"/>
-                </a:solidFill>
-                <a:latin typeface="Calibri"/>
-              </a:rPr>
-              <a:t>That is the starting point. It is not where you end up.</a:t>
-            </a:r>
-          </a:p>
-          <a:p>
-            <a:pPr>
-              <a:spcBef>
-                <a:spcPts val="200"/>
-              </a:spcBef>
-            </a:pPr>
-            <a:r>
-              <a:rPr sz="600" b="0" i="0">
-                <a:solidFill>
-                  <a:srgbClr val="0D2B4E"/>
-                </a:solidFill>
-                <a:latin typeface="Calibri"/>
-              </a:rPr>
-              <a:t/>
-            </a:r>
-          </a:p>
-          <a:p>
-            <a:pPr>
-              <a:spcBef>
-                <a:spcPts val="600"/>
-              </a:spcBef>
-            </a:pPr>
-            <a:r>
-              <a:rPr sz="1900" b="0" i="0">
-                <a:solidFill>
-                  <a:srgbClr val="6B7280"/>
-                </a:solidFill>
-                <a:latin typeface="Calibri"/>
-              </a:rPr>
-              <a:t>There are three stages to how people work with AI. Most people stay at Stage 1. Today you are building Stage 2 -- and Stage 3 is where you are headed.</a:t>
+              <a:t>What changes: you type one line. Claude reads both alumni files, finds the specific connection angle, writes the intro in your voice. 15 minutes becomes 90 seconds.</a:t>
             </a:r>
           </a:p>
         </p:txBody>
